--- a/docs/content/05-teaching-resources/slides/core/10-processing-treatment-failure-and-testing.pptx
+++ b/docs/content/05-teaching-resources/slides/core/10-processing-treatment-failure-and-testing.pptx
@@ -8,12 +8,18 @@
     <p:sldId id="256" r:id="rId7"/>
     <p:sldId id="257" r:id="rId8"/>
     <p:sldId id="258" r:id="rId9"/>
-    <p:sldId id="259" r:id="rId11"/>
+    <p:sldId id="259" r:id="rId10"/>
     <p:sldId id="260" r:id="rId12"/>
     <p:sldId id="261" r:id="rId13"/>
     <p:sldId id="262" r:id="rId14"/>
     <p:sldId id="263" r:id="rId15"/>
     <p:sldId id="264" r:id="rId16"/>
+    <p:sldId id="265" r:id="rId17"/>
+    <p:sldId id="266" r:id="rId18"/>
+    <p:sldId id="267" r:id="rId19"/>
+    <p:sldId id="268" r:id="rId20"/>
+    <p:sldId id="269" r:id="rId21"/>
+    <p:sldId id="270" r:id="rId22"/>
   </p:sldIdLst>
   <p:sldSz cx="12191695" cy="6858000" type="screen4x3"/>
   <p:notesSz cx="6858000" cy="9144000"/>
@@ -580,7 +586,22 @@
           <a:lstStyle/>
           <a:p>
             <a:r>
-              <a:t>Give students a few minutes to answer on mini whiteboards or paper, then reveal the answers on the next slide.</a:t>
+              <a:t>Answers:</a:t>
+            </a:r>
+          </a:p>
+          <a:p>
+            <a:r>
+              <a:t>1. To reduce brittleness.</a:t>
+            </a:r>
+          </a:p>
+          <a:p>
+            <a:r>
+              <a:t>2. Softens the metal and relieves stress.</a:t>
+            </a:r>
+          </a:p>
+          <a:p>
+            <a:r>
+              <a:t>3. The zinc coating corrodes first.</a:t>
             </a:r>
           </a:p>
         </p:txBody>
@@ -650,7 +671,22 @@
           <a:lstStyle/>
           <a:p>
             <a:r>
-              <a:t>Talk through any answers the class found difficult.</a:t>
+              <a:t>Answers:</a:t>
+            </a:r>
+          </a:p>
+          <a:p>
+            <a:r>
+              <a:t>1. Failure from repeated loading below the breaking stress.</a:t>
+            </a:r>
+          </a:p>
+          <a:p>
+            <a:r>
+              <a:t>2. Under constant load, especially at high temperature.</a:t>
+            </a:r>
+          </a:p>
+          <a:p>
+            <a:r>
+              <a:t>3. A more reactive metal that corrodes instead of the protected part.</a:t>
             </a:r>
           </a:p>
         </p:txBody>
@@ -676,6 +712,231 @@
 </file>
 
 <file path=ppt/notesSlides/notesSlide4.xml><?xml version="1.0" encoding="utf-8"?>
+<p:notes xmlns:a="http://schemas.openxmlformats.org/drawingml/2006/main" xmlns:p="http://schemas.openxmlformats.org/presentationml/2006/main" xmlns:r="http://schemas.openxmlformats.org/officeDocument/2006/relationships">
+  <p:cSld>
+    <p:spTree>
+      <p:nvGrpSpPr>
+        <p:cNvPr id="1" name=""/>
+        <p:cNvGrpSpPr/>
+        <p:nvPr/>
+      </p:nvGrpSpPr>
+      <p:grpSpPr>
+        <a:xfrm>
+          <a:off x="0" y="0"/>
+          <a:ext cx="0" cy="0"/>
+          <a:chOff x="0" y="0"/>
+          <a:chExt cx="0" cy="0"/>
+        </a:xfrm>
+      </p:grpSpPr>
+      <p:sp>
+        <p:nvSpPr>
+          <p:cNvPr id="2" name="Slide Image Placeholder 1"/>
+          <p:cNvSpPr>
+            <a:spLocks noGrp="1"/>
+          </p:cNvSpPr>
+          <p:nvPr>
+            <p:ph type="sldImg" idx="2"/>
+          </p:nvPr>
+        </p:nvSpPr>
+        <p:spPr/>
+      </p:sp>
+      <p:sp>
+        <p:nvSpPr>
+          <p:cNvPr id="3" name="Notes Placeholder 2"/>
+          <p:cNvSpPr>
+            <a:spLocks noGrp="1"/>
+          </p:cNvSpPr>
+          <p:nvPr>
+            <p:ph type="body" idx="3" sz="quarter"/>
+          </p:nvPr>
+        </p:nvSpPr>
+        <p:spPr/>
+        <p:txBody>
+          <a:bodyPr/>
+          <a:lstStyle/>
+          <a:p>
+            <a:r>
+              <a:t>Answers:</a:t>
+            </a:r>
+          </a:p>
+          <a:p>
+            <a:r>
+              <a:t>1. Force / area.</a:t>
+            </a:r>
+          </a:p>
+          <a:p>
+            <a:r>
+              <a:t>2. Stiffness (stress / strain).</a:t>
+            </a:r>
+          </a:p>
+          <a:p>
+            <a:r>
+              <a:t>3. The sample narrowing before it fractures.</a:t>
+            </a:r>
+          </a:p>
+        </p:txBody>
+      </p:sp>
+      <p:sp>
+        <p:nvSpPr>
+          <p:cNvPr id="4" name="Slide Number Placeholder 3"/>
+          <p:cNvSpPr>
+            <a:spLocks noGrp="1"/>
+          </p:cNvSpPr>
+          <p:nvPr>
+            <p:ph type="sldNum" idx="5" sz="quarter"/>
+          </p:nvPr>
+        </p:nvSpPr>
+        <p:spPr/>
+      </p:sp>
+    </p:spTree>
+  </p:cSld>
+  <p:clrMapOvr>
+    <a:masterClrMapping/>
+  </p:clrMapOvr>
+</p:notes>
+</file>
+
+<file path=ppt/notesSlides/notesSlide5.xml><?xml version="1.0" encoding="utf-8"?>
+<p:notes xmlns:a="http://schemas.openxmlformats.org/drawingml/2006/main" xmlns:p="http://schemas.openxmlformats.org/presentationml/2006/main" xmlns:r="http://schemas.openxmlformats.org/officeDocument/2006/relationships">
+  <p:cSld>
+    <p:spTree>
+      <p:nvGrpSpPr>
+        <p:cNvPr id="1" name=""/>
+        <p:cNvGrpSpPr/>
+        <p:nvPr/>
+      </p:nvGrpSpPr>
+      <p:grpSpPr>
+        <a:xfrm>
+          <a:off x="0" y="0"/>
+          <a:ext cx="0" cy="0"/>
+          <a:chOff x="0" y="0"/>
+          <a:chExt cx="0" cy="0"/>
+        </a:xfrm>
+      </p:grpSpPr>
+      <p:sp>
+        <p:nvSpPr>
+          <p:cNvPr id="2" name="Slide Image Placeholder 1"/>
+          <p:cNvSpPr>
+            <a:spLocks noGrp="1"/>
+          </p:cNvSpPr>
+          <p:nvPr>
+            <p:ph type="sldImg" idx="2"/>
+          </p:nvPr>
+        </p:nvSpPr>
+        <p:spPr/>
+      </p:sp>
+      <p:sp>
+        <p:nvSpPr>
+          <p:cNvPr id="3" name="Notes Placeholder 2"/>
+          <p:cNvSpPr>
+            <a:spLocks noGrp="1"/>
+          </p:cNvSpPr>
+          <p:nvPr>
+            <p:ph type="body" idx="3" sz="quarter"/>
+          </p:nvPr>
+        </p:nvSpPr>
+        <p:spPr/>
+        <p:txBody>
+          <a:bodyPr/>
+          <a:lstStyle/>
+          <a:p>
+            <a:r>
+              <a:t>Give students a few minutes to answer on mini whiteboards or paper, then reveal the answers on the next slide.</a:t>
+            </a:r>
+          </a:p>
+        </p:txBody>
+      </p:sp>
+      <p:sp>
+        <p:nvSpPr>
+          <p:cNvPr id="4" name="Slide Number Placeholder 3"/>
+          <p:cNvSpPr>
+            <a:spLocks noGrp="1"/>
+          </p:cNvSpPr>
+          <p:nvPr>
+            <p:ph type="sldNum" idx="5" sz="quarter"/>
+          </p:nvPr>
+        </p:nvSpPr>
+        <p:spPr/>
+      </p:sp>
+    </p:spTree>
+  </p:cSld>
+  <p:clrMapOvr>
+    <a:masterClrMapping/>
+  </p:clrMapOvr>
+</p:notes>
+</file>
+
+<file path=ppt/notesSlides/notesSlide6.xml><?xml version="1.0" encoding="utf-8"?>
+<p:notes xmlns:a="http://schemas.openxmlformats.org/drawingml/2006/main" xmlns:p="http://schemas.openxmlformats.org/presentationml/2006/main" xmlns:r="http://schemas.openxmlformats.org/officeDocument/2006/relationships">
+  <p:cSld>
+    <p:spTree>
+      <p:nvGrpSpPr>
+        <p:cNvPr id="1" name=""/>
+        <p:cNvGrpSpPr/>
+        <p:nvPr/>
+      </p:nvGrpSpPr>
+      <p:grpSpPr>
+        <a:xfrm>
+          <a:off x="0" y="0"/>
+          <a:ext cx="0" cy="0"/>
+          <a:chOff x="0" y="0"/>
+          <a:chExt cx="0" cy="0"/>
+        </a:xfrm>
+      </p:grpSpPr>
+      <p:sp>
+        <p:nvSpPr>
+          <p:cNvPr id="2" name="Slide Image Placeholder 1"/>
+          <p:cNvSpPr>
+            <a:spLocks noGrp="1"/>
+          </p:cNvSpPr>
+          <p:nvPr>
+            <p:ph type="sldImg" idx="2"/>
+          </p:nvPr>
+        </p:nvSpPr>
+        <p:spPr/>
+      </p:sp>
+      <p:sp>
+        <p:nvSpPr>
+          <p:cNvPr id="3" name="Notes Placeholder 2"/>
+          <p:cNvSpPr>
+            <a:spLocks noGrp="1"/>
+          </p:cNvSpPr>
+          <p:nvPr>
+            <p:ph type="body" idx="3" sz="quarter"/>
+          </p:nvPr>
+        </p:nvSpPr>
+        <p:spPr/>
+        <p:txBody>
+          <a:bodyPr/>
+          <a:lstStyle/>
+          <a:p>
+            <a:r>
+              <a:t>Talk through any answers the class found difficult.</a:t>
+            </a:r>
+          </a:p>
+        </p:txBody>
+      </p:sp>
+      <p:sp>
+        <p:nvSpPr>
+          <p:cNvPr id="4" name="Slide Number Placeholder 3"/>
+          <p:cNvSpPr>
+            <a:spLocks noGrp="1"/>
+          </p:cNvSpPr>
+          <p:nvPr>
+            <p:ph type="sldNum" idx="5" sz="quarter"/>
+          </p:nvPr>
+        </p:nvSpPr>
+        <p:spPr/>
+      </p:sp>
+    </p:spTree>
+  </p:cSld>
+  <p:clrMapOvr>
+    <a:masterClrMapping/>
+  </p:clrMapOvr>
+</p:notes>
+</file>
+
+<file path=ppt/notesSlides/notesSlide7.xml><?xml version="1.0" encoding="utf-8"?>
 <p:notes xmlns:a="http://schemas.openxmlformats.org/drawingml/2006/main" xmlns:p="http://schemas.openxmlformats.org/presentationml/2006/main" xmlns:r="http://schemas.openxmlformats.org/officeDocument/2006/relationships">
   <p:cSld>
     <p:spTree>
@@ -4045,6 +4306,3297 @@
 </p:sld>
 </file>
 
+<file path=ppt/slides/slide10.xml><?xml version="1.0" encoding="utf-8"?>
+<p:sld xmlns:a="http://schemas.openxmlformats.org/drawingml/2006/main" xmlns:p="http://schemas.openxmlformats.org/presentationml/2006/main" xmlns:r="http://schemas.openxmlformats.org/officeDocument/2006/relationships">
+  <p:cSld>
+    <p:bg>
+      <p:bgPr>
+        <a:solidFill>
+          <a:srgbClr val="FFFFFF"/>
+        </a:solidFill>
+        <a:effectLst/>
+      </p:bgPr>
+    </p:bg>
+    <p:spTree>
+      <p:nvGrpSpPr>
+        <p:cNvPr id="1" name=""/>
+        <p:cNvGrpSpPr/>
+        <p:nvPr/>
+      </p:nvGrpSpPr>
+      <p:grpSpPr/>
+      <p:sp>
+        <p:nvSpPr>
+          <p:cNvPr id="2" name="TextBox 1"/>
+          <p:cNvSpPr txBox="1"/>
+          <p:nvPr/>
+        </p:nvSpPr>
+        <p:spPr>
+          <a:xfrm>
+            <a:off x="548640" y="320040"/>
+            <a:ext cx="11094415" cy="274320"/>
+          </a:xfrm>
+          <a:prstGeom prst="rect">
+            <a:avLst/>
+          </a:prstGeom>
+          <a:noFill/>
+        </p:spPr>
+        <p:txBody>
+          <a:bodyPr wrap="square" anchor="t" lIns="0" rIns="0" tIns="0" bIns="0"/>
+          <a:lstStyle/>
+          <a:p>
+            <a:pPr algn="l"/>
+            <a:r>
+              <a:rPr sz="1100" b="1" i="0">
+                <a:solidFill>
+                  <a:srgbClr val="54595D"/>
+                </a:solidFill>
+                <a:latin typeface="Calibri"/>
+              </a:rPr>
+              <a:t>ENGINEERING CORE  ·  Core topic 6</a:t>
+            </a:r>
+          </a:p>
+        </p:txBody>
+      </p:sp>
+      <p:sp>
+        <p:nvSpPr>
+          <p:cNvPr id="3" name="TextBox 2"/>
+          <p:cNvSpPr txBox="1"/>
+          <p:nvPr/>
+        </p:nvSpPr>
+        <p:spPr>
+          <a:xfrm>
+            <a:off x="548640" y="566928"/>
+            <a:ext cx="11094415" cy="822960"/>
+          </a:xfrm>
+          <a:prstGeom prst="rect">
+            <a:avLst/>
+          </a:prstGeom>
+          <a:noFill/>
+        </p:spPr>
+        <p:txBody>
+          <a:bodyPr wrap="square" anchor="ctr" lIns="0" rIns="0" tIns="0" bIns="0"/>
+          <a:lstStyle/>
+          <a:p>
+            <a:pPr algn="l"/>
+            <a:r>
+              <a:rPr sz="3200" b="1" i="0">
+                <a:solidFill>
+                  <a:srgbClr val="03306E"/>
+                </a:solidFill>
+                <a:latin typeface="Cambria"/>
+              </a:rPr>
+              <a:t>Tensile testing</a:t>
+            </a:r>
+          </a:p>
+        </p:txBody>
+      </p:sp>
+      <p:sp>
+        <p:nvSpPr>
+          <p:cNvPr id="4" name="TextBox 3"/>
+          <p:cNvSpPr txBox="1"/>
+          <p:nvPr/>
+        </p:nvSpPr>
+        <p:spPr>
+          <a:xfrm>
+            <a:off x="548640" y="6446520"/>
+            <a:ext cx="8229600" cy="274320"/>
+          </a:xfrm>
+          <a:prstGeom prst="rect">
+            <a:avLst/>
+          </a:prstGeom>
+          <a:noFill/>
+        </p:spPr>
+        <p:txBody>
+          <a:bodyPr wrap="square" anchor="t" lIns="0" rIns="0" tIns="0" bIns="0"/>
+          <a:lstStyle/>
+          <a:p>
+            <a:pPr algn="l"/>
+            <a:r>
+              <a:rPr sz="1000" b="0" i="0">
+                <a:solidFill>
+                  <a:srgbClr val="54595D"/>
+                </a:solidFill>
+                <a:latin typeface="Calibri"/>
+              </a:rPr>
+              <a:t>Design and Development for Engineering and Manufacturing T Level  ·  Material Processing, Treatment, Failure and Testing</a:t>
+            </a:r>
+          </a:p>
+        </p:txBody>
+      </p:sp>
+      <p:sp>
+        <p:nvSpPr>
+          <p:cNvPr id="5" name="TextBox 4"/>
+          <p:cNvSpPr txBox="1"/>
+          <p:nvPr/>
+        </p:nvSpPr>
+        <p:spPr>
+          <a:xfrm>
+            <a:off x="10728655" y="6446520"/>
+            <a:ext cx="914400" cy="274320"/>
+          </a:xfrm>
+          <a:prstGeom prst="rect">
+            <a:avLst/>
+          </a:prstGeom>
+          <a:noFill/>
+        </p:spPr>
+        <p:txBody>
+          <a:bodyPr wrap="square" anchor="t" lIns="0" rIns="0" tIns="0" bIns="0"/>
+          <a:lstStyle/>
+          <a:p>
+            <a:pPr algn="r"/>
+            <a:r>
+              <a:rPr sz="1000" b="0" i="0">
+                <a:solidFill>
+                  <a:srgbClr val="54595D"/>
+                </a:solidFill>
+                <a:latin typeface="Calibri"/>
+              </a:rPr>
+              <a:t>10</a:t>
+            </a:r>
+          </a:p>
+        </p:txBody>
+      </p:sp>
+      <p:graphicFrame>
+        <p:nvGraphicFramePr>
+          <p:cNvPr id="6" name="Table 5"/>
+          <p:cNvGraphicFramePr>
+            <a:graphicFrameLocks noGrp="1"/>
+          </p:cNvGraphicFramePr>
+          <p:nvPr/>
+        </p:nvGraphicFramePr>
+        <p:xfrm>
+          <a:off x="548640" y="1600200"/>
+          <a:ext cx="11094414" cy="3977640"/>
+        </p:xfrm>
+        <a:graphic>
+          <a:graphicData uri="http://schemas.openxmlformats.org/drawingml/2006/table">
+            <a:tbl>
+              <a:tblPr firstRow="1" bandRow="1">
+                <a:tableStyleId>{5C22544A-7EE6-4342-B048-85BDC9FD1C3A}</a:tableStyleId>
+              </a:tblPr>
+              <a:tblGrid>
+                <a:gridCol w="3354125"/>
+                <a:gridCol w="7740289"/>
+              </a:tblGrid>
+              <a:tr h="662940">
+                <a:tc>
+                  <a:txBody>
+                    <a:bodyPr wrap="square"/>
+                    <a:lstStyle/>
+                    <a:p>
+                      <a:r>
+                        <a:rPr sz="1600" b="1">
+                          <a:solidFill>
+                            <a:srgbClr val="FFFFFF"/>
+                          </a:solidFill>
+                          <a:latin typeface="Calibri"/>
+                        </a:rPr>
+                        <a:t>Quantity</a:t>
+                      </a:r>
+                    </a:p>
+                  </a:txBody>
+                  <a:tcPr marL="91440" marR="91440" anchor="ctr">
+                    <a:solidFill>
+                      <a:srgbClr val="03306E"/>
+                    </a:solidFill>
+                  </a:tcPr>
+                </a:tc>
+                <a:tc>
+                  <a:txBody>
+                    <a:bodyPr wrap="square"/>
+                    <a:lstStyle/>
+                    <a:p>
+                      <a:r>
+                        <a:rPr sz="1600" b="1">
+                          <a:solidFill>
+                            <a:srgbClr val="FFFFFF"/>
+                          </a:solidFill>
+                          <a:latin typeface="Calibri"/>
+                        </a:rPr>
+                        <a:t>Formula or meaning</a:t>
+                      </a:r>
+                    </a:p>
+                  </a:txBody>
+                  <a:tcPr marL="91440" marR="91440" anchor="ctr">
+                    <a:solidFill>
+                      <a:srgbClr val="03306E"/>
+                    </a:solidFill>
+                  </a:tcPr>
+                </a:tc>
+              </a:tr>
+              <a:tr h="662940">
+                <a:tc>
+                  <a:txBody>
+                    <a:bodyPr wrap="square"/>
+                    <a:lstStyle/>
+                    <a:p>
+                      <a:r>
+                        <a:rPr sz="1600" b="1">
+                          <a:solidFill>
+                            <a:srgbClr val="03306E"/>
+                          </a:solidFill>
+                          <a:latin typeface="Calibri"/>
+                        </a:rPr>
+                        <a:t>Stress</a:t>
+                      </a:r>
+                    </a:p>
+                  </a:txBody>
+                  <a:tcPr marL="91440" marR="91440" anchor="ctr">
+                    <a:solidFill>
+                      <a:srgbClr val="FFFFFF"/>
+                    </a:solidFill>
+                  </a:tcPr>
+                </a:tc>
+                <a:tc>
+                  <a:txBody>
+                    <a:bodyPr wrap="square"/>
+                    <a:lstStyle/>
+                    <a:p>
+                      <a:r>
+                        <a:rPr sz="1600" b="0">
+                          <a:solidFill>
+                            <a:srgbClr val="202122"/>
+                          </a:solidFill>
+                          <a:latin typeface="Calibri"/>
+                        </a:rPr>
+                        <a:t>Force / cross-sectional area (N per square metre, Pa)</a:t>
+                      </a:r>
+                    </a:p>
+                  </a:txBody>
+                  <a:tcPr marL="91440" marR="91440" anchor="ctr">
+                    <a:solidFill>
+                      <a:srgbClr val="FFFFFF"/>
+                    </a:solidFill>
+                  </a:tcPr>
+                </a:tc>
+              </a:tr>
+              <a:tr h="662940">
+                <a:tc>
+                  <a:txBody>
+                    <a:bodyPr wrap="square"/>
+                    <a:lstStyle/>
+                    <a:p>
+                      <a:r>
+                        <a:rPr sz="1600" b="1">
+                          <a:solidFill>
+                            <a:srgbClr val="03306E"/>
+                          </a:solidFill>
+                          <a:latin typeface="Calibri"/>
+                        </a:rPr>
+                        <a:t>Strain</a:t>
+                      </a:r>
+                    </a:p>
+                  </a:txBody>
+                  <a:tcPr marL="91440" marR="91440" anchor="ctr">
+                    <a:solidFill>
+                      <a:srgbClr val="EAF3FF"/>
+                    </a:solidFill>
+                  </a:tcPr>
+                </a:tc>
+                <a:tc>
+                  <a:txBody>
+                    <a:bodyPr wrap="square"/>
+                    <a:lstStyle/>
+                    <a:p>
+                      <a:r>
+                        <a:rPr sz="1600" b="0">
+                          <a:solidFill>
+                            <a:srgbClr val="202122"/>
+                          </a:solidFill>
+                          <a:latin typeface="Calibri"/>
+                        </a:rPr>
+                        <a:t>Extension / original length (no units)</a:t>
+                      </a:r>
+                    </a:p>
+                  </a:txBody>
+                  <a:tcPr marL="91440" marR="91440" anchor="ctr">
+                    <a:solidFill>
+                      <a:srgbClr val="EAF3FF"/>
+                    </a:solidFill>
+                  </a:tcPr>
+                </a:tc>
+              </a:tr>
+              <a:tr h="662940">
+                <a:tc>
+                  <a:txBody>
+                    <a:bodyPr wrap="square"/>
+                    <a:lstStyle/>
+                    <a:p>
+                      <a:r>
+                        <a:rPr sz="1600" b="1">
+                          <a:solidFill>
+                            <a:srgbClr val="03306E"/>
+                          </a:solidFill>
+                          <a:latin typeface="Calibri"/>
+                        </a:rPr>
+                        <a:t>Young's modulus</a:t>
+                      </a:r>
+                    </a:p>
+                  </a:txBody>
+                  <a:tcPr marL="91440" marR="91440" anchor="ctr">
+                    <a:solidFill>
+                      <a:srgbClr val="FFFFFF"/>
+                    </a:solidFill>
+                  </a:tcPr>
+                </a:tc>
+                <a:tc>
+                  <a:txBody>
+                    <a:bodyPr wrap="square"/>
+                    <a:lstStyle/>
+                    <a:p>
+                      <a:r>
+                        <a:rPr sz="1600" b="0">
+                          <a:solidFill>
+                            <a:srgbClr val="202122"/>
+                          </a:solidFill>
+                          <a:latin typeface="Calibri"/>
+                        </a:rPr>
+                        <a:t>Stress / strain, in the elastic region</a:t>
+                      </a:r>
+                    </a:p>
+                  </a:txBody>
+                  <a:tcPr marL="91440" marR="91440" anchor="ctr">
+                    <a:solidFill>
+                      <a:srgbClr val="FFFFFF"/>
+                    </a:solidFill>
+                  </a:tcPr>
+                </a:tc>
+              </a:tr>
+              <a:tr h="662940">
+                <a:tc>
+                  <a:txBody>
+                    <a:bodyPr wrap="square"/>
+                    <a:lstStyle/>
+                    <a:p>
+                      <a:r>
+                        <a:rPr sz="1600" b="1">
+                          <a:solidFill>
+                            <a:srgbClr val="03306E"/>
+                          </a:solidFill>
+                          <a:latin typeface="Calibri"/>
+                        </a:rPr>
+                        <a:t>Hooke's law</a:t>
+                      </a:r>
+                    </a:p>
+                  </a:txBody>
+                  <a:tcPr marL="91440" marR="91440" anchor="ctr">
+                    <a:solidFill>
+                      <a:srgbClr val="EAF3FF"/>
+                    </a:solidFill>
+                  </a:tcPr>
+                </a:tc>
+                <a:tc>
+                  <a:txBody>
+                    <a:bodyPr wrap="square"/>
+                    <a:lstStyle/>
+                    <a:p>
+                      <a:r>
+                        <a:rPr sz="1600" b="0">
+                          <a:solidFill>
+                            <a:srgbClr val="202122"/>
+                          </a:solidFill>
+                          <a:latin typeface="Calibri"/>
+                        </a:rPr>
+                        <a:t>Extension is proportional to load up to the limit of proportionality</a:t>
+                      </a:r>
+                    </a:p>
+                  </a:txBody>
+                  <a:tcPr marL="91440" marR="91440" anchor="ctr">
+                    <a:solidFill>
+                      <a:srgbClr val="EAF3FF"/>
+                    </a:solidFill>
+                  </a:tcPr>
+                </a:tc>
+              </a:tr>
+              <a:tr h="662940">
+                <a:tc>
+                  <a:txBody>
+                    <a:bodyPr wrap="square"/>
+                    <a:lstStyle/>
+                    <a:p>
+                      <a:r>
+                        <a:rPr sz="1600" b="1">
+                          <a:solidFill>
+                            <a:srgbClr val="03306E"/>
+                          </a:solidFill>
+                          <a:latin typeface="Calibri"/>
+                        </a:rPr>
+                        <a:t>Ultimate tensile strength</a:t>
+                      </a:r>
+                    </a:p>
+                  </a:txBody>
+                  <a:tcPr marL="91440" marR="91440" anchor="ctr">
+                    <a:solidFill>
+                      <a:srgbClr val="FFFFFF"/>
+                    </a:solidFill>
+                  </a:tcPr>
+                </a:tc>
+                <a:tc>
+                  <a:txBody>
+                    <a:bodyPr wrap="square"/>
+                    <a:lstStyle/>
+                    <a:p>
+                      <a:r>
+                        <a:rPr sz="1600" b="0">
+                          <a:solidFill>
+                            <a:srgbClr val="202122"/>
+                          </a:solidFill>
+                          <a:latin typeface="Calibri"/>
+                        </a:rPr>
+                        <a:t>The maximum stress before necking and fracture</a:t>
+                      </a:r>
+                    </a:p>
+                  </a:txBody>
+                  <a:tcPr marL="91440" marR="91440" anchor="ctr">
+                    <a:solidFill>
+                      <a:srgbClr val="FFFFFF"/>
+                    </a:solidFill>
+                  </a:tcPr>
+                </a:tc>
+              </a:tr>
+            </a:tbl>
+          </a:graphicData>
+        </a:graphic>
+      </p:graphicFrame>
+      <p:sp>
+        <p:nvSpPr>
+          <p:cNvPr id="7" name="TextBox 6"/>
+          <p:cNvSpPr txBox="1"/>
+          <p:nvPr/>
+        </p:nvSpPr>
+        <p:spPr>
+          <a:xfrm>
+            <a:off x="548640" y="5715000"/>
+            <a:ext cx="11094415" cy="457200"/>
+          </a:xfrm>
+          <a:prstGeom prst="rect">
+            <a:avLst/>
+          </a:prstGeom>
+          <a:noFill/>
+        </p:spPr>
+        <p:txBody>
+          <a:bodyPr wrap="square" anchor="t" lIns="0" rIns="0" tIns="0" bIns="0"/>
+          <a:lstStyle/>
+          <a:p>
+            <a:pPr algn="l"/>
+            <a:r>
+              <a:rPr sz="1300" b="0" i="1">
+                <a:solidFill>
+                  <a:srgbClr val="54595D"/>
+                </a:solidFill>
+                <a:latin typeface="Calibri"/>
+              </a:rPr>
+              <a:t>Other tests: visual, toughness (impact), hardness, corrosion, wear, fatigue (Wohler), conductivity.</a:t>
+            </a:r>
+          </a:p>
+        </p:txBody>
+      </p:sp>
+    </p:spTree>
+  </p:cSld>
+  <p:clrMapOvr>
+    <a:masterClrMapping/>
+  </p:clrMapOvr>
+</p:sld>
+</file>
+
+<file path=ppt/slides/slide11.xml><?xml version="1.0" encoding="utf-8"?>
+<p:sld xmlns:a="http://schemas.openxmlformats.org/drawingml/2006/main" xmlns:p="http://schemas.openxmlformats.org/presentationml/2006/main" xmlns:r="http://schemas.openxmlformats.org/officeDocument/2006/relationships">
+  <p:cSld>
+    <p:bg>
+      <p:bgPr>
+        <a:solidFill>
+          <a:srgbClr val="FFFFFF"/>
+        </a:solidFill>
+        <a:effectLst/>
+      </p:bgPr>
+    </p:bg>
+    <p:spTree>
+      <p:nvGrpSpPr>
+        <p:cNvPr id="1" name=""/>
+        <p:cNvGrpSpPr/>
+        <p:nvPr/>
+      </p:nvGrpSpPr>
+      <p:grpSpPr/>
+      <p:sp>
+        <p:nvSpPr>
+          <p:cNvPr id="2" name="TextBox 1"/>
+          <p:cNvSpPr txBox="1"/>
+          <p:nvPr/>
+        </p:nvSpPr>
+        <p:spPr>
+          <a:xfrm>
+            <a:off x="548640" y="320040"/>
+            <a:ext cx="11094415" cy="274320"/>
+          </a:xfrm>
+          <a:prstGeom prst="rect">
+            <a:avLst/>
+          </a:prstGeom>
+          <a:noFill/>
+        </p:spPr>
+        <p:txBody>
+          <a:bodyPr wrap="square" anchor="t" lIns="0" rIns="0" tIns="0" bIns="0"/>
+          <a:lstStyle/>
+          <a:p>
+            <a:pPr algn="l"/>
+            <a:r>
+              <a:rPr sz="1100" b="1" i="0">
+                <a:solidFill>
+                  <a:srgbClr val="54595D"/>
+                </a:solidFill>
+                <a:latin typeface="Calibri"/>
+              </a:rPr>
+              <a:t>ENGINEERING CORE  ·  Core topic 6</a:t>
+            </a:r>
+          </a:p>
+        </p:txBody>
+      </p:sp>
+      <p:sp>
+        <p:nvSpPr>
+          <p:cNvPr id="3" name="TextBox 2"/>
+          <p:cNvSpPr txBox="1"/>
+          <p:nvPr/>
+        </p:nvSpPr>
+        <p:spPr>
+          <a:xfrm>
+            <a:off x="548640" y="566928"/>
+            <a:ext cx="11094415" cy="822960"/>
+          </a:xfrm>
+          <a:prstGeom prst="rect">
+            <a:avLst/>
+          </a:prstGeom>
+          <a:noFill/>
+        </p:spPr>
+        <p:txBody>
+          <a:bodyPr wrap="square" anchor="ctr" lIns="0" rIns="0" tIns="0" bIns="0"/>
+          <a:lstStyle/>
+          <a:p>
+            <a:pPr algn="l"/>
+            <a:r>
+              <a:rPr sz="3200" b="1" i="0">
+                <a:solidFill>
+                  <a:srgbClr val="03306E"/>
+                </a:solidFill>
+                <a:latin typeface="Cambria"/>
+              </a:rPr>
+              <a:t>Quick check: Tensile testing</a:t>
+            </a:r>
+          </a:p>
+        </p:txBody>
+      </p:sp>
+      <p:sp>
+        <p:nvSpPr>
+          <p:cNvPr id="4" name="TextBox 3"/>
+          <p:cNvSpPr txBox="1"/>
+          <p:nvPr/>
+        </p:nvSpPr>
+        <p:spPr>
+          <a:xfrm>
+            <a:off x="548640" y="6446520"/>
+            <a:ext cx="8229600" cy="274320"/>
+          </a:xfrm>
+          <a:prstGeom prst="rect">
+            <a:avLst/>
+          </a:prstGeom>
+          <a:noFill/>
+        </p:spPr>
+        <p:txBody>
+          <a:bodyPr wrap="square" anchor="t" lIns="0" rIns="0" tIns="0" bIns="0"/>
+          <a:lstStyle/>
+          <a:p>
+            <a:pPr algn="l"/>
+            <a:r>
+              <a:rPr sz="1000" b="0" i="0">
+                <a:solidFill>
+                  <a:srgbClr val="54595D"/>
+                </a:solidFill>
+                <a:latin typeface="Calibri"/>
+              </a:rPr>
+              <a:t>Design and Development for Engineering and Manufacturing T Level  ·  Material Processing, Treatment, Failure and Testing</a:t>
+            </a:r>
+          </a:p>
+        </p:txBody>
+      </p:sp>
+      <p:sp>
+        <p:nvSpPr>
+          <p:cNvPr id="5" name="TextBox 4"/>
+          <p:cNvSpPr txBox="1"/>
+          <p:nvPr/>
+        </p:nvSpPr>
+        <p:spPr>
+          <a:xfrm>
+            <a:off x="10728655" y="6446520"/>
+            <a:ext cx="914400" cy="274320"/>
+          </a:xfrm>
+          <a:prstGeom prst="rect">
+            <a:avLst/>
+          </a:prstGeom>
+          <a:noFill/>
+        </p:spPr>
+        <p:txBody>
+          <a:bodyPr wrap="square" anchor="t" lIns="0" rIns="0" tIns="0" bIns="0"/>
+          <a:lstStyle/>
+          <a:p>
+            <a:pPr algn="r"/>
+            <a:r>
+              <a:rPr sz="1000" b="0" i="0">
+                <a:solidFill>
+                  <a:srgbClr val="54595D"/>
+                </a:solidFill>
+                <a:latin typeface="Calibri"/>
+              </a:rPr>
+              <a:t>11</a:t>
+            </a:r>
+          </a:p>
+        </p:txBody>
+      </p:sp>
+      <p:sp>
+        <p:nvSpPr>
+          <p:cNvPr id="6" name="Oval 5"/>
+          <p:cNvSpPr/>
+          <p:nvPr/>
+        </p:nvSpPr>
+        <p:spPr>
+          <a:xfrm>
+            <a:off x="548640" y="1691640"/>
+            <a:ext cx="502920" cy="502920"/>
+          </a:xfrm>
+          <a:prstGeom prst="ellipse">
+            <a:avLst/>
+          </a:prstGeom>
+          <a:solidFill>
+            <a:srgbClr val="F2B705"/>
+          </a:solidFill>
+          <a:ln>
+            <a:noFill/>
+          </a:ln>
+          <a:effectLst/>
+        </p:spPr>
+        <p:style>
+          <a:lnRef idx="1">
+            <a:schemeClr val="accent1"/>
+          </a:lnRef>
+          <a:fillRef idx="3">
+            <a:schemeClr val="accent1"/>
+          </a:fillRef>
+          <a:effectRef idx="2">
+            <a:schemeClr val="accent1"/>
+          </a:effectRef>
+          <a:fontRef idx="minor">
+            <a:schemeClr val="lt1"/>
+          </a:fontRef>
+        </p:style>
+        <p:txBody>
+          <a:bodyPr rtlCol="0" anchor="ctr" lIns="0" rIns="0" tIns="0" bIns="0"/>
+          <a:lstStyle/>
+          <a:p>
+            <a:pPr algn="ctr"/>
+            <a:r>
+              <a:rPr sz="1600" b="1">
+                <a:solidFill>
+                  <a:srgbClr val="202122"/>
+                </a:solidFill>
+                <a:latin typeface="Calibri"/>
+              </a:rPr>
+              <a:t>1</a:t>
+            </a:r>
+          </a:p>
+        </p:txBody>
+      </p:sp>
+      <p:sp>
+        <p:nvSpPr>
+          <p:cNvPr id="7" name="TextBox 6"/>
+          <p:cNvSpPr txBox="1"/>
+          <p:nvPr/>
+        </p:nvSpPr>
+        <p:spPr>
+          <a:xfrm>
+            <a:off x="1371600" y="1645920"/>
+            <a:ext cx="10271455" cy="1188720"/>
+          </a:xfrm>
+          <a:prstGeom prst="rect">
+            <a:avLst/>
+          </a:prstGeom>
+          <a:noFill/>
+        </p:spPr>
+        <p:txBody>
+          <a:bodyPr wrap="square" anchor="t" lIns="0" rIns="0" tIns="0" bIns="0"/>
+          <a:lstStyle/>
+          <a:p>
+            <a:pPr algn="l"/>
+            <a:r>
+              <a:rPr sz="2400" b="0" i="0">
+                <a:solidFill>
+                  <a:srgbClr val="202122"/>
+                </a:solidFill>
+                <a:latin typeface="Calibri"/>
+              </a:rPr>
+              <a:t>What is the formula for stress?</a:t>
+            </a:r>
+          </a:p>
+        </p:txBody>
+      </p:sp>
+      <p:sp>
+        <p:nvSpPr>
+          <p:cNvPr id="8" name="Oval 7"/>
+          <p:cNvSpPr/>
+          <p:nvPr/>
+        </p:nvSpPr>
+        <p:spPr>
+          <a:xfrm>
+            <a:off x="548640" y="3108960"/>
+            <a:ext cx="502920" cy="502920"/>
+          </a:xfrm>
+          <a:prstGeom prst="ellipse">
+            <a:avLst/>
+          </a:prstGeom>
+          <a:solidFill>
+            <a:srgbClr val="F2B705"/>
+          </a:solidFill>
+          <a:ln>
+            <a:noFill/>
+          </a:ln>
+          <a:effectLst/>
+        </p:spPr>
+        <p:style>
+          <a:lnRef idx="1">
+            <a:schemeClr val="accent1"/>
+          </a:lnRef>
+          <a:fillRef idx="3">
+            <a:schemeClr val="accent1"/>
+          </a:fillRef>
+          <a:effectRef idx="2">
+            <a:schemeClr val="accent1"/>
+          </a:effectRef>
+          <a:fontRef idx="minor">
+            <a:schemeClr val="lt1"/>
+          </a:fontRef>
+        </p:style>
+        <p:txBody>
+          <a:bodyPr rtlCol="0" anchor="ctr" lIns="0" rIns="0" tIns="0" bIns="0"/>
+          <a:lstStyle/>
+          <a:p>
+            <a:pPr algn="ctr"/>
+            <a:r>
+              <a:rPr sz="1600" b="1">
+                <a:solidFill>
+                  <a:srgbClr val="202122"/>
+                </a:solidFill>
+                <a:latin typeface="Calibri"/>
+              </a:rPr>
+              <a:t>2</a:t>
+            </a:r>
+          </a:p>
+        </p:txBody>
+      </p:sp>
+      <p:sp>
+        <p:nvSpPr>
+          <p:cNvPr id="9" name="TextBox 8"/>
+          <p:cNvSpPr txBox="1"/>
+          <p:nvPr/>
+        </p:nvSpPr>
+        <p:spPr>
+          <a:xfrm>
+            <a:off x="1371600" y="3063240"/>
+            <a:ext cx="10271455" cy="1188720"/>
+          </a:xfrm>
+          <a:prstGeom prst="rect">
+            <a:avLst/>
+          </a:prstGeom>
+          <a:noFill/>
+        </p:spPr>
+        <p:txBody>
+          <a:bodyPr wrap="square" anchor="t" lIns="0" rIns="0" tIns="0" bIns="0"/>
+          <a:lstStyle/>
+          <a:p>
+            <a:pPr algn="l"/>
+            <a:r>
+              <a:rPr sz="2400" b="0" i="0">
+                <a:solidFill>
+                  <a:srgbClr val="202122"/>
+                </a:solidFill>
+                <a:latin typeface="Calibri"/>
+              </a:rPr>
+              <a:t>What does Young's modulus measure?</a:t>
+            </a:r>
+          </a:p>
+        </p:txBody>
+      </p:sp>
+      <p:sp>
+        <p:nvSpPr>
+          <p:cNvPr id="10" name="Oval 9"/>
+          <p:cNvSpPr/>
+          <p:nvPr/>
+        </p:nvSpPr>
+        <p:spPr>
+          <a:xfrm>
+            <a:off x="548640" y="4526280"/>
+            <a:ext cx="502920" cy="502920"/>
+          </a:xfrm>
+          <a:prstGeom prst="ellipse">
+            <a:avLst/>
+          </a:prstGeom>
+          <a:solidFill>
+            <a:srgbClr val="F2B705"/>
+          </a:solidFill>
+          <a:ln>
+            <a:noFill/>
+          </a:ln>
+          <a:effectLst/>
+        </p:spPr>
+        <p:style>
+          <a:lnRef idx="1">
+            <a:schemeClr val="accent1"/>
+          </a:lnRef>
+          <a:fillRef idx="3">
+            <a:schemeClr val="accent1"/>
+          </a:fillRef>
+          <a:effectRef idx="2">
+            <a:schemeClr val="accent1"/>
+          </a:effectRef>
+          <a:fontRef idx="minor">
+            <a:schemeClr val="lt1"/>
+          </a:fontRef>
+        </p:style>
+        <p:txBody>
+          <a:bodyPr rtlCol="0" anchor="ctr" lIns="0" rIns="0" tIns="0" bIns="0"/>
+          <a:lstStyle/>
+          <a:p>
+            <a:pPr algn="ctr"/>
+            <a:r>
+              <a:rPr sz="1600" b="1">
+                <a:solidFill>
+                  <a:srgbClr val="202122"/>
+                </a:solidFill>
+                <a:latin typeface="Calibri"/>
+              </a:rPr>
+              <a:t>3</a:t>
+            </a:r>
+          </a:p>
+        </p:txBody>
+      </p:sp>
+      <p:sp>
+        <p:nvSpPr>
+          <p:cNvPr id="11" name="TextBox 10"/>
+          <p:cNvSpPr txBox="1"/>
+          <p:nvPr/>
+        </p:nvSpPr>
+        <p:spPr>
+          <a:xfrm>
+            <a:off x="1371600" y="4480560"/>
+            <a:ext cx="10271455" cy="1188720"/>
+          </a:xfrm>
+          <a:prstGeom prst="rect">
+            <a:avLst/>
+          </a:prstGeom>
+          <a:noFill/>
+        </p:spPr>
+        <p:txBody>
+          <a:bodyPr wrap="square" anchor="t" lIns="0" rIns="0" tIns="0" bIns="0"/>
+          <a:lstStyle/>
+          <a:p>
+            <a:pPr algn="l"/>
+            <a:r>
+              <a:rPr sz="2400" b="0" i="0">
+                <a:solidFill>
+                  <a:srgbClr val="202122"/>
+                </a:solidFill>
+                <a:latin typeface="Calibri"/>
+              </a:rPr>
+              <a:t>What is necking?</a:t>
+            </a:r>
+          </a:p>
+        </p:txBody>
+      </p:sp>
+      <p:sp>
+        <p:nvSpPr>
+          <p:cNvPr id="12" name="TextBox 11"/>
+          <p:cNvSpPr txBox="1"/>
+          <p:nvPr/>
+        </p:nvSpPr>
+        <p:spPr>
+          <a:xfrm>
+            <a:off x="548640" y="5852160"/>
+            <a:ext cx="11094415" cy="365760"/>
+          </a:xfrm>
+          <a:prstGeom prst="rect">
+            <a:avLst/>
+          </a:prstGeom>
+          <a:noFill/>
+        </p:spPr>
+        <p:txBody>
+          <a:bodyPr wrap="square" anchor="t" lIns="0" rIns="0" tIns="0" bIns="0"/>
+          <a:lstStyle/>
+          <a:p>
+            <a:pPr algn="l"/>
+            <a:r>
+              <a:rPr sz="1300" b="0" i="1">
+                <a:solidFill>
+                  <a:srgbClr val="54595D"/>
+                </a:solidFill>
+                <a:latin typeface="Calibri"/>
+              </a:rPr>
+              <a:t>Answer on mini whiteboards or in your book. Answers are in the speaker notes.</a:t>
+            </a:r>
+          </a:p>
+        </p:txBody>
+      </p:sp>
+    </p:spTree>
+  </p:cSld>
+  <p:clrMapOvr>
+    <a:masterClrMapping/>
+  </p:clrMapOvr>
+</p:sld>
+</file>
+
+<file path=ppt/slides/slide12.xml><?xml version="1.0" encoding="utf-8"?>
+<p:sld xmlns:a="http://schemas.openxmlformats.org/drawingml/2006/main" xmlns:p="http://schemas.openxmlformats.org/presentationml/2006/main" xmlns:r="http://schemas.openxmlformats.org/officeDocument/2006/relationships">
+  <p:cSld>
+    <p:bg>
+      <p:bgPr>
+        <a:solidFill>
+          <a:srgbClr val="FFFFFF"/>
+        </a:solidFill>
+        <a:effectLst/>
+      </p:bgPr>
+    </p:bg>
+    <p:spTree>
+      <p:nvGrpSpPr>
+        <p:cNvPr id="1" name=""/>
+        <p:cNvGrpSpPr/>
+        <p:nvPr/>
+      </p:nvGrpSpPr>
+      <p:grpSpPr/>
+      <p:sp>
+        <p:nvSpPr>
+          <p:cNvPr id="2" name="TextBox 1"/>
+          <p:cNvSpPr txBox="1"/>
+          <p:nvPr/>
+        </p:nvSpPr>
+        <p:spPr>
+          <a:xfrm>
+            <a:off x="548640" y="320040"/>
+            <a:ext cx="11094415" cy="274320"/>
+          </a:xfrm>
+          <a:prstGeom prst="rect">
+            <a:avLst/>
+          </a:prstGeom>
+          <a:noFill/>
+        </p:spPr>
+        <p:txBody>
+          <a:bodyPr wrap="square" anchor="t" lIns="0" rIns="0" tIns="0" bIns="0"/>
+          <a:lstStyle/>
+          <a:p>
+            <a:pPr algn="l"/>
+            <a:r>
+              <a:rPr sz="1100" b="1" i="0">
+                <a:solidFill>
+                  <a:srgbClr val="54595D"/>
+                </a:solidFill>
+                <a:latin typeface="Calibri"/>
+              </a:rPr>
+              <a:t>ENGINEERING CORE  ·  Core topic 6</a:t>
+            </a:r>
+          </a:p>
+        </p:txBody>
+      </p:sp>
+      <p:sp>
+        <p:nvSpPr>
+          <p:cNvPr id="3" name="TextBox 2"/>
+          <p:cNvSpPr txBox="1"/>
+          <p:nvPr/>
+        </p:nvSpPr>
+        <p:spPr>
+          <a:xfrm>
+            <a:off x="548640" y="566928"/>
+            <a:ext cx="11094415" cy="822960"/>
+          </a:xfrm>
+          <a:prstGeom prst="rect">
+            <a:avLst/>
+          </a:prstGeom>
+          <a:noFill/>
+        </p:spPr>
+        <p:txBody>
+          <a:bodyPr wrap="square" anchor="ctr" lIns="0" rIns="0" tIns="0" bIns="0"/>
+          <a:lstStyle/>
+          <a:p>
+            <a:pPr algn="l"/>
+            <a:r>
+              <a:rPr sz="3200" b="1" i="0">
+                <a:solidFill>
+                  <a:srgbClr val="03306E"/>
+                </a:solidFill>
+                <a:latin typeface="Cambria"/>
+              </a:rPr>
+              <a:t>Check your understanding</a:t>
+            </a:r>
+          </a:p>
+        </p:txBody>
+      </p:sp>
+      <p:sp>
+        <p:nvSpPr>
+          <p:cNvPr id="4" name="TextBox 3"/>
+          <p:cNvSpPr txBox="1"/>
+          <p:nvPr/>
+        </p:nvSpPr>
+        <p:spPr>
+          <a:xfrm>
+            <a:off x="548640" y="6446520"/>
+            <a:ext cx="8229600" cy="274320"/>
+          </a:xfrm>
+          <a:prstGeom prst="rect">
+            <a:avLst/>
+          </a:prstGeom>
+          <a:noFill/>
+        </p:spPr>
+        <p:txBody>
+          <a:bodyPr wrap="square" anchor="t" lIns="0" rIns="0" tIns="0" bIns="0"/>
+          <a:lstStyle/>
+          <a:p>
+            <a:pPr algn="l"/>
+            <a:r>
+              <a:rPr sz="1000" b="0" i="0">
+                <a:solidFill>
+                  <a:srgbClr val="54595D"/>
+                </a:solidFill>
+                <a:latin typeface="Calibri"/>
+              </a:rPr>
+              <a:t>Design and Development for Engineering and Manufacturing T Level  ·  Material Processing, Treatment, Failure and Testing</a:t>
+            </a:r>
+          </a:p>
+        </p:txBody>
+      </p:sp>
+      <p:sp>
+        <p:nvSpPr>
+          <p:cNvPr id="5" name="TextBox 4"/>
+          <p:cNvSpPr txBox="1"/>
+          <p:nvPr/>
+        </p:nvSpPr>
+        <p:spPr>
+          <a:xfrm>
+            <a:off x="10728655" y="6446520"/>
+            <a:ext cx="914400" cy="274320"/>
+          </a:xfrm>
+          <a:prstGeom prst="rect">
+            <a:avLst/>
+          </a:prstGeom>
+          <a:noFill/>
+        </p:spPr>
+        <p:txBody>
+          <a:bodyPr wrap="square" anchor="t" lIns="0" rIns="0" tIns="0" bIns="0"/>
+          <a:lstStyle/>
+          <a:p>
+            <a:pPr algn="r"/>
+            <a:r>
+              <a:rPr sz="1000" b="0" i="0">
+                <a:solidFill>
+                  <a:srgbClr val="54595D"/>
+                </a:solidFill>
+                <a:latin typeface="Calibri"/>
+              </a:rPr>
+              <a:t>12</a:t>
+            </a:r>
+          </a:p>
+        </p:txBody>
+      </p:sp>
+      <p:sp>
+        <p:nvSpPr>
+          <p:cNvPr id="6" name="Oval 5"/>
+          <p:cNvSpPr/>
+          <p:nvPr/>
+        </p:nvSpPr>
+        <p:spPr>
+          <a:xfrm>
+            <a:off x="548640" y="1618488"/>
+            <a:ext cx="411480" cy="411480"/>
+          </a:xfrm>
+          <a:prstGeom prst="ellipse">
+            <a:avLst/>
+          </a:prstGeom>
+          <a:solidFill>
+            <a:srgbClr val="F2B705"/>
+          </a:solidFill>
+          <a:ln>
+            <a:noFill/>
+          </a:ln>
+          <a:effectLst/>
+        </p:spPr>
+        <p:style>
+          <a:lnRef idx="1">
+            <a:schemeClr val="accent1"/>
+          </a:lnRef>
+          <a:fillRef idx="3">
+            <a:schemeClr val="accent1"/>
+          </a:fillRef>
+          <a:effectRef idx="2">
+            <a:schemeClr val="accent1"/>
+          </a:effectRef>
+          <a:fontRef idx="minor">
+            <a:schemeClr val="lt1"/>
+          </a:fontRef>
+        </p:style>
+        <p:txBody>
+          <a:bodyPr rtlCol="0" anchor="ctr" lIns="0" rIns="0" tIns="0" bIns="0"/>
+          <a:lstStyle/>
+          <a:p>
+            <a:pPr algn="ctr"/>
+            <a:r>
+              <a:rPr sz="1400" b="1">
+                <a:solidFill>
+                  <a:srgbClr val="202122"/>
+                </a:solidFill>
+                <a:latin typeface="Calibri"/>
+              </a:rPr>
+              <a:t>1</a:t>
+            </a:r>
+          </a:p>
+        </p:txBody>
+      </p:sp>
+      <p:sp>
+        <p:nvSpPr>
+          <p:cNvPr id="7" name="TextBox 6"/>
+          <p:cNvSpPr txBox="1"/>
+          <p:nvPr/>
+        </p:nvSpPr>
+        <p:spPr>
+          <a:xfrm>
+            <a:off x="1234440" y="1600200"/>
+            <a:ext cx="10408615" cy="1030986"/>
+          </a:xfrm>
+          <a:prstGeom prst="rect">
+            <a:avLst/>
+          </a:prstGeom>
+          <a:noFill/>
+        </p:spPr>
+        <p:txBody>
+          <a:bodyPr wrap="square" anchor="t" lIns="0" rIns="0" tIns="0" bIns="0"/>
+          <a:lstStyle/>
+          <a:p>
+            <a:pPr algn="l"/>
+            <a:r>
+              <a:rPr sz="2200" b="0" i="0">
+                <a:solidFill>
+                  <a:srgbClr val="202122"/>
+                </a:solidFill>
+                <a:latin typeface="Calibri"/>
+              </a:rPr>
+              <a:t>What is fatigue failure?</a:t>
+            </a:r>
+          </a:p>
+        </p:txBody>
+      </p:sp>
+      <p:sp>
+        <p:nvSpPr>
+          <p:cNvPr id="8" name="Oval 7"/>
+          <p:cNvSpPr/>
+          <p:nvPr/>
+        </p:nvSpPr>
+        <p:spPr>
+          <a:xfrm>
+            <a:off x="548640" y="2814066"/>
+            <a:ext cx="411480" cy="411480"/>
+          </a:xfrm>
+          <a:prstGeom prst="ellipse">
+            <a:avLst/>
+          </a:prstGeom>
+          <a:solidFill>
+            <a:srgbClr val="F2B705"/>
+          </a:solidFill>
+          <a:ln>
+            <a:noFill/>
+          </a:ln>
+          <a:effectLst/>
+        </p:spPr>
+        <p:style>
+          <a:lnRef idx="1">
+            <a:schemeClr val="accent1"/>
+          </a:lnRef>
+          <a:fillRef idx="3">
+            <a:schemeClr val="accent1"/>
+          </a:fillRef>
+          <a:effectRef idx="2">
+            <a:schemeClr val="accent1"/>
+          </a:effectRef>
+          <a:fontRef idx="minor">
+            <a:schemeClr val="lt1"/>
+          </a:fontRef>
+        </p:style>
+        <p:txBody>
+          <a:bodyPr rtlCol="0" anchor="ctr" lIns="0" rIns="0" tIns="0" bIns="0"/>
+          <a:lstStyle/>
+          <a:p>
+            <a:pPr algn="ctr"/>
+            <a:r>
+              <a:rPr sz="1400" b="1">
+                <a:solidFill>
+                  <a:srgbClr val="202122"/>
+                </a:solidFill>
+                <a:latin typeface="Calibri"/>
+              </a:rPr>
+              <a:t>2</a:t>
+            </a:r>
+          </a:p>
+        </p:txBody>
+      </p:sp>
+      <p:sp>
+        <p:nvSpPr>
+          <p:cNvPr id="9" name="TextBox 8"/>
+          <p:cNvSpPr txBox="1"/>
+          <p:nvPr/>
+        </p:nvSpPr>
+        <p:spPr>
+          <a:xfrm>
+            <a:off x="1234440" y="2795778"/>
+            <a:ext cx="10408615" cy="1030986"/>
+          </a:xfrm>
+          <a:prstGeom prst="rect">
+            <a:avLst/>
+          </a:prstGeom>
+          <a:noFill/>
+        </p:spPr>
+        <p:txBody>
+          <a:bodyPr wrap="square" anchor="t" lIns="0" rIns="0" tIns="0" bIns="0"/>
+          <a:lstStyle/>
+          <a:p>
+            <a:pPr algn="l"/>
+            <a:r>
+              <a:rPr sz="2200" b="0" i="0">
+                <a:solidFill>
+                  <a:srgbClr val="202122"/>
+                </a:solidFill>
+                <a:latin typeface="Calibri"/>
+              </a:rPr>
+              <a:t>A 1,000 N force acts on 0.0001 square metres. What is the stress?</a:t>
+            </a:r>
+          </a:p>
+        </p:txBody>
+      </p:sp>
+      <p:sp>
+        <p:nvSpPr>
+          <p:cNvPr id="10" name="Oval 9"/>
+          <p:cNvSpPr/>
+          <p:nvPr/>
+        </p:nvSpPr>
+        <p:spPr>
+          <a:xfrm>
+            <a:off x="548640" y="4009644"/>
+            <a:ext cx="411480" cy="411480"/>
+          </a:xfrm>
+          <a:prstGeom prst="ellipse">
+            <a:avLst/>
+          </a:prstGeom>
+          <a:solidFill>
+            <a:srgbClr val="F2B705"/>
+          </a:solidFill>
+          <a:ln>
+            <a:noFill/>
+          </a:ln>
+          <a:effectLst/>
+        </p:spPr>
+        <p:style>
+          <a:lnRef idx="1">
+            <a:schemeClr val="accent1"/>
+          </a:lnRef>
+          <a:fillRef idx="3">
+            <a:schemeClr val="accent1"/>
+          </a:fillRef>
+          <a:effectRef idx="2">
+            <a:schemeClr val="accent1"/>
+          </a:effectRef>
+          <a:fontRef idx="minor">
+            <a:schemeClr val="lt1"/>
+          </a:fontRef>
+        </p:style>
+        <p:txBody>
+          <a:bodyPr rtlCol="0" anchor="ctr" lIns="0" rIns="0" tIns="0" bIns="0"/>
+          <a:lstStyle/>
+          <a:p>
+            <a:pPr algn="ctr"/>
+            <a:r>
+              <a:rPr sz="1400" b="1">
+                <a:solidFill>
+                  <a:srgbClr val="202122"/>
+                </a:solidFill>
+                <a:latin typeface="Calibri"/>
+              </a:rPr>
+              <a:t>3</a:t>
+            </a:r>
+          </a:p>
+        </p:txBody>
+      </p:sp>
+      <p:sp>
+        <p:nvSpPr>
+          <p:cNvPr id="11" name="TextBox 10"/>
+          <p:cNvSpPr txBox="1"/>
+          <p:nvPr/>
+        </p:nvSpPr>
+        <p:spPr>
+          <a:xfrm>
+            <a:off x="1234440" y="3991356"/>
+            <a:ext cx="10408615" cy="1030986"/>
+          </a:xfrm>
+          <a:prstGeom prst="rect">
+            <a:avLst/>
+          </a:prstGeom>
+          <a:noFill/>
+        </p:spPr>
+        <p:txBody>
+          <a:bodyPr wrap="square" anchor="t" lIns="0" rIns="0" tIns="0" bIns="0"/>
+          <a:lstStyle/>
+          <a:p>
+            <a:pPr algn="l"/>
+            <a:r>
+              <a:rPr sz="2200" b="0" i="0">
+                <a:solidFill>
+                  <a:srgbClr val="202122"/>
+                </a:solidFill>
+                <a:latin typeface="Calibri"/>
+              </a:rPr>
+              <a:t>A 2 m bar stretches 1 mm. What is the strain?</a:t>
+            </a:r>
+          </a:p>
+        </p:txBody>
+      </p:sp>
+      <p:sp>
+        <p:nvSpPr>
+          <p:cNvPr id="12" name="Oval 11"/>
+          <p:cNvSpPr/>
+          <p:nvPr/>
+        </p:nvSpPr>
+        <p:spPr>
+          <a:xfrm>
+            <a:off x="548640" y="5205221"/>
+            <a:ext cx="411480" cy="411480"/>
+          </a:xfrm>
+          <a:prstGeom prst="ellipse">
+            <a:avLst/>
+          </a:prstGeom>
+          <a:solidFill>
+            <a:srgbClr val="F2B705"/>
+          </a:solidFill>
+          <a:ln>
+            <a:noFill/>
+          </a:ln>
+          <a:effectLst/>
+        </p:spPr>
+        <p:style>
+          <a:lnRef idx="1">
+            <a:schemeClr val="accent1"/>
+          </a:lnRef>
+          <a:fillRef idx="3">
+            <a:schemeClr val="accent1"/>
+          </a:fillRef>
+          <a:effectRef idx="2">
+            <a:schemeClr val="accent1"/>
+          </a:effectRef>
+          <a:fontRef idx="minor">
+            <a:schemeClr val="lt1"/>
+          </a:fontRef>
+        </p:style>
+        <p:txBody>
+          <a:bodyPr rtlCol="0" anchor="ctr" lIns="0" rIns="0" tIns="0" bIns="0"/>
+          <a:lstStyle/>
+          <a:p>
+            <a:pPr algn="ctr"/>
+            <a:r>
+              <a:rPr sz="1400" b="1">
+                <a:solidFill>
+                  <a:srgbClr val="202122"/>
+                </a:solidFill>
+                <a:latin typeface="Calibri"/>
+              </a:rPr>
+              <a:t>4</a:t>
+            </a:r>
+          </a:p>
+        </p:txBody>
+      </p:sp>
+      <p:sp>
+        <p:nvSpPr>
+          <p:cNvPr id="13" name="TextBox 12"/>
+          <p:cNvSpPr txBox="1"/>
+          <p:nvPr/>
+        </p:nvSpPr>
+        <p:spPr>
+          <a:xfrm>
+            <a:off x="1234440" y="5186933"/>
+            <a:ext cx="10408615" cy="1030986"/>
+          </a:xfrm>
+          <a:prstGeom prst="rect">
+            <a:avLst/>
+          </a:prstGeom>
+          <a:noFill/>
+        </p:spPr>
+        <p:txBody>
+          <a:bodyPr wrap="square" anchor="t" lIns="0" rIns="0" tIns="0" bIns="0"/>
+          <a:lstStyle/>
+          <a:p>
+            <a:pPr algn="l"/>
+            <a:r>
+              <a:rPr sz="2200" b="0" i="0">
+                <a:solidFill>
+                  <a:srgbClr val="202122"/>
+                </a:solidFill>
+                <a:latin typeface="Calibri"/>
+              </a:rPr>
+              <a:t>Why temper after quench hardening?</a:t>
+            </a:r>
+          </a:p>
+        </p:txBody>
+      </p:sp>
+    </p:spTree>
+  </p:cSld>
+  <p:clrMapOvr>
+    <a:masterClrMapping/>
+  </p:clrMapOvr>
+</p:sld>
+</file>
+
+<file path=ppt/slides/slide13.xml><?xml version="1.0" encoding="utf-8"?>
+<p:sld xmlns:a="http://schemas.openxmlformats.org/drawingml/2006/main" xmlns:p="http://schemas.openxmlformats.org/presentationml/2006/main" xmlns:r="http://schemas.openxmlformats.org/officeDocument/2006/relationships">
+  <p:cSld>
+    <p:bg>
+      <p:bgPr>
+        <a:solidFill>
+          <a:srgbClr val="FFFFFF"/>
+        </a:solidFill>
+        <a:effectLst/>
+      </p:bgPr>
+    </p:bg>
+    <p:spTree>
+      <p:nvGrpSpPr>
+        <p:cNvPr id="1" name=""/>
+        <p:cNvGrpSpPr/>
+        <p:nvPr/>
+      </p:nvGrpSpPr>
+      <p:grpSpPr/>
+      <p:sp>
+        <p:nvSpPr>
+          <p:cNvPr id="2" name="TextBox 1"/>
+          <p:cNvSpPr txBox="1"/>
+          <p:nvPr/>
+        </p:nvSpPr>
+        <p:spPr>
+          <a:xfrm>
+            <a:off x="548640" y="320040"/>
+            <a:ext cx="11094415" cy="274320"/>
+          </a:xfrm>
+          <a:prstGeom prst="rect">
+            <a:avLst/>
+          </a:prstGeom>
+          <a:noFill/>
+        </p:spPr>
+        <p:txBody>
+          <a:bodyPr wrap="square" anchor="t" lIns="0" rIns="0" tIns="0" bIns="0"/>
+          <a:lstStyle/>
+          <a:p>
+            <a:pPr algn="l"/>
+            <a:r>
+              <a:rPr sz="1100" b="1" i="0">
+                <a:solidFill>
+                  <a:srgbClr val="54595D"/>
+                </a:solidFill>
+                <a:latin typeface="Calibri"/>
+              </a:rPr>
+              <a:t>ENGINEERING CORE  ·  Core topic 6</a:t>
+            </a:r>
+          </a:p>
+        </p:txBody>
+      </p:sp>
+      <p:sp>
+        <p:nvSpPr>
+          <p:cNvPr id="3" name="TextBox 2"/>
+          <p:cNvSpPr txBox="1"/>
+          <p:nvPr/>
+        </p:nvSpPr>
+        <p:spPr>
+          <a:xfrm>
+            <a:off x="548640" y="566928"/>
+            <a:ext cx="11094415" cy="822960"/>
+          </a:xfrm>
+          <a:prstGeom prst="rect">
+            <a:avLst/>
+          </a:prstGeom>
+          <a:noFill/>
+        </p:spPr>
+        <p:txBody>
+          <a:bodyPr wrap="square" anchor="ctr" lIns="0" rIns="0" tIns="0" bIns="0"/>
+          <a:lstStyle/>
+          <a:p>
+            <a:pPr algn="l"/>
+            <a:r>
+              <a:rPr sz="3200" b="1" i="0">
+                <a:solidFill>
+                  <a:srgbClr val="03306E"/>
+                </a:solidFill>
+                <a:latin typeface="Cambria"/>
+              </a:rPr>
+              <a:t>Answers</a:t>
+            </a:r>
+          </a:p>
+        </p:txBody>
+      </p:sp>
+      <p:sp>
+        <p:nvSpPr>
+          <p:cNvPr id="4" name="TextBox 3"/>
+          <p:cNvSpPr txBox="1"/>
+          <p:nvPr/>
+        </p:nvSpPr>
+        <p:spPr>
+          <a:xfrm>
+            <a:off x="548640" y="6446520"/>
+            <a:ext cx="8229600" cy="274320"/>
+          </a:xfrm>
+          <a:prstGeom prst="rect">
+            <a:avLst/>
+          </a:prstGeom>
+          <a:noFill/>
+        </p:spPr>
+        <p:txBody>
+          <a:bodyPr wrap="square" anchor="t" lIns="0" rIns="0" tIns="0" bIns="0"/>
+          <a:lstStyle/>
+          <a:p>
+            <a:pPr algn="l"/>
+            <a:r>
+              <a:rPr sz="1000" b="0" i="0">
+                <a:solidFill>
+                  <a:srgbClr val="54595D"/>
+                </a:solidFill>
+                <a:latin typeface="Calibri"/>
+              </a:rPr>
+              <a:t>Design and Development for Engineering and Manufacturing T Level  ·  Material Processing, Treatment, Failure and Testing</a:t>
+            </a:r>
+          </a:p>
+        </p:txBody>
+      </p:sp>
+      <p:sp>
+        <p:nvSpPr>
+          <p:cNvPr id="5" name="TextBox 4"/>
+          <p:cNvSpPr txBox="1"/>
+          <p:nvPr/>
+        </p:nvSpPr>
+        <p:spPr>
+          <a:xfrm>
+            <a:off x="10728655" y="6446520"/>
+            <a:ext cx="914400" cy="274320"/>
+          </a:xfrm>
+          <a:prstGeom prst="rect">
+            <a:avLst/>
+          </a:prstGeom>
+          <a:noFill/>
+        </p:spPr>
+        <p:txBody>
+          <a:bodyPr wrap="square" anchor="t" lIns="0" rIns="0" tIns="0" bIns="0"/>
+          <a:lstStyle/>
+          <a:p>
+            <a:pPr algn="r"/>
+            <a:r>
+              <a:rPr sz="1000" b="0" i="0">
+                <a:solidFill>
+                  <a:srgbClr val="54595D"/>
+                </a:solidFill>
+                <a:latin typeface="Calibri"/>
+              </a:rPr>
+              <a:t>13</a:t>
+            </a:r>
+          </a:p>
+        </p:txBody>
+      </p:sp>
+      <p:sp>
+        <p:nvSpPr>
+          <p:cNvPr id="6" name="Oval 5"/>
+          <p:cNvSpPr/>
+          <p:nvPr/>
+        </p:nvSpPr>
+        <p:spPr>
+          <a:xfrm>
+            <a:off x="548640" y="1618488"/>
+            <a:ext cx="411480" cy="411480"/>
+          </a:xfrm>
+          <a:prstGeom prst="ellipse">
+            <a:avLst/>
+          </a:prstGeom>
+          <a:solidFill>
+            <a:srgbClr val="F2B705"/>
+          </a:solidFill>
+          <a:ln>
+            <a:noFill/>
+          </a:ln>
+          <a:effectLst/>
+        </p:spPr>
+        <p:style>
+          <a:lnRef idx="1">
+            <a:schemeClr val="accent1"/>
+          </a:lnRef>
+          <a:fillRef idx="3">
+            <a:schemeClr val="accent1"/>
+          </a:fillRef>
+          <a:effectRef idx="2">
+            <a:schemeClr val="accent1"/>
+          </a:effectRef>
+          <a:fontRef idx="minor">
+            <a:schemeClr val="lt1"/>
+          </a:fontRef>
+        </p:style>
+        <p:txBody>
+          <a:bodyPr rtlCol="0" anchor="ctr" lIns="0" rIns="0" tIns="0" bIns="0"/>
+          <a:lstStyle/>
+          <a:p>
+            <a:pPr algn="ctr"/>
+            <a:r>
+              <a:rPr sz="1400" b="1">
+                <a:solidFill>
+                  <a:srgbClr val="202122"/>
+                </a:solidFill>
+                <a:latin typeface="Calibri"/>
+              </a:rPr>
+              <a:t>1</a:t>
+            </a:r>
+          </a:p>
+        </p:txBody>
+      </p:sp>
+      <p:sp>
+        <p:nvSpPr>
+          <p:cNvPr id="7" name="TextBox 6"/>
+          <p:cNvSpPr txBox="1"/>
+          <p:nvPr/>
+        </p:nvSpPr>
+        <p:spPr>
+          <a:xfrm>
+            <a:off x="1234440" y="1600200"/>
+            <a:ext cx="10408615" cy="1030986"/>
+          </a:xfrm>
+          <a:prstGeom prst="rect">
+            <a:avLst/>
+          </a:prstGeom>
+          <a:noFill/>
+        </p:spPr>
+        <p:txBody>
+          <a:bodyPr wrap="square" anchor="t" lIns="0" rIns="0" tIns="0" bIns="0"/>
+          <a:lstStyle/>
+          <a:p>
+            <a:pPr algn="l"/>
+            <a:r>
+              <a:rPr sz="1800" b="0" i="0">
+                <a:solidFill>
+                  <a:srgbClr val="54595D"/>
+                </a:solidFill>
+                <a:latin typeface="Calibri"/>
+              </a:rPr>
+              <a:t>What is fatigue failure?</a:t>
+            </a:r>
+          </a:p>
+          <a:p>
+            <a:r>
+              <a:rPr sz="1800" b="1">
+                <a:solidFill>
+                  <a:srgbClr val="03306E"/>
+                </a:solidFill>
+                <a:latin typeface="Calibri"/>
+              </a:rPr>
+              <a:t>Failure caused by repeated cyclic loading below the ultimate strength.</a:t>
+            </a:r>
+          </a:p>
+        </p:txBody>
+      </p:sp>
+      <p:sp>
+        <p:nvSpPr>
+          <p:cNvPr id="8" name="Oval 7"/>
+          <p:cNvSpPr/>
+          <p:nvPr/>
+        </p:nvSpPr>
+        <p:spPr>
+          <a:xfrm>
+            <a:off x="548640" y="2814066"/>
+            <a:ext cx="411480" cy="411480"/>
+          </a:xfrm>
+          <a:prstGeom prst="ellipse">
+            <a:avLst/>
+          </a:prstGeom>
+          <a:solidFill>
+            <a:srgbClr val="F2B705"/>
+          </a:solidFill>
+          <a:ln>
+            <a:noFill/>
+          </a:ln>
+          <a:effectLst/>
+        </p:spPr>
+        <p:style>
+          <a:lnRef idx="1">
+            <a:schemeClr val="accent1"/>
+          </a:lnRef>
+          <a:fillRef idx="3">
+            <a:schemeClr val="accent1"/>
+          </a:fillRef>
+          <a:effectRef idx="2">
+            <a:schemeClr val="accent1"/>
+          </a:effectRef>
+          <a:fontRef idx="minor">
+            <a:schemeClr val="lt1"/>
+          </a:fontRef>
+        </p:style>
+        <p:txBody>
+          <a:bodyPr rtlCol="0" anchor="ctr" lIns="0" rIns="0" tIns="0" bIns="0"/>
+          <a:lstStyle/>
+          <a:p>
+            <a:pPr algn="ctr"/>
+            <a:r>
+              <a:rPr sz="1400" b="1">
+                <a:solidFill>
+                  <a:srgbClr val="202122"/>
+                </a:solidFill>
+                <a:latin typeface="Calibri"/>
+              </a:rPr>
+              <a:t>2</a:t>
+            </a:r>
+          </a:p>
+        </p:txBody>
+      </p:sp>
+      <p:sp>
+        <p:nvSpPr>
+          <p:cNvPr id="9" name="TextBox 8"/>
+          <p:cNvSpPr txBox="1"/>
+          <p:nvPr/>
+        </p:nvSpPr>
+        <p:spPr>
+          <a:xfrm>
+            <a:off x="1234440" y="2795778"/>
+            <a:ext cx="10408615" cy="1030986"/>
+          </a:xfrm>
+          <a:prstGeom prst="rect">
+            <a:avLst/>
+          </a:prstGeom>
+          <a:noFill/>
+        </p:spPr>
+        <p:txBody>
+          <a:bodyPr wrap="square" anchor="t" lIns="0" rIns="0" tIns="0" bIns="0"/>
+          <a:lstStyle/>
+          <a:p>
+            <a:pPr algn="l"/>
+            <a:r>
+              <a:rPr sz="1800" b="0" i="0">
+                <a:solidFill>
+                  <a:srgbClr val="54595D"/>
+                </a:solidFill>
+                <a:latin typeface="Calibri"/>
+              </a:rPr>
+              <a:t>A 1,000 N force acts on 0.0001 square metres. What is the stress?</a:t>
+            </a:r>
+          </a:p>
+          <a:p>
+            <a:r>
+              <a:rPr sz="1800" b="1">
+                <a:solidFill>
+                  <a:srgbClr val="03306E"/>
+                </a:solidFill>
+                <a:latin typeface="Calibri"/>
+              </a:rPr>
+              <a:t>10,000,000 Pa (10 MPa).</a:t>
+            </a:r>
+          </a:p>
+        </p:txBody>
+      </p:sp>
+      <p:sp>
+        <p:nvSpPr>
+          <p:cNvPr id="10" name="Oval 9"/>
+          <p:cNvSpPr/>
+          <p:nvPr/>
+        </p:nvSpPr>
+        <p:spPr>
+          <a:xfrm>
+            <a:off x="548640" y="4009644"/>
+            <a:ext cx="411480" cy="411480"/>
+          </a:xfrm>
+          <a:prstGeom prst="ellipse">
+            <a:avLst/>
+          </a:prstGeom>
+          <a:solidFill>
+            <a:srgbClr val="F2B705"/>
+          </a:solidFill>
+          <a:ln>
+            <a:noFill/>
+          </a:ln>
+          <a:effectLst/>
+        </p:spPr>
+        <p:style>
+          <a:lnRef idx="1">
+            <a:schemeClr val="accent1"/>
+          </a:lnRef>
+          <a:fillRef idx="3">
+            <a:schemeClr val="accent1"/>
+          </a:fillRef>
+          <a:effectRef idx="2">
+            <a:schemeClr val="accent1"/>
+          </a:effectRef>
+          <a:fontRef idx="minor">
+            <a:schemeClr val="lt1"/>
+          </a:fontRef>
+        </p:style>
+        <p:txBody>
+          <a:bodyPr rtlCol="0" anchor="ctr" lIns="0" rIns="0" tIns="0" bIns="0"/>
+          <a:lstStyle/>
+          <a:p>
+            <a:pPr algn="ctr"/>
+            <a:r>
+              <a:rPr sz="1400" b="1">
+                <a:solidFill>
+                  <a:srgbClr val="202122"/>
+                </a:solidFill>
+                <a:latin typeface="Calibri"/>
+              </a:rPr>
+              <a:t>3</a:t>
+            </a:r>
+          </a:p>
+        </p:txBody>
+      </p:sp>
+      <p:sp>
+        <p:nvSpPr>
+          <p:cNvPr id="11" name="TextBox 10"/>
+          <p:cNvSpPr txBox="1"/>
+          <p:nvPr/>
+        </p:nvSpPr>
+        <p:spPr>
+          <a:xfrm>
+            <a:off x="1234440" y="3991356"/>
+            <a:ext cx="10408615" cy="1030986"/>
+          </a:xfrm>
+          <a:prstGeom prst="rect">
+            <a:avLst/>
+          </a:prstGeom>
+          <a:noFill/>
+        </p:spPr>
+        <p:txBody>
+          <a:bodyPr wrap="square" anchor="t" lIns="0" rIns="0" tIns="0" bIns="0"/>
+          <a:lstStyle/>
+          <a:p>
+            <a:pPr algn="l"/>
+            <a:r>
+              <a:rPr sz="1800" b="0" i="0">
+                <a:solidFill>
+                  <a:srgbClr val="54595D"/>
+                </a:solidFill>
+                <a:latin typeface="Calibri"/>
+              </a:rPr>
+              <a:t>A 2 m bar stretches 1 mm. What is the strain?</a:t>
+            </a:r>
+          </a:p>
+          <a:p>
+            <a:r>
+              <a:rPr sz="1800" b="1">
+                <a:solidFill>
+                  <a:srgbClr val="03306E"/>
+                </a:solidFill>
+                <a:latin typeface="Calibri"/>
+              </a:rPr>
+              <a:t>0.0005.</a:t>
+            </a:r>
+          </a:p>
+        </p:txBody>
+      </p:sp>
+      <p:sp>
+        <p:nvSpPr>
+          <p:cNvPr id="12" name="Oval 11"/>
+          <p:cNvSpPr/>
+          <p:nvPr/>
+        </p:nvSpPr>
+        <p:spPr>
+          <a:xfrm>
+            <a:off x="548640" y="5205221"/>
+            <a:ext cx="411480" cy="411480"/>
+          </a:xfrm>
+          <a:prstGeom prst="ellipse">
+            <a:avLst/>
+          </a:prstGeom>
+          <a:solidFill>
+            <a:srgbClr val="F2B705"/>
+          </a:solidFill>
+          <a:ln>
+            <a:noFill/>
+          </a:ln>
+          <a:effectLst/>
+        </p:spPr>
+        <p:style>
+          <a:lnRef idx="1">
+            <a:schemeClr val="accent1"/>
+          </a:lnRef>
+          <a:fillRef idx="3">
+            <a:schemeClr val="accent1"/>
+          </a:fillRef>
+          <a:effectRef idx="2">
+            <a:schemeClr val="accent1"/>
+          </a:effectRef>
+          <a:fontRef idx="minor">
+            <a:schemeClr val="lt1"/>
+          </a:fontRef>
+        </p:style>
+        <p:txBody>
+          <a:bodyPr rtlCol="0" anchor="ctr" lIns="0" rIns="0" tIns="0" bIns="0"/>
+          <a:lstStyle/>
+          <a:p>
+            <a:pPr algn="ctr"/>
+            <a:r>
+              <a:rPr sz="1400" b="1">
+                <a:solidFill>
+                  <a:srgbClr val="202122"/>
+                </a:solidFill>
+                <a:latin typeface="Calibri"/>
+              </a:rPr>
+              <a:t>4</a:t>
+            </a:r>
+          </a:p>
+        </p:txBody>
+      </p:sp>
+      <p:sp>
+        <p:nvSpPr>
+          <p:cNvPr id="13" name="TextBox 12"/>
+          <p:cNvSpPr txBox="1"/>
+          <p:nvPr/>
+        </p:nvSpPr>
+        <p:spPr>
+          <a:xfrm>
+            <a:off x="1234440" y="5186933"/>
+            <a:ext cx="10408615" cy="1030986"/>
+          </a:xfrm>
+          <a:prstGeom prst="rect">
+            <a:avLst/>
+          </a:prstGeom>
+          <a:noFill/>
+        </p:spPr>
+        <p:txBody>
+          <a:bodyPr wrap="square" anchor="t" lIns="0" rIns="0" tIns="0" bIns="0"/>
+          <a:lstStyle/>
+          <a:p>
+            <a:pPr algn="l"/>
+            <a:r>
+              <a:rPr sz="1800" b="0" i="0">
+                <a:solidFill>
+                  <a:srgbClr val="54595D"/>
+                </a:solidFill>
+                <a:latin typeface="Calibri"/>
+              </a:rPr>
+              <a:t>Why temper after quench hardening?</a:t>
+            </a:r>
+          </a:p>
+          <a:p>
+            <a:r>
+              <a:rPr sz="1800" b="1">
+                <a:solidFill>
+                  <a:srgbClr val="03306E"/>
+                </a:solidFill>
+                <a:latin typeface="Calibri"/>
+              </a:rPr>
+              <a:t>To reduce brittleness.</a:t>
+            </a:r>
+          </a:p>
+        </p:txBody>
+      </p:sp>
+    </p:spTree>
+  </p:cSld>
+  <p:clrMapOvr>
+    <a:masterClrMapping/>
+  </p:clrMapOvr>
+</p:sld>
+</file>
+
+<file path=ppt/slides/slide14.xml><?xml version="1.0" encoding="utf-8"?>
+<p:sld xmlns:a="http://schemas.openxmlformats.org/drawingml/2006/main" xmlns:p="http://schemas.openxmlformats.org/presentationml/2006/main" xmlns:r="http://schemas.openxmlformats.org/officeDocument/2006/relationships">
+  <p:cSld>
+    <p:bg>
+      <p:bgPr>
+        <a:solidFill>
+          <a:srgbClr val="FFFFFF"/>
+        </a:solidFill>
+        <a:effectLst/>
+      </p:bgPr>
+    </p:bg>
+    <p:spTree>
+      <p:nvGrpSpPr>
+        <p:cNvPr id="1" name=""/>
+        <p:cNvGrpSpPr/>
+        <p:nvPr/>
+      </p:nvGrpSpPr>
+      <p:grpSpPr/>
+      <p:sp>
+        <p:nvSpPr>
+          <p:cNvPr id="2" name="TextBox 1"/>
+          <p:cNvSpPr txBox="1"/>
+          <p:nvPr/>
+        </p:nvSpPr>
+        <p:spPr>
+          <a:xfrm>
+            <a:off x="548640" y="320040"/>
+            <a:ext cx="11094415" cy="274320"/>
+          </a:xfrm>
+          <a:prstGeom prst="rect">
+            <a:avLst/>
+          </a:prstGeom>
+          <a:noFill/>
+        </p:spPr>
+        <p:txBody>
+          <a:bodyPr wrap="square" anchor="t" lIns="0" rIns="0" tIns="0" bIns="0"/>
+          <a:lstStyle/>
+          <a:p>
+            <a:pPr algn="l"/>
+            <a:r>
+              <a:rPr sz="1100" b="1" i="0">
+                <a:solidFill>
+                  <a:srgbClr val="54595D"/>
+                </a:solidFill>
+                <a:latin typeface="Calibri"/>
+              </a:rPr>
+              <a:t>ENGINEERING CORE  ·  Core topic 6</a:t>
+            </a:r>
+          </a:p>
+        </p:txBody>
+      </p:sp>
+      <p:sp>
+        <p:nvSpPr>
+          <p:cNvPr id="3" name="TextBox 2"/>
+          <p:cNvSpPr txBox="1"/>
+          <p:nvPr/>
+        </p:nvSpPr>
+        <p:spPr>
+          <a:xfrm>
+            <a:off x="548640" y="566928"/>
+            <a:ext cx="11094415" cy="822960"/>
+          </a:xfrm>
+          <a:prstGeom prst="rect">
+            <a:avLst/>
+          </a:prstGeom>
+          <a:noFill/>
+        </p:spPr>
+        <p:txBody>
+          <a:bodyPr wrap="square" anchor="ctr" lIns="0" rIns="0" tIns="0" bIns="0"/>
+          <a:lstStyle/>
+          <a:p>
+            <a:pPr algn="l"/>
+            <a:r>
+              <a:rPr sz="3200" b="1" i="0">
+                <a:solidFill>
+                  <a:srgbClr val="03306E"/>
+                </a:solidFill>
+                <a:latin typeface="Cambria"/>
+              </a:rPr>
+              <a:t>Activity: Read a load-extension graph</a:t>
+            </a:r>
+          </a:p>
+        </p:txBody>
+      </p:sp>
+      <p:sp>
+        <p:nvSpPr>
+          <p:cNvPr id="4" name="TextBox 3"/>
+          <p:cNvSpPr txBox="1"/>
+          <p:nvPr/>
+        </p:nvSpPr>
+        <p:spPr>
+          <a:xfrm>
+            <a:off x="548640" y="6446520"/>
+            <a:ext cx="8229600" cy="274320"/>
+          </a:xfrm>
+          <a:prstGeom prst="rect">
+            <a:avLst/>
+          </a:prstGeom>
+          <a:noFill/>
+        </p:spPr>
+        <p:txBody>
+          <a:bodyPr wrap="square" anchor="t" lIns="0" rIns="0" tIns="0" bIns="0"/>
+          <a:lstStyle/>
+          <a:p>
+            <a:pPr algn="l"/>
+            <a:r>
+              <a:rPr sz="1000" b="0" i="0">
+                <a:solidFill>
+                  <a:srgbClr val="54595D"/>
+                </a:solidFill>
+                <a:latin typeface="Calibri"/>
+              </a:rPr>
+              <a:t>Design and Development for Engineering and Manufacturing T Level  ·  Material Processing, Treatment, Failure and Testing</a:t>
+            </a:r>
+          </a:p>
+        </p:txBody>
+      </p:sp>
+      <p:sp>
+        <p:nvSpPr>
+          <p:cNvPr id="5" name="TextBox 4"/>
+          <p:cNvSpPr txBox="1"/>
+          <p:nvPr/>
+        </p:nvSpPr>
+        <p:spPr>
+          <a:xfrm>
+            <a:off x="10728655" y="6446520"/>
+            <a:ext cx="914400" cy="274320"/>
+          </a:xfrm>
+          <a:prstGeom prst="rect">
+            <a:avLst/>
+          </a:prstGeom>
+          <a:noFill/>
+        </p:spPr>
+        <p:txBody>
+          <a:bodyPr wrap="square" anchor="t" lIns="0" rIns="0" tIns="0" bIns="0"/>
+          <a:lstStyle/>
+          <a:p>
+            <a:pPr algn="r"/>
+            <a:r>
+              <a:rPr sz="1000" b="0" i="0">
+                <a:solidFill>
+                  <a:srgbClr val="54595D"/>
+                </a:solidFill>
+                <a:latin typeface="Calibri"/>
+              </a:rPr>
+              <a:t>14</a:t>
+            </a:r>
+          </a:p>
+        </p:txBody>
+      </p:sp>
+      <p:sp>
+        <p:nvSpPr>
+          <p:cNvPr id="6" name="Rounded Rectangle 5"/>
+          <p:cNvSpPr/>
+          <p:nvPr/>
+        </p:nvSpPr>
+        <p:spPr>
+          <a:xfrm>
+            <a:off x="548640" y="1508760"/>
+            <a:ext cx="2011680" cy="457200"/>
+          </a:xfrm>
+          <a:prstGeom prst="roundRect">
+            <a:avLst>
+              <a:gd name="adj" fmla="val 50000"/>
+            </a:avLst>
+          </a:prstGeom>
+          <a:solidFill>
+            <a:srgbClr val="F2B705"/>
+          </a:solidFill>
+          <a:ln>
+            <a:noFill/>
+          </a:ln>
+          <a:effectLst/>
+        </p:spPr>
+        <p:style>
+          <a:lnRef idx="1">
+            <a:schemeClr val="accent1"/>
+          </a:lnRef>
+          <a:fillRef idx="3">
+            <a:schemeClr val="accent1"/>
+          </a:fillRef>
+          <a:effectRef idx="2">
+            <a:schemeClr val="accent1"/>
+          </a:effectRef>
+          <a:fontRef idx="minor">
+            <a:schemeClr val="lt1"/>
+          </a:fontRef>
+        </p:style>
+        <p:txBody>
+          <a:bodyPr rtlCol="0" anchor="ctr"/>
+          <a:lstStyle/>
+          <a:p/>
+        </p:txBody>
+      </p:sp>
+      <p:sp>
+        <p:nvSpPr>
+          <p:cNvPr id="7" name="TextBox 6"/>
+          <p:cNvSpPr txBox="1"/>
+          <p:nvPr/>
+        </p:nvSpPr>
+        <p:spPr>
+          <a:xfrm>
+            <a:off x="548640" y="1508760"/>
+            <a:ext cx="2011680" cy="457200"/>
+          </a:xfrm>
+          <a:prstGeom prst="rect">
+            <a:avLst/>
+          </a:prstGeom>
+          <a:noFill/>
+        </p:spPr>
+        <p:txBody>
+          <a:bodyPr wrap="square" anchor="ctr" lIns="0" rIns="0" tIns="0" bIns="0"/>
+          <a:lstStyle/>
+          <a:p>
+            <a:pPr algn="ctr"/>
+            <a:r>
+              <a:rPr sz="1400" b="1" i="0">
+                <a:solidFill>
+                  <a:srgbClr val="202122"/>
+                </a:solidFill>
+                <a:latin typeface="Calibri"/>
+              </a:rPr>
+              <a:t>25 minutes</a:t>
+            </a:r>
+          </a:p>
+        </p:txBody>
+      </p:sp>
+      <p:sp>
+        <p:nvSpPr>
+          <p:cNvPr id="8" name="TextBox 7"/>
+          <p:cNvSpPr txBox="1"/>
+          <p:nvPr/>
+        </p:nvSpPr>
+        <p:spPr>
+          <a:xfrm>
+            <a:off x="2743200" y="1508760"/>
+            <a:ext cx="4754880" cy="457200"/>
+          </a:xfrm>
+          <a:prstGeom prst="rect">
+            <a:avLst/>
+          </a:prstGeom>
+          <a:noFill/>
+        </p:spPr>
+        <p:txBody>
+          <a:bodyPr wrap="square" anchor="ctr" lIns="0" rIns="0" tIns="0" bIns="0"/>
+          <a:lstStyle/>
+          <a:p>
+            <a:pPr algn="l"/>
+            <a:r>
+              <a:rPr sz="1400" b="0" i="1">
+                <a:solidFill>
+                  <a:srgbClr val="54595D"/>
+                </a:solidFill>
+                <a:latin typeface="Calibri"/>
+              </a:rPr>
+              <a:t>Pairs</a:t>
+            </a:r>
+          </a:p>
+        </p:txBody>
+      </p:sp>
+      <p:sp>
+        <p:nvSpPr>
+          <p:cNvPr id="9" name="Oval 8"/>
+          <p:cNvSpPr/>
+          <p:nvPr/>
+        </p:nvSpPr>
+        <p:spPr>
+          <a:xfrm>
+            <a:off x="548640" y="2482596"/>
+            <a:ext cx="384048" cy="384048"/>
+          </a:xfrm>
+          <a:prstGeom prst="ellipse">
+            <a:avLst/>
+          </a:prstGeom>
+          <a:solidFill>
+            <a:srgbClr val="0645AD"/>
+          </a:solidFill>
+          <a:ln>
+            <a:noFill/>
+          </a:ln>
+          <a:effectLst/>
+        </p:spPr>
+        <p:style>
+          <a:lnRef idx="1">
+            <a:schemeClr val="accent1"/>
+          </a:lnRef>
+          <a:fillRef idx="3">
+            <a:schemeClr val="accent1"/>
+          </a:fillRef>
+          <a:effectRef idx="2">
+            <a:schemeClr val="accent1"/>
+          </a:effectRef>
+          <a:fontRef idx="minor">
+            <a:schemeClr val="lt1"/>
+          </a:fontRef>
+        </p:style>
+        <p:txBody>
+          <a:bodyPr rtlCol="0" anchor="ctr" lIns="0" rIns="0" tIns="0" bIns="0"/>
+          <a:lstStyle/>
+          <a:p>
+            <a:pPr algn="ctr"/>
+            <a:r>
+              <a:rPr sz="1300" b="1">
+                <a:solidFill>
+                  <a:srgbClr val="FFFFFF"/>
+                </a:solidFill>
+                <a:latin typeface="Calibri"/>
+              </a:rPr>
+              <a:t>1</a:t>
+            </a:r>
+          </a:p>
+        </p:txBody>
+      </p:sp>
+      <p:sp>
+        <p:nvSpPr>
+          <p:cNvPr id="10" name="TextBox 9"/>
+          <p:cNvSpPr txBox="1"/>
+          <p:nvPr/>
+        </p:nvSpPr>
+        <p:spPr>
+          <a:xfrm>
+            <a:off x="1143000" y="2240280"/>
+            <a:ext cx="5943600" cy="868680"/>
+          </a:xfrm>
+          <a:prstGeom prst="rect">
+            <a:avLst/>
+          </a:prstGeom>
+          <a:noFill/>
+        </p:spPr>
+        <p:txBody>
+          <a:bodyPr wrap="square" anchor="ctr" lIns="0" rIns="0" tIns="0" bIns="0"/>
+          <a:lstStyle/>
+          <a:p>
+            <a:pPr algn="l"/>
+            <a:r>
+              <a:rPr sz="1700" b="0" i="0">
+                <a:solidFill>
+                  <a:srgbClr val="202122"/>
+                </a:solidFill>
+                <a:latin typeface="Calibri"/>
+              </a:rPr>
+              <a:t>Use the tensile test data from your teacher.</a:t>
+            </a:r>
+          </a:p>
+        </p:txBody>
+      </p:sp>
+      <p:sp>
+        <p:nvSpPr>
+          <p:cNvPr id="11" name="Oval 10"/>
+          <p:cNvSpPr/>
+          <p:nvPr/>
+        </p:nvSpPr>
+        <p:spPr>
+          <a:xfrm>
+            <a:off x="548640" y="3461004"/>
+            <a:ext cx="384048" cy="384048"/>
+          </a:xfrm>
+          <a:prstGeom prst="ellipse">
+            <a:avLst/>
+          </a:prstGeom>
+          <a:solidFill>
+            <a:srgbClr val="0645AD"/>
+          </a:solidFill>
+          <a:ln>
+            <a:noFill/>
+          </a:ln>
+          <a:effectLst/>
+        </p:spPr>
+        <p:style>
+          <a:lnRef idx="1">
+            <a:schemeClr val="accent1"/>
+          </a:lnRef>
+          <a:fillRef idx="3">
+            <a:schemeClr val="accent1"/>
+          </a:fillRef>
+          <a:effectRef idx="2">
+            <a:schemeClr val="accent1"/>
+          </a:effectRef>
+          <a:fontRef idx="minor">
+            <a:schemeClr val="lt1"/>
+          </a:fontRef>
+        </p:style>
+        <p:txBody>
+          <a:bodyPr rtlCol="0" anchor="ctr" lIns="0" rIns="0" tIns="0" bIns="0"/>
+          <a:lstStyle/>
+          <a:p>
+            <a:pPr algn="ctr"/>
+            <a:r>
+              <a:rPr sz="1300" b="1">
+                <a:solidFill>
+                  <a:srgbClr val="FFFFFF"/>
+                </a:solidFill>
+                <a:latin typeface="Calibri"/>
+              </a:rPr>
+              <a:t>2</a:t>
+            </a:r>
+          </a:p>
+        </p:txBody>
+      </p:sp>
+      <p:sp>
+        <p:nvSpPr>
+          <p:cNvPr id="12" name="TextBox 11"/>
+          <p:cNvSpPr txBox="1"/>
+          <p:nvPr/>
+        </p:nvSpPr>
+        <p:spPr>
+          <a:xfrm>
+            <a:off x="1143000" y="3218688"/>
+            <a:ext cx="5943600" cy="868680"/>
+          </a:xfrm>
+          <a:prstGeom prst="rect">
+            <a:avLst/>
+          </a:prstGeom>
+          <a:noFill/>
+        </p:spPr>
+        <p:txBody>
+          <a:bodyPr wrap="square" anchor="ctr" lIns="0" rIns="0" tIns="0" bIns="0"/>
+          <a:lstStyle/>
+          <a:p>
+            <a:pPr algn="l"/>
+            <a:r>
+              <a:rPr sz="1700" b="0" i="0">
+                <a:solidFill>
+                  <a:srgbClr val="202122"/>
+                </a:solidFill>
+                <a:latin typeface="Calibri"/>
+              </a:rPr>
+              <a:t>Mark the elastic limit, UTS and fracture point on the graph.</a:t>
+            </a:r>
+          </a:p>
+        </p:txBody>
+      </p:sp>
+      <p:sp>
+        <p:nvSpPr>
+          <p:cNvPr id="13" name="Oval 12"/>
+          <p:cNvSpPr/>
+          <p:nvPr/>
+        </p:nvSpPr>
+        <p:spPr>
+          <a:xfrm>
+            <a:off x="548640" y="4439412"/>
+            <a:ext cx="384048" cy="384048"/>
+          </a:xfrm>
+          <a:prstGeom prst="ellipse">
+            <a:avLst/>
+          </a:prstGeom>
+          <a:solidFill>
+            <a:srgbClr val="0645AD"/>
+          </a:solidFill>
+          <a:ln>
+            <a:noFill/>
+          </a:ln>
+          <a:effectLst/>
+        </p:spPr>
+        <p:style>
+          <a:lnRef idx="1">
+            <a:schemeClr val="accent1"/>
+          </a:lnRef>
+          <a:fillRef idx="3">
+            <a:schemeClr val="accent1"/>
+          </a:fillRef>
+          <a:effectRef idx="2">
+            <a:schemeClr val="accent1"/>
+          </a:effectRef>
+          <a:fontRef idx="minor">
+            <a:schemeClr val="lt1"/>
+          </a:fontRef>
+        </p:style>
+        <p:txBody>
+          <a:bodyPr rtlCol="0" anchor="ctr" lIns="0" rIns="0" tIns="0" bIns="0"/>
+          <a:lstStyle/>
+          <a:p>
+            <a:pPr algn="ctr"/>
+            <a:r>
+              <a:rPr sz="1300" b="1">
+                <a:solidFill>
+                  <a:srgbClr val="FFFFFF"/>
+                </a:solidFill>
+                <a:latin typeface="Calibri"/>
+              </a:rPr>
+              <a:t>3</a:t>
+            </a:r>
+          </a:p>
+        </p:txBody>
+      </p:sp>
+      <p:sp>
+        <p:nvSpPr>
+          <p:cNvPr id="14" name="TextBox 13"/>
+          <p:cNvSpPr txBox="1"/>
+          <p:nvPr/>
+        </p:nvSpPr>
+        <p:spPr>
+          <a:xfrm>
+            <a:off x="1143000" y="4197096"/>
+            <a:ext cx="5943600" cy="868680"/>
+          </a:xfrm>
+          <a:prstGeom prst="rect">
+            <a:avLst/>
+          </a:prstGeom>
+          <a:noFill/>
+        </p:spPr>
+        <p:txBody>
+          <a:bodyPr wrap="square" anchor="ctr" lIns="0" rIns="0" tIns="0" bIns="0"/>
+          <a:lstStyle/>
+          <a:p>
+            <a:pPr algn="l"/>
+            <a:r>
+              <a:rPr sz="1700" b="0" i="0">
+                <a:solidFill>
+                  <a:srgbClr val="202122"/>
+                </a:solidFill>
+                <a:latin typeface="Calibri"/>
+              </a:rPr>
+              <a:t>Calculate stress, strain and Young's modulus in the elastic region.</a:t>
+            </a:r>
+          </a:p>
+        </p:txBody>
+      </p:sp>
+      <p:sp>
+        <p:nvSpPr>
+          <p:cNvPr id="15" name="Oval 14"/>
+          <p:cNvSpPr/>
+          <p:nvPr/>
+        </p:nvSpPr>
+        <p:spPr>
+          <a:xfrm>
+            <a:off x="548640" y="5417820"/>
+            <a:ext cx="384048" cy="384048"/>
+          </a:xfrm>
+          <a:prstGeom prst="ellipse">
+            <a:avLst/>
+          </a:prstGeom>
+          <a:solidFill>
+            <a:srgbClr val="0645AD"/>
+          </a:solidFill>
+          <a:ln>
+            <a:noFill/>
+          </a:ln>
+          <a:effectLst/>
+        </p:spPr>
+        <p:style>
+          <a:lnRef idx="1">
+            <a:schemeClr val="accent1"/>
+          </a:lnRef>
+          <a:fillRef idx="3">
+            <a:schemeClr val="accent1"/>
+          </a:fillRef>
+          <a:effectRef idx="2">
+            <a:schemeClr val="accent1"/>
+          </a:effectRef>
+          <a:fontRef idx="minor">
+            <a:schemeClr val="lt1"/>
+          </a:fontRef>
+        </p:style>
+        <p:txBody>
+          <a:bodyPr rtlCol="0" anchor="ctr" lIns="0" rIns="0" tIns="0" bIns="0"/>
+          <a:lstStyle/>
+          <a:p>
+            <a:pPr algn="ctr"/>
+            <a:r>
+              <a:rPr sz="1300" b="1">
+                <a:solidFill>
+                  <a:srgbClr val="FFFFFF"/>
+                </a:solidFill>
+                <a:latin typeface="Calibri"/>
+              </a:rPr>
+              <a:t>4</a:t>
+            </a:r>
+          </a:p>
+        </p:txBody>
+      </p:sp>
+      <p:sp>
+        <p:nvSpPr>
+          <p:cNvPr id="16" name="TextBox 15"/>
+          <p:cNvSpPr txBox="1"/>
+          <p:nvPr/>
+        </p:nvSpPr>
+        <p:spPr>
+          <a:xfrm>
+            <a:off x="1143000" y="5175504"/>
+            <a:ext cx="5943600" cy="868680"/>
+          </a:xfrm>
+          <a:prstGeom prst="rect">
+            <a:avLst/>
+          </a:prstGeom>
+          <a:noFill/>
+        </p:spPr>
+        <p:txBody>
+          <a:bodyPr wrap="square" anchor="ctr" lIns="0" rIns="0" tIns="0" bIns="0"/>
+          <a:lstStyle/>
+          <a:p>
+            <a:pPr algn="l"/>
+            <a:r>
+              <a:rPr sz="1700" b="0" i="0">
+                <a:solidFill>
+                  <a:srgbClr val="202122"/>
+                </a:solidFill>
+                <a:latin typeface="Calibri"/>
+              </a:rPr>
+              <a:t>Identify the material from its modulus.</a:t>
+            </a:r>
+          </a:p>
+        </p:txBody>
+      </p:sp>
+      <p:sp>
+        <p:nvSpPr>
+          <p:cNvPr id="17" name="Rounded Rectangle 16"/>
+          <p:cNvSpPr/>
+          <p:nvPr/>
+        </p:nvSpPr>
+        <p:spPr>
+          <a:xfrm>
+            <a:off x="7772400" y="1508760"/>
+            <a:ext cx="3867912" cy="4572000"/>
+          </a:xfrm>
+          <a:prstGeom prst="roundRect">
+            <a:avLst>
+              <a:gd name="adj" fmla="val 8000"/>
+            </a:avLst>
+          </a:prstGeom>
+          <a:solidFill>
+            <a:srgbClr val="EAF3FF"/>
+          </a:solidFill>
+          <a:ln>
+            <a:noFill/>
+          </a:ln>
+          <a:effectLst/>
+        </p:spPr>
+        <p:style>
+          <a:lnRef idx="1">
+            <a:schemeClr val="accent1"/>
+          </a:lnRef>
+          <a:fillRef idx="3">
+            <a:schemeClr val="accent1"/>
+          </a:fillRef>
+          <a:effectRef idx="2">
+            <a:schemeClr val="accent1"/>
+          </a:effectRef>
+          <a:fontRef idx="minor">
+            <a:schemeClr val="lt1"/>
+          </a:fontRef>
+        </p:style>
+        <p:txBody>
+          <a:bodyPr rtlCol="0" anchor="ctr"/>
+          <a:lstStyle/>
+          <a:p/>
+        </p:txBody>
+      </p:sp>
+      <p:sp>
+        <p:nvSpPr>
+          <p:cNvPr id="18" name="TextBox 17"/>
+          <p:cNvSpPr txBox="1"/>
+          <p:nvPr/>
+        </p:nvSpPr>
+        <p:spPr>
+          <a:xfrm>
+            <a:off x="8046720" y="1737360"/>
+            <a:ext cx="3291840" cy="365760"/>
+          </a:xfrm>
+          <a:prstGeom prst="rect">
+            <a:avLst/>
+          </a:prstGeom>
+          <a:noFill/>
+        </p:spPr>
+        <p:txBody>
+          <a:bodyPr wrap="square" anchor="t" lIns="0" rIns="0" tIns="0" bIns="0"/>
+          <a:lstStyle/>
+          <a:p>
+            <a:pPr algn="l"/>
+            <a:r>
+              <a:rPr sz="1300" b="1" i="0">
+                <a:solidFill>
+                  <a:srgbClr val="0645AD"/>
+                </a:solidFill>
+                <a:latin typeface="Calibri"/>
+              </a:rPr>
+              <a:t>SUCCESS CRITERIA</a:t>
+            </a:r>
+          </a:p>
+        </p:txBody>
+      </p:sp>
+      <p:sp>
+        <p:nvSpPr>
+          <p:cNvPr id="19" name="TextBox 18"/>
+          <p:cNvSpPr txBox="1"/>
+          <p:nvPr/>
+        </p:nvSpPr>
+        <p:spPr>
+          <a:xfrm>
+            <a:off x="8046720" y="2240280"/>
+            <a:ext cx="3337560" cy="3657600"/>
+          </a:xfrm>
+          <a:prstGeom prst="rect">
+            <a:avLst/>
+          </a:prstGeom>
+          <a:noFill/>
+        </p:spPr>
+        <p:txBody>
+          <a:bodyPr wrap="square" lIns="0" rIns="0" tIns="0" bIns="0">
+            <a:spAutoFit/>
+          </a:bodyPr>
+          <a:lstStyle/>
+          <a:p>
+            <a:pPr marL="274320" indent="-274320">
+              <a:spcAft>
+                <a:spcPts val="810"/>
+              </a:spcAft>
+              <a:buClr>
+                <a:srgbClr val="0645AD"/>
+              </a:buClr>
+              <a:buFont typeface="Arial"/>
+              <a:buChar char="•"/>
+            </a:pPr>
+            <a:r>
+              <a:rPr sz="1800" b="0">
+                <a:solidFill>
+                  <a:srgbClr val="202122"/>
+                </a:solidFill>
+                <a:latin typeface="Calibri"/>
+              </a:rPr>
+              <a:t>Key points labelled</a:t>
+            </a:r>
+          </a:p>
+          <a:p>
+            <a:pPr marL="274320" indent="-274320">
+              <a:spcAft>
+                <a:spcPts val="810"/>
+              </a:spcAft>
+              <a:buClr>
+                <a:srgbClr val="0645AD"/>
+              </a:buClr>
+              <a:buFont typeface="Arial"/>
+              <a:buChar char="•"/>
+            </a:pPr>
+            <a:r>
+              <a:rPr sz="1800" b="0">
+                <a:solidFill>
+                  <a:srgbClr val="202122"/>
+                </a:solidFill>
+                <a:latin typeface="Calibri"/>
+              </a:rPr>
+              <a:t>Calculations with units</a:t>
+            </a:r>
+          </a:p>
+          <a:p>
+            <a:pPr marL="274320" indent="-274320">
+              <a:spcAft>
+                <a:spcPts val="810"/>
+              </a:spcAft>
+              <a:buClr>
+                <a:srgbClr val="0645AD"/>
+              </a:buClr>
+              <a:buFont typeface="Arial"/>
+              <a:buChar char="•"/>
+            </a:pPr>
+            <a:r>
+              <a:rPr sz="1800" b="0">
+                <a:solidFill>
+                  <a:srgbClr val="202122"/>
+                </a:solidFill>
+                <a:latin typeface="Calibri"/>
+              </a:rPr>
+              <a:t>Sensible identification</a:t>
+            </a:r>
+          </a:p>
+        </p:txBody>
+      </p:sp>
+    </p:spTree>
+  </p:cSld>
+  <p:clrMapOvr>
+    <a:masterClrMapping/>
+  </p:clrMapOvr>
+</p:sld>
+</file>
+
+<file path=ppt/slides/slide15.xml><?xml version="1.0" encoding="utf-8"?>
+<p:sld xmlns:a="http://schemas.openxmlformats.org/drawingml/2006/main" xmlns:p="http://schemas.openxmlformats.org/presentationml/2006/main" xmlns:r="http://schemas.openxmlformats.org/officeDocument/2006/relationships">
+  <p:cSld>
+    <p:bg>
+      <p:bgPr>
+        <a:solidFill>
+          <a:srgbClr val="03306E"/>
+        </a:solidFill>
+        <a:effectLst/>
+      </p:bgPr>
+    </p:bg>
+    <p:spTree>
+      <p:nvGrpSpPr>
+        <p:cNvPr id="1" name=""/>
+        <p:cNvGrpSpPr/>
+        <p:nvPr/>
+      </p:nvGrpSpPr>
+      <p:grpSpPr/>
+      <p:sp>
+        <p:nvSpPr>
+          <p:cNvPr id="2" name="TextBox 1"/>
+          <p:cNvSpPr txBox="1"/>
+          <p:nvPr/>
+        </p:nvSpPr>
+        <p:spPr>
+          <a:xfrm>
+            <a:off x="548640" y="320040"/>
+            <a:ext cx="11094415" cy="274320"/>
+          </a:xfrm>
+          <a:prstGeom prst="rect">
+            <a:avLst/>
+          </a:prstGeom>
+          <a:noFill/>
+        </p:spPr>
+        <p:txBody>
+          <a:bodyPr wrap="square" anchor="t" lIns="0" rIns="0" tIns="0" bIns="0"/>
+          <a:lstStyle/>
+          <a:p>
+            <a:pPr algn="l"/>
+            <a:r>
+              <a:rPr sz="1100" b="1" i="0">
+                <a:solidFill>
+                  <a:srgbClr val="A9C8F0"/>
+                </a:solidFill>
+                <a:latin typeface="Calibri"/>
+              </a:rPr>
+              <a:t>ENGINEERING CORE  ·  Core topic 6</a:t>
+            </a:r>
+          </a:p>
+        </p:txBody>
+      </p:sp>
+      <p:sp>
+        <p:nvSpPr>
+          <p:cNvPr id="3" name="TextBox 2"/>
+          <p:cNvSpPr txBox="1"/>
+          <p:nvPr/>
+        </p:nvSpPr>
+        <p:spPr>
+          <a:xfrm>
+            <a:off x="548640" y="566928"/>
+            <a:ext cx="11094415" cy="822960"/>
+          </a:xfrm>
+          <a:prstGeom prst="rect">
+            <a:avLst/>
+          </a:prstGeom>
+          <a:noFill/>
+        </p:spPr>
+        <p:txBody>
+          <a:bodyPr wrap="square" anchor="ctr" lIns="0" rIns="0" tIns="0" bIns="0"/>
+          <a:lstStyle/>
+          <a:p>
+            <a:pPr algn="l"/>
+            <a:r>
+              <a:rPr sz="3200" b="1" i="0">
+                <a:solidFill>
+                  <a:srgbClr val="FFFFFF"/>
+                </a:solidFill>
+                <a:latin typeface="Cambria"/>
+              </a:rPr>
+              <a:t>Exit ticket</a:t>
+            </a:r>
+          </a:p>
+        </p:txBody>
+      </p:sp>
+      <p:sp>
+        <p:nvSpPr>
+          <p:cNvPr id="4" name="Oval 3"/>
+          <p:cNvSpPr/>
+          <p:nvPr/>
+        </p:nvSpPr>
+        <p:spPr>
+          <a:xfrm>
+            <a:off x="548640" y="1737360"/>
+            <a:ext cx="502920" cy="502920"/>
+          </a:xfrm>
+          <a:prstGeom prst="ellipse">
+            <a:avLst/>
+          </a:prstGeom>
+          <a:solidFill>
+            <a:srgbClr val="F2B705"/>
+          </a:solidFill>
+          <a:ln>
+            <a:noFill/>
+          </a:ln>
+          <a:effectLst/>
+        </p:spPr>
+        <p:style>
+          <a:lnRef idx="1">
+            <a:schemeClr val="accent1"/>
+          </a:lnRef>
+          <a:fillRef idx="3">
+            <a:schemeClr val="accent1"/>
+          </a:fillRef>
+          <a:effectRef idx="2">
+            <a:schemeClr val="accent1"/>
+          </a:effectRef>
+          <a:fontRef idx="minor">
+            <a:schemeClr val="lt1"/>
+          </a:fontRef>
+        </p:style>
+        <p:txBody>
+          <a:bodyPr rtlCol="0" anchor="ctr" lIns="0" rIns="0" tIns="0" bIns="0"/>
+          <a:lstStyle/>
+          <a:p>
+            <a:pPr algn="ctr"/>
+            <a:r>
+              <a:rPr sz="1700" b="1">
+                <a:solidFill>
+                  <a:srgbClr val="202122"/>
+                </a:solidFill>
+                <a:latin typeface="Calibri"/>
+              </a:rPr>
+              <a:t>1</a:t>
+            </a:r>
+          </a:p>
+        </p:txBody>
+      </p:sp>
+      <p:sp>
+        <p:nvSpPr>
+          <p:cNvPr id="5" name="TextBox 4"/>
+          <p:cNvSpPr txBox="1"/>
+          <p:nvPr/>
+        </p:nvSpPr>
+        <p:spPr>
+          <a:xfrm>
+            <a:off x="1325880" y="1645920"/>
+            <a:ext cx="6583680" cy="822960"/>
+          </a:xfrm>
+          <a:prstGeom prst="rect">
+            <a:avLst/>
+          </a:prstGeom>
+          <a:noFill/>
+        </p:spPr>
+        <p:txBody>
+          <a:bodyPr wrap="square" anchor="ctr" lIns="0" rIns="0" tIns="0" bIns="0"/>
+          <a:lstStyle/>
+          <a:p>
+            <a:pPr algn="l"/>
+            <a:r>
+              <a:rPr sz="2000" b="0" i="0">
+                <a:solidFill>
+                  <a:srgbClr val="FFFFFF"/>
+                </a:solidFill>
+                <a:latin typeface="Calibri"/>
+              </a:rPr>
+              <a:t>Why is galvanising called sacrificial protection?</a:t>
+            </a:r>
+          </a:p>
+        </p:txBody>
+      </p:sp>
+      <p:sp>
+        <p:nvSpPr>
+          <p:cNvPr id="6" name="Oval 5"/>
+          <p:cNvSpPr/>
+          <p:nvPr/>
+        </p:nvSpPr>
+        <p:spPr>
+          <a:xfrm>
+            <a:off x="548640" y="2697480"/>
+            <a:ext cx="502920" cy="502920"/>
+          </a:xfrm>
+          <a:prstGeom prst="ellipse">
+            <a:avLst/>
+          </a:prstGeom>
+          <a:solidFill>
+            <a:srgbClr val="F2B705"/>
+          </a:solidFill>
+          <a:ln>
+            <a:noFill/>
+          </a:ln>
+          <a:effectLst/>
+        </p:spPr>
+        <p:style>
+          <a:lnRef idx="1">
+            <a:schemeClr val="accent1"/>
+          </a:lnRef>
+          <a:fillRef idx="3">
+            <a:schemeClr val="accent1"/>
+          </a:fillRef>
+          <a:effectRef idx="2">
+            <a:schemeClr val="accent1"/>
+          </a:effectRef>
+          <a:fontRef idx="minor">
+            <a:schemeClr val="lt1"/>
+          </a:fontRef>
+        </p:style>
+        <p:txBody>
+          <a:bodyPr rtlCol="0" anchor="ctr" lIns="0" rIns="0" tIns="0" bIns="0"/>
+          <a:lstStyle/>
+          <a:p>
+            <a:pPr algn="ctr"/>
+            <a:r>
+              <a:rPr sz="1700" b="1">
+                <a:solidFill>
+                  <a:srgbClr val="202122"/>
+                </a:solidFill>
+                <a:latin typeface="Calibri"/>
+              </a:rPr>
+              <a:t>2</a:t>
+            </a:r>
+          </a:p>
+        </p:txBody>
+      </p:sp>
+      <p:sp>
+        <p:nvSpPr>
+          <p:cNvPr id="7" name="TextBox 6"/>
+          <p:cNvSpPr txBox="1"/>
+          <p:nvPr/>
+        </p:nvSpPr>
+        <p:spPr>
+          <a:xfrm>
+            <a:off x="1325880" y="2606040"/>
+            <a:ext cx="6583680" cy="822960"/>
+          </a:xfrm>
+          <a:prstGeom prst="rect">
+            <a:avLst/>
+          </a:prstGeom>
+          <a:noFill/>
+        </p:spPr>
+        <p:txBody>
+          <a:bodyPr wrap="square" anchor="ctr" lIns="0" rIns="0" tIns="0" bIns="0"/>
+          <a:lstStyle/>
+          <a:p>
+            <a:pPr algn="l"/>
+            <a:r>
+              <a:rPr sz="2000" b="0" i="0">
+                <a:solidFill>
+                  <a:srgbClr val="FFFFFF"/>
+                </a:solidFill>
+                <a:latin typeface="Calibri"/>
+              </a:rPr>
+              <a:t>Where would creep be a concern?</a:t>
+            </a:r>
+          </a:p>
+        </p:txBody>
+      </p:sp>
+      <p:sp>
+        <p:nvSpPr>
+          <p:cNvPr id="8" name="Oval 7"/>
+          <p:cNvSpPr/>
+          <p:nvPr/>
+        </p:nvSpPr>
+        <p:spPr>
+          <a:xfrm>
+            <a:off x="548640" y="3657600"/>
+            <a:ext cx="502920" cy="502920"/>
+          </a:xfrm>
+          <a:prstGeom prst="ellipse">
+            <a:avLst/>
+          </a:prstGeom>
+          <a:solidFill>
+            <a:srgbClr val="F2B705"/>
+          </a:solidFill>
+          <a:ln>
+            <a:noFill/>
+          </a:ln>
+          <a:effectLst/>
+        </p:spPr>
+        <p:style>
+          <a:lnRef idx="1">
+            <a:schemeClr val="accent1"/>
+          </a:lnRef>
+          <a:fillRef idx="3">
+            <a:schemeClr val="accent1"/>
+          </a:fillRef>
+          <a:effectRef idx="2">
+            <a:schemeClr val="accent1"/>
+          </a:effectRef>
+          <a:fontRef idx="minor">
+            <a:schemeClr val="lt1"/>
+          </a:fontRef>
+        </p:style>
+        <p:txBody>
+          <a:bodyPr rtlCol="0" anchor="ctr" lIns="0" rIns="0" tIns="0" bIns="0"/>
+          <a:lstStyle/>
+          <a:p>
+            <a:pPr algn="ctr"/>
+            <a:r>
+              <a:rPr sz="1700" b="1">
+                <a:solidFill>
+                  <a:srgbClr val="202122"/>
+                </a:solidFill>
+                <a:latin typeface="Calibri"/>
+              </a:rPr>
+              <a:t>3</a:t>
+            </a:r>
+          </a:p>
+        </p:txBody>
+      </p:sp>
+      <p:sp>
+        <p:nvSpPr>
+          <p:cNvPr id="9" name="TextBox 8"/>
+          <p:cNvSpPr txBox="1"/>
+          <p:nvPr/>
+        </p:nvSpPr>
+        <p:spPr>
+          <a:xfrm>
+            <a:off x="1325880" y="3566160"/>
+            <a:ext cx="6583680" cy="822960"/>
+          </a:xfrm>
+          <a:prstGeom prst="rect">
+            <a:avLst/>
+          </a:prstGeom>
+          <a:noFill/>
+        </p:spPr>
+        <p:txBody>
+          <a:bodyPr wrap="square" anchor="ctr" lIns="0" rIns="0" tIns="0" bIns="0"/>
+          <a:lstStyle/>
+          <a:p>
+            <a:pPr algn="l"/>
+            <a:r>
+              <a:rPr sz="2000" b="0" i="0">
+                <a:solidFill>
+                  <a:srgbClr val="FFFFFF"/>
+                </a:solidFill>
+                <a:latin typeface="Calibri"/>
+              </a:rPr>
+              <a:t>What does Young's modulus tell you?</a:t>
+            </a:r>
+          </a:p>
+        </p:txBody>
+      </p:sp>
+      <p:sp>
+        <p:nvSpPr>
+          <p:cNvPr id="10" name="Rounded Rectangle 9"/>
+          <p:cNvSpPr/>
+          <p:nvPr/>
+        </p:nvSpPr>
+        <p:spPr>
+          <a:xfrm>
+            <a:off x="8229600" y="1645920"/>
+            <a:ext cx="3410712" cy="2926080"/>
+          </a:xfrm>
+          <a:prstGeom prst="roundRect">
+            <a:avLst>
+              <a:gd name="adj" fmla="val 8000"/>
+            </a:avLst>
+          </a:prstGeom>
+          <a:solidFill>
+            <a:srgbClr val="0645AD"/>
+          </a:solidFill>
+          <a:ln>
+            <a:noFill/>
+          </a:ln>
+          <a:effectLst/>
+        </p:spPr>
+        <p:style>
+          <a:lnRef idx="1">
+            <a:schemeClr val="accent1"/>
+          </a:lnRef>
+          <a:fillRef idx="3">
+            <a:schemeClr val="accent1"/>
+          </a:fillRef>
+          <a:effectRef idx="2">
+            <a:schemeClr val="accent1"/>
+          </a:effectRef>
+          <a:fontRef idx="minor">
+            <a:schemeClr val="lt1"/>
+          </a:fontRef>
+        </p:style>
+        <p:txBody>
+          <a:bodyPr rtlCol="0" anchor="ctr"/>
+          <a:lstStyle/>
+          <a:p/>
+        </p:txBody>
+      </p:sp>
+      <p:sp>
+        <p:nvSpPr>
+          <p:cNvPr id="11" name="TextBox 10"/>
+          <p:cNvSpPr txBox="1"/>
+          <p:nvPr/>
+        </p:nvSpPr>
+        <p:spPr>
+          <a:xfrm>
+            <a:off x="8503920" y="1874519"/>
+            <a:ext cx="2926080" cy="365760"/>
+          </a:xfrm>
+          <a:prstGeom prst="rect">
+            <a:avLst/>
+          </a:prstGeom>
+          <a:noFill/>
+        </p:spPr>
+        <p:txBody>
+          <a:bodyPr wrap="square" anchor="t" lIns="0" rIns="0" tIns="0" bIns="0"/>
+          <a:lstStyle/>
+          <a:p>
+            <a:pPr algn="l"/>
+            <a:r>
+              <a:rPr sz="1300" b="1" i="0">
+                <a:solidFill>
+                  <a:srgbClr val="A9C8F0"/>
+                </a:solidFill>
+                <a:latin typeface="Calibri"/>
+              </a:rPr>
+              <a:t>REVISE THIS TOPIC</a:t>
+            </a:r>
+          </a:p>
+        </p:txBody>
+      </p:sp>
+      <p:sp>
+        <p:nvSpPr>
+          <p:cNvPr id="12" name="TextBox 11"/>
+          <p:cNvSpPr txBox="1"/>
+          <p:nvPr/>
+        </p:nvSpPr>
+        <p:spPr>
+          <a:xfrm>
+            <a:off x="8503920" y="2286000"/>
+            <a:ext cx="2926080" cy="548640"/>
+          </a:xfrm>
+          <a:prstGeom prst="rect">
+            <a:avLst/>
+          </a:prstGeom>
+          <a:noFill/>
+        </p:spPr>
+        <p:txBody>
+          <a:bodyPr wrap="square" anchor="t" lIns="0" rIns="0" tIns="0" bIns="0"/>
+          <a:lstStyle/>
+          <a:p>
+            <a:pPr algn="l"/>
+            <a:r>
+              <a:rPr sz="1400" b="0" i="0">
+                <a:solidFill>
+                  <a:srgbClr val="FFFFFF"/>
+                </a:solidFill>
+                <a:latin typeface="Calibri"/>
+              </a:rPr>
+              <a:t>Revision notes for this lesson are on the study wiki:</a:t>
+            </a:r>
+          </a:p>
+        </p:txBody>
+      </p:sp>
+      <p:sp>
+        <p:nvSpPr>
+          <p:cNvPr id="13" name="TextBox 12"/>
+          <p:cNvSpPr txBox="1"/>
+          <p:nvPr/>
+        </p:nvSpPr>
+        <p:spPr>
+          <a:xfrm>
+            <a:off x="8503920" y="2926080"/>
+            <a:ext cx="2926080" cy="1463040"/>
+          </a:xfrm>
+          <a:prstGeom prst="rect">
+            <a:avLst/>
+          </a:prstGeom>
+          <a:noFill/>
+        </p:spPr>
+        <p:txBody>
+          <a:bodyPr wrap="square" anchor="t" lIns="0" rIns="0" tIns="0" bIns="0"/>
+          <a:lstStyle/>
+          <a:p>
+            <a:pPr algn="l"/>
+            <a:r>
+              <a:rPr sz="2000" b="1" i="0">
+                <a:solidFill>
+                  <a:srgbClr val="FFFFFF"/>
+                </a:solidFill>
+                <a:latin typeface="Cambria"/>
+              </a:rPr>
+              <a:t>Engineering Core, Part 1</a:t>
+            </a:r>
+          </a:p>
+        </p:txBody>
+      </p:sp>
+      <p:sp>
+        <p:nvSpPr>
+          <p:cNvPr id="14" name="TextBox 13"/>
+          <p:cNvSpPr txBox="1"/>
+          <p:nvPr/>
+        </p:nvSpPr>
+        <p:spPr>
+          <a:xfrm>
+            <a:off x="548640" y="5669280"/>
+            <a:ext cx="11094415" cy="548640"/>
+          </a:xfrm>
+          <a:prstGeom prst="rect">
+            <a:avLst/>
+          </a:prstGeom>
+          <a:noFill/>
+        </p:spPr>
+        <p:txBody>
+          <a:bodyPr wrap="square" anchor="t" lIns="0" rIns="0" tIns="0" bIns="0"/>
+          <a:lstStyle/>
+          <a:p>
+            <a:pPr algn="l"/>
+            <a:r>
+              <a:rPr sz="1200" b="0" i="0">
+                <a:solidFill>
+                  <a:srgbClr val="A9C8F0"/>
+                </a:solidFill>
+                <a:latin typeface="Calibri"/>
+              </a:rPr>
+              <a:t>https://lana6478.github.io/T-level-Design-Development-Engineering-Manufacturing/#/01-core-component/01-engineering-core-part1.md</a:t>
+            </a:r>
+          </a:p>
+        </p:txBody>
+      </p:sp>
+    </p:spTree>
+  </p:cSld>
+  <p:clrMapOvr>
+    <a:masterClrMapping/>
+  </p:clrMapOvr>
+</p:sld>
+</file>
+
 <file path=ppt/slides/slide2.xml><?xml version="1.0" encoding="utf-8"?>
 <p:sld xmlns:a="http://schemas.openxmlformats.org/drawingml/2006/main" xmlns:p="http://schemas.openxmlformats.org/presentationml/2006/main" xmlns:r="http://schemas.openxmlformats.org/officeDocument/2006/relationships">
   <p:cSld>
@@ -4836,6 +8388,414 @@
                 <a:latin typeface="Calibri"/>
               </a:rPr>
               <a:t>3</a:t>
+            </a:r>
+          </a:p>
+        </p:txBody>
+      </p:sp>
+      <p:sp>
+        <p:nvSpPr>
+          <p:cNvPr id="6" name="TextBox 5"/>
+          <p:cNvSpPr txBox="1"/>
+          <p:nvPr/>
+        </p:nvSpPr>
+        <p:spPr>
+          <a:xfrm>
+            <a:off x="548640" y="1554480"/>
+            <a:ext cx="6720840" cy="4617720"/>
+          </a:xfrm>
+          <a:prstGeom prst="rect">
+            <a:avLst/>
+          </a:prstGeom>
+          <a:noFill/>
+        </p:spPr>
+        <p:txBody>
+          <a:bodyPr wrap="square" lIns="0" rIns="0" tIns="0" bIns="0">
+            <a:spAutoFit/>
+          </a:bodyPr>
+          <a:lstStyle/>
+          <a:p>
+            <a:pPr>
+              <a:spcAft>
+                <a:spcPts val="1140"/>
+              </a:spcAft>
+            </a:pPr>
+            <a:r>
+              <a:rPr sz="1900" b="0">
+                <a:solidFill>
+                  <a:srgbClr val="202122"/>
+                </a:solidFill>
+                <a:latin typeface="Calibri"/>
+              </a:rPr>
+              <a:t>Heat treatments change a metal's structure and properties.</a:t>
+            </a:r>
+          </a:p>
+          <a:p>
+            <a:pPr>
+              <a:spcAft>
+                <a:spcPts val="1140"/>
+              </a:spcAft>
+            </a:pPr>
+            <a:r>
+              <a:rPr sz="1900" b="0">
+                <a:solidFill>
+                  <a:srgbClr val="202122"/>
+                </a:solidFill>
+                <a:latin typeface="Calibri"/>
+              </a:rPr>
+              <a:t>Quench hardening heats steel and cools it rapidly, making it very hard but brittle; tempering then reheats it gently to reduce brittleness. Case hardening gives a hard outer skin with a tough core. Annealing softens metal and relieves stress; normalising refines its grain. Precipitation hardening strengthens some alloys, such as aluminium.</a:t>
+            </a:r>
+          </a:p>
+          <a:p>
+            <a:pPr>
+              <a:spcAft>
+                <a:spcPts val="1140"/>
+              </a:spcAft>
+            </a:pPr>
+            <a:r>
+              <a:rPr sz="1900" b="0">
+                <a:solidFill>
+                  <a:srgbClr val="202122"/>
+                </a:solidFill>
+                <a:latin typeface="Calibri"/>
+              </a:rPr>
+              <a:t>Surface treatments protect against corrosion: painting and plastic coating form a barrier; galvanising coats steel with zinc, which corrodes first to protect it.</a:t>
+            </a:r>
+          </a:p>
+          <a:p>
+            <a:pPr>
+              <a:spcAft>
+                <a:spcPts val="1140"/>
+              </a:spcAft>
+            </a:pPr>
+            <a:r>
+              <a:rPr sz="1900" b="0">
+                <a:solidFill>
+                  <a:srgbClr val="202122"/>
+                </a:solidFill>
+                <a:latin typeface="Calibri"/>
+              </a:rPr>
+              <a:t>Processing, such as rolling, forging and welding, also changes properties.</a:t>
+            </a:r>
+          </a:p>
+        </p:txBody>
+      </p:sp>
+      <p:sp>
+        <p:nvSpPr>
+          <p:cNvPr id="7" name="Rounded Rectangle 6"/>
+          <p:cNvSpPr/>
+          <p:nvPr/>
+        </p:nvSpPr>
+        <p:spPr>
+          <a:xfrm>
+            <a:off x="7772400" y="1554480"/>
+            <a:ext cx="3867912" cy="4526280"/>
+          </a:xfrm>
+          <a:prstGeom prst="roundRect">
+            <a:avLst>
+              <a:gd name="adj" fmla="val 8000"/>
+            </a:avLst>
+          </a:prstGeom>
+          <a:solidFill>
+            <a:srgbClr val="03306E"/>
+          </a:solidFill>
+          <a:ln>
+            <a:noFill/>
+          </a:ln>
+          <a:effectLst/>
+        </p:spPr>
+        <p:style>
+          <a:lnRef idx="1">
+            <a:schemeClr val="accent1"/>
+          </a:lnRef>
+          <a:fillRef idx="3">
+            <a:schemeClr val="accent1"/>
+          </a:fillRef>
+          <a:effectRef idx="2">
+            <a:schemeClr val="accent1"/>
+          </a:effectRef>
+          <a:fontRef idx="minor">
+            <a:schemeClr val="lt1"/>
+          </a:fontRef>
+        </p:style>
+        <p:txBody>
+          <a:bodyPr rtlCol="0" anchor="ctr"/>
+          <a:lstStyle/>
+          <a:p/>
+        </p:txBody>
+      </p:sp>
+      <p:sp>
+        <p:nvSpPr>
+          <p:cNvPr id="8" name="Oval 7"/>
+          <p:cNvSpPr/>
+          <p:nvPr/>
+        </p:nvSpPr>
+        <p:spPr>
+          <a:xfrm>
+            <a:off x="8046720" y="1828800"/>
+            <a:ext cx="548640" cy="548640"/>
+          </a:xfrm>
+          <a:prstGeom prst="ellipse">
+            <a:avLst/>
+          </a:prstGeom>
+          <a:solidFill>
+            <a:srgbClr val="F2B705"/>
+          </a:solidFill>
+          <a:ln>
+            <a:noFill/>
+          </a:ln>
+          <a:effectLst/>
+        </p:spPr>
+        <p:style>
+          <a:lnRef idx="1">
+            <a:schemeClr val="accent1"/>
+          </a:lnRef>
+          <a:fillRef idx="3">
+            <a:schemeClr val="accent1"/>
+          </a:fillRef>
+          <a:effectRef idx="2">
+            <a:schemeClr val="accent1"/>
+          </a:effectRef>
+          <a:fontRef idx="minor">
+            <a:schemeClr val="lt1"/>
+          </a:fontRef>
+        </p:style>
+        <p:txBody>
+          <a:bodyPr rtlCol="0" anchor="ctr" lIns="0" rIns="0" tIns="0" bIns="0"/>
+          <a:lstStyle/>
+          <a:p>
+            <a:pPr algn="ctr"/>
+            <a:r>
+              <a:rPr sz="1300" b="1">
+                <a:solidFill>
+                  <a:srgbClr val="202122"/>
+                </a:solidFill>
+                <a:latin typeface="Calibri"/>
+              </a:rPr>
+              <a:t>e.g.</a:t>
+            </a:r>
+          </a:p>
+        </p:txBody>
+      </p:sp>
+      <p:sp>
+        <p:nvSpPr>
+          <p:cNvPr id="9" name="TextBox 8"/>
+          <p:cNvSpPr txBox="1"/>
+          <p:nvPr/>
+        </p:nvSpPr>
+        <p:spPr>
+          <a:xfrm>
+            <a:off x="8046720" y="2560320"/>
+            <a:ext cx="3291840" cy="365760"/>
+          </a:xfrm>
+          <a:prstGeom prst="rect">
+            <a:avLst/>
+          </a:prstGeom>
+          <a:noFill/>
+        </p:spPr>
+        <p:txBody>
+          <a:bodyPr wrap="square" anchor="t" lIns="0" rIns="0" tIns="0" bIns="0"/>
+          <a:lstStyle/>
+          <a:p>
+            <a:pPr algn="l"/>
+            <a:r>
+              <a:rPr sz="1300" b="1" i="0">
+                <a:solidFill>
+                  <a:srgbClr val="A9C8F0"/>
+                </a:solidFill>
+                <a:latin typeface="Calibri"/>
+              </a:rPr>
+              <a:t>EXAMPLE</a:t>
+            </a:r>
+          </a:p>
+        </p:txBody>
+      </p:sp>
+      <p:sp>
+        <p:nvSpPr>
+          <p:cNvPr id="10" name="TextBox 9"/>
+          <p:cNvSpPr txBox="1"/>
+          <p:nvPr/>
+        </p:nvSpPr>
+        <p:spPr>
+          <a:xfrm>
+            <a:off x="8046720" y="2971800"/>
+            <a:ext cx="3291840" cy="2971800"/>
+          </a:xfrm>
+          <a:prstGeom prst="rect">
+            <a:avLst/>
+          </a:prstGeom>
+          <a:noFill/>
+        </p:spPr>
+        <p:txBody>
+          <a:bodyPr wrap="square" anchor="t" lIns="0" rIns="0" tIns="0" bIns="0"/>
+          <a:lstStyle/>
+          <a:p>
+            <a:pPr algn="l"/>
+            <a:r>
+              <a:rPr sz="1900" b="0" i="0">
+                <a:solidFill>
+                  <a:srgbClr val="FFFFFF"/>
+                </a:solidFill>
+                <a:latin typeface="Cambria"/>
+              </a:rPr>
+              <a:t>A chisel is quench hardened so its edge stays sharp, then tempered so it doesn't shatter when hit with a hammer.</a:t>
+            </a:r>
+          </a:p>
+        </p:txBody>
+      </p:sp>
+    </p:spTree>
+  </p:cSld>
+  <p:clrMapOvr>
+    <a:masterClrMapping/>
+  </p:clrMapOvr>
+</p:sld>
+</file>
+
+<file path=ppt/slides/slide4.xml><?xml version="1.0" encoding="utf-8"?>
+<p:sld xmlns:a="http://schemas.openxmlformats.org/drawingml/2006/main" xmlns:p="http://schemas.openxmlformats.org/presentationml/2006/main" xmlns:r="http://schemas.openxmlformats.org/officeDocument/2006/relationships">
+  <p:cSld>
+    <p:bg>
+      <p:bgPr>
+        <a:solidFill>
+          <a:srgbClr val="FFFFFF"/>
+        </a:solidFill>
+        <a:effectLst/>
+      </p:bgPr>
+    </p:bg>
+    <p:spTree>
+      <p:nvGrpSpPr>
+        <p:cNvPr id="1" name=""/>
+        <p:cNvGrpSpPr/>
+        <p:nvPr/>
+      </p:nvGrpSpPr>
+      <p:grpSpPr/>
+      <p:sp>
+        <p:nvSpPr>
+          <p:cNvPr id="2" name="TextBox 1"/>
+          <p:cNvSpPr txBox="1"/>
+          <p:nvPr/>
+        </p:nvSpPr>
+        <p:spPr>
+          <a:xfrm>
+            <a:off x="548640" y="320040"/>
+            <a:ext cx="11094415" cy="274320"/>
+          </a:xfrm>
+          <a:prstGeom prst="rect">
+            <a:avLst/>
+          </a:prstGeom>
+          <a:noFill/>
+        </p:spPr>
+        <p:txBody>
+          <a:bodyPr wrap="square" anchor="t" lIns="0" rIns="0" tIns="0" bIns="0"/>
+          <a:lstStyle/>
+          <a:p>
+            <a:pPr algn="l"/>
+            <a:r>
+              <a:rPr sz="1100" b="1" i="0">
+                <a:solidFill>
+                  <a:srgbClr val="54595D"/>
+                </a:solidFill>
+                <a:latin typeface="Calibri"/>
+              </a:rPr>
+              <a:t>ENGINEERING CORE  ·  Core topic 6</a:t>
+            </a:r>
+          </a:p>
+        </p:txBody>
+      </p:sp>
+      <p:sp>
+        <p:nvSpPr>
+          <p:cNvPr id="3" name="TextBox 2"/>
+          <p:cNvSpPr txBox="1"/>
+          <p:nvPr/>
+        </p:nvSpPr>
+        <p:spPr>
+          <a:xfrm>
+            <a:off x="548640" y="566928"/>
+            <a:ext cx="11094415" cy="822960"/>
+          </a:xfrm>
+          <a:prstGeom prst="rect">
+            <a:avLst/>
+          </a:prstGeom>
+          <a:noFill/>
+        </p:spPr>
+        <p:txBody>
+          <a:bodyPr wrap="square" anchor="ctr" lIns="0" rIns="0" tIns="0" bIns="0"/>
+          <a:lstStyle/>
+          <a:p>
+            <a:pPr algn="l"/>
+            <a:r>
+              <a:rPr sz="3200" b="1" i="0">
+                <a:solidFill>
+                  <a:srgbClr val="03306E"/>
+                </a:solidFill>
+                <a:latin typeface="Cambria"/>
+              </a:rPr>
+              <a:t>Heat and surface treatments</a:t>
+            </a:r>
+          </a:p>
+        </p:txBody>
+      </p:sp>
+      <p:sp>
+        <p:nvSpPr>
+          <p:cNvPr id="4" name="TextBox 3"/>
+          <p:cNvSpPr txBox="1"/>
+          <p:nvPr/>
+        </p:nvSpPr>
+        <p:spPr>
+          <a:xfrm>
+            <a:off x="548640" y="6446520"/>
+            <a:ext cx="8229600" cy="274320"/>
+          </a:xfrm>
+          <a:prstGeom prst="rect">
+            <a:avLst/>
+          </a:prstGeom>
+          <a:noFill/>
+        </p:spPr>
+        <p:txBody>
+          <a:bodyPr wrap="square" anchor="t" lIns="0" rIns="0" tIns="0" bIns="0"/>
+          <a:lstStyle/>
+          <a:p>
+            <a:pPr algn="l"/>
+            <a:r>
+              <a:rPr sz="1000" b="0" i="0">
+                <a:solidFill>
+                  <a:srgbClr val="54595D"/>
+                </a:solidFill>
+                <a:latin typeface="Calibri"/>
+              </a:rPr>
+              <a:t>Design and Development for Engineering and Manufacturing T Level  ·  Material Processing, Treatment, Failure and Testing</a:t>
+            </a:r>
+          </a:p>
+        </p:txBody>
+      </p:sp>
+      <p:sp>
+        <p:nvSpPr>
+          <p:cNvPr id="5" name="TextBox 4"/>
+          <p:cNvSpPr txBox="1"/>
+          <p:nvPr/>
+        </p:nvSpPr>
+        <p:spPr>
+          <a:xfrm>
+            <a:off x="10728655" y="6446520"/>
+            <a:ext cx="914400" cy="274320"/>
+          </a:xfrm>
+          <a:prstGeom prst="rect">
+            <a:avLst/>
+          </a:prstGeom>
+          <a:noFill/>
+        </p:spPr>
+        <p:txBody>
+          <a:bodyPr wrap="square" anchor="t" lIns="0" rIns="0" tIns="0" bIns="0"/>
+          <a:lstStyle/>
+          <a:p>
+            <a:pPr algn="r"/>
+            <a:r>
+              <a:rPr sz="1000" b="0" i="0">
+                <a:solidFill>
+                  <a:srgbClr val="54595D"/>
+                </a:solidFill>
+                <a:latin typeface="Calibri"/>
+              </a:rPr>
+              <a:t>4</a:t>
             </a:r>
           </a:p>
         </p:txBody>
@@ -5150,816 +9110,6 @@
 </p:sld>
 </file>
 
-<file path=ppt/slides/slide4.xml><?xml version="1.0" encoding="utf-8"?>
-<p:sld xmlns:a="http://schemas.openxmlformats.org/drawingml/2006/main" xmlns:p="http://schemas.openxmlformats.org/presentationml/2006/main" xmlns:r="http://schemas.openxmlformats.org/officeDocument/2006/relationships">
-  <p:cSld>
-    <p:bg>
-      <p:bgPr>
-        <a:solidFill>
-          <a:srgbClr val="FFFFFF"/>
-        </a:solidFill>
-        <a:effectLst/>
-      </p:bgPr>
-    </p:bg>
-    <p:spTree>
-      <p:nvGrpSpPr>
-        <p:cNvPr id="1" name=""/>
-        <p:cNvGrpSpPr/>
-        <p:nvPr/>
-      </p:nvGrpSpPr>
-      <p:grpSpPr/>
-      <p:sp>
-        <p:nvSpPr>
-          <p:cNvPr id="2" name="TextBox 1"/>
-          <p:cNvSpPr txBox="1"/>
-          <p:nvPr/>
-        </p:nvSpPr>
-        <p:spPr>
-          <a:xfrm>
-            <a:off x="548640" y="320040"/>
-            <a:ext cx="11094415" cy="274320"/>
-          </a:xfrm>
-          <a:prstGeom prst="rect">
-            <a:avLst/>
-          </a:prstGeom>
-          <a:noFill/>
-        </p:spPr>
-        <p:txBody>
-          <a:bodyPr wrap="square" anchor="t" lIns="0" rIns="0" tIns="0" bIns="0"/>
-          <a:lstStyle/>
-          <a:p>
-            <a:pPr algn="l"/>
-            <a:r>
-              <a:rPr sz="1100" b="1" i="0">
-                <a:solidFill>
-                  <a:srgbClr val="54595D"/>
-                </a:solidFill>
-                <a:latin typeface="Calibri"/>
-              </a:rPr>
-              <a:t>ENGINEERING CORE  ·  Core topic 6</a:t>
-            </a:r>
-          </a:p>
-        </p:txBody>
-      </p:sp>
-      <p:sp>
-        <p:nvSpPr>
-          <p:cNvPr id="3" name="TextBox 2"/>
-          <p:cNvSpPr txBox="1"/>
-          <p:nvPr/>
-        </p:nvSpPr>
-        <p:spPr>
-          <a:xfrm>
-            <a:off x="548640" y="566928"/>
-            <a:ext cx="11094415" cy="822960"/>
-          </a:xfrm>
-          <a:prstGeom prst="rect">
-            <a:avLst/>
-          </a:prstGeom>
-          <a:noFill/>
-        </p:spPr>
-        <p:txBody>
-          <a:bodyPr wrap="square" anchor="ctr" lIns="0" rIns="0" tIns="0" bIns="0"/>
-          <a:lstStyle/>
-          <a:p>
-            <a:pPr algn="l"/>
-            <a:r>
-              <a:rPr sz="3200" b="1" i="0">
-                <a:solidFill>
-                  <a:srgbClr val="03306E"/>
-                </a:solidFill>
-                <a:latin typeface="Cambria"/>
-              </a:rPr>
-              <a:t>Why materials fail</a:t>
-            </a:r>
-          </a:p>
-        </p:txBody>
-      </p:sp>
-      <p:sp>
-        <p:nvSpPr>
-          <p:cNvPr id="4" name="TextBox 3"/>
-          <p:cNvSpPr txBox="1"/>
-          <p:nvPr/>
-        </p:nvSpPr>
-        <p:spPr>
-          <a:xfrm>
-            <a:off x="548640" y="6446520"/>
-            <a:ext cx="8229600" cy="274320"/>
-          </a:xfrm>
-          <a:prstGeom prst="rect">
-            <a:avLst/>
-          </a:prstGeom>
-          <a:noFill/>
-        </p:spPr>
-        <p:txBody>
-          <a:bodyPr wrap="square" anchor="t" lIns="0" rIns="0" tIns="0" bIns="0"/>
-          <a:lstStyle/>
-          <a:p>
-            <a:pPr algn="l"/>
-            <a:r>
-              <a:rPr sz="1000" b="0" i="0">
-                <a:solidFill>
-                  <a:srgbClr val="54595D"/>
-                </a:solidFill>
-                <a:latin typeface="Calibri"/>
-              </a:rPr>
-              <a:t>Design and Development for Engineering and Manufacturing T Level  ·  Material Processing, Treatment, Failure and Testing</a:t>
-            </a:r>
-          </a:p>
-        </p:txBody>
-      </p:sp>
-      <p:sp>
-        <p:nvSpPr>
-          <p:cNvPr id="5" name="TextBox 4"/>
-          <p:cNvSpPr txBox="1"/>
-          <p:nvPr/>
-        </p:nvSpPr>
-        <p:spPr>
-          <a:xfrm>
-            <a:off x="10728655" y="6446520"/>
-            <a:ext cx="914400" cy="274320"/>
-          </a:xfrm>
-          <a:prstGeom prst="rect">
-            <a:avLst/>
-          </a:prstGeom>
-          <a:noFill/>
-        </p:spPr>
-        <p:txBody>
-          <a:bodyPr wrap="square" anchor="t" lIns="0" rIns="0" tIns="0" bIns="0"/>
-          <a:lstStyle/>
-          <a:p>
-            <a:pPr algn="r"/>
-            <a:r>
-              <a:rPr sz="1000" b="0" i="0">
-                <a:solidFill>
-                  <a:srgbClr val="54595D"/>
-                </a:solidFill>
-                <a:latin typeface="Calibri"/>
-              </a:rPr>
-              <a:t>4</a:t>
-            </a:r>
-          </a:p>
-        </p:txBody>
-      </p:sp>
-      <p:sp>
-        <p:nvSpPr>
-          <p:cNvPr id="6" name="Rounded Rectangle 5"/>
-          <p:cNvSpPr/>
-          <p:nvPr/>
-        </p:nvSpPr>
-        <p:spPr>
-          <a:xfrm>
-            <a:off x="548640" y="1600200"/>
-            <a:ext cx="5410047" cy="2148840"/>
-          </a:xfrm>
-          <a:prstGeom prst="roundRect">
-            <a:avLst>
-              <a:gd name="adj" fmla="val 6000"/>
-            </a:avLst>
-          </a:prstGeom>
-          <a:solidFill>
-            <a:srgbClr val="EAF3FF"/>
-          </a:solidFill>
-          <a:ln>
-            <a:noFill/>
-          </a:ln>
-          <a:effectLst/>
-        </p:spPr>
-        <p:style>
-          <a:lnRef idx="1">
-            <a:schemeClr val="accent1"/>
-          </a:lnRef>
-          <a:fillRef idx="3">
-            <a:schemeClr val="accent1"/>
-          </a:fillRef>
-          <a:effectRef idx="2">
-            <a:schemeClr val="accent1"/>
-          </a:effectRef>
-          <a:fontRef idx="minor">
-            <a:schemeClr val="lt1"/>
-          </a:fontRef>
-        </p:style>
-        <p:txBody>
-          <a:bodyPr rtlCol="0" anchor="ctr"/>
-          <a:lstStyle/>
-          <a:p/>
-        </p:txBody>
-      </p:sp>
-      <p:sp>
-        <p:nvSpPr>
-          <p:cNvPr id="7" name="Oval 6"/>
-          <p:cNvSpPr/>
-          <p:nvPr/>
-        </p:nvSpPr>
-        <p:spPr>
-          <a:xfrm>
-            <a:off x="777240" y="1828800"/>
-            <a:ext cx="457200" cy="457200"/>
-          </a:xfrm>
-          <a:prstGeom prst="ellipse">
-            <a:avLst/>
-          </a:prstGeom>
-          <a:solidFill>
-            <a:srgbClr val="F2B705"/>
-          </a:solidFill>
-          <a:ln>
-            <a:noFill/>
-          </a:ln>
-          <a:effectLst/>
-        </p:spPr>
-        <p:style>
-          <a:lnRef idx="1">
-            <a:schemeClr val="accent1"/>
-          </a:lnRef>
-          <a:fillRef idx="3">
-            <a:schemeClr val="accent1"/>
-          </a:fillRef>
-          <a:effectRef idx="2">
-            <a:schemeClr val="accent1"/>
-          </a:effectRef>
-          <a:fontRef idx="minor">
-            <a:schemeClr val="lt1"/>
-          </a:fontRef>
-        </p:style>
-        <p:txBody>
-          <a:bodyPr rtlCol="0" anchor="ctr" lIns="0" rIns="0" tIns="0" bIns="0"/>
-          <a:lstStyle/>
-          <a:p>
-            <a:pPr algn="ctr"/>
-            <a:r>
-              <a:rPr sz="1500" b="1">
-                <a:solidFill>
-                  <a:srgbClr val="202122"/>
-                </a:solidFill>
-                <a:latin typeface="Calibri"/>
-              </a:rPr>
-              <a:t>1</a:t>
-            </a:r>
-          </a:p>
-        </p:txBody>
-      </p:sp>
-      <p:sp>
-        <p:nvSpPr>
-          <p:cNvPr id="8" name="TextBox 7"/>
-          <p:cNvSpPr txBox="1"/>
-          <p:nvPr/>
-        </p:nvSpPr>
-        <p:spPr>
-          <a:xfrm>
-            <a:off x="1371600" y="1801368"/>
-            <a:ext cx="4404207" cy="512064"/>
-          </a:xfrm>
-          <a:prstGeom prst="rect">
-            <a:avLst/>
-          </a:prstGeom>
-          <a:noFill/>
-        </p:spPr>
-        <p:txBody>
-          <a:bodyPr wrap="square" anchor="ctr" lIns="0" rIns="0" tIns="0" bIns="0"/>
-          <a:lstStyle/>
-          <a:p>
-            <a:pPr algn="l"/>
-            <a:r>
-              <a:rPr sz="1900" b="1" i="0">
-                <a:solidFill>
-                  <a:srgbClr val="03306E"/>
-                </a:solidFill>
-                <a:latin typeface="Calibri"/>
-              </a:rPr>
-              <a:t>Corrosion</a:t>
-            </a:r>
-          </a:p>
-        </p:txBody>
-      </p:sp>
-      <p:sp>
-        <p:nvSpPr>
-          <p:cNvPr id="9" name="TextBox 8"/>
-          <p:cNvSpPr txBox="1"/>
-          <p:nvPr/>
-        </p:nvSpPr>
-        <p:spPr>
-          <a:xfrm>
-            <a:off x="777240" y="2468880"/>
-            <a:ext cx="4952847" cy="1143000"/>
-          </a:xfrm>
-          <a:prstGeom prst="rect">
-            <a:avLst/>
-          </a:prstGeom>
-          <a:noFill/>
-        </p:spPr>
-        <p:txBody>
-          <a:bodyPr wrap="square" anchor="t" lIns="0" rIns="0" tIns="0" bIns="0"/>
-          <a:lstStyle/>
-          <a:p>
-            <a:pPr algn="l"/>
-            <a:r>
-              <a:rPr sz="2000" b="0" i="0">
-                <a:solidFill>
-                  <a:srgbClr val="202122"/>
-                </a:solidFill>
-                <a:latin typeface="Calibri"/>
-              </a:rPr>
-              <a:t>Oxidation, chemical attack or stress corrosion eats material away.</a:t>
-            </a:r>
-          </a:p>
-        </p:txBody>
-      </p:sp>
-      <p:sp>
-        <p:nvSpPr>
-          <p:cNvPr id="10" name="Rounded Rectangle 9"/>
-          <p:cNvSpPr/>
-          <p:nvPr/>
-        </p:nvSpPr>
-        <p:spPr>
-          <a:xfrm>
-            <a:off x="6233007" y="1600200"/>
-            <a:ext cx="5410047" cy="2148840"/>
-          </a:xfrm>
-          <a:prstGeom prst="roundRect">
-            <a:avLst>
-              <a:gd name="adj" fmla="val 6000"/>
-            </a:avLst>
-          </a:prstGeom>
-          <a:solidFill>
-            <a:srgbClr val="EAF3FF"/>
-          </a:solidFill>
-          <a:ln>
-            <a:noFill/>
-          </a:ln>
-          <a:effectLst/>
-        </p:spPr>
-        <p:style>
-          <a:lnRef idx="1">
-            <a:schemeClr val="accent1"/>
-          </a:lnRef>
-          <a:fillRef idx="3">
-            <a:schemeClr val="accent1"/>
-          </a:fillRef>
-          <a:effectRef idx="2">
-            <a:schemeClr val="accent1"/>
-          </a:effectRef>
-          <a:fontRef idx="minor">
-            <a:schemeClr val="lt1"/>
-          </a:fontRef>
-        </p:style>
-        <p:txBody>
-          <a:bodyPr rtlCol="0" anchor="ctr"/>
-          <a:lstStyle/>
-          <a:p/>
-        </p:txBody>
-      </p:sp>
-      <p:sp>
-        <p:nvSpPr>
-          <p:cNvPr id="11" name="Oval 10"/>
-          <p:cNvSpPr/>
-          <p:nvPr/>
-        </p:nvSpPr>
-        <p:spPr>
-          <a:xfrm>
-            <a:off x="6461607" y="1828800"/>
-            <a:ext cx="457200" cy="457200"/>
-          </a:xfrm>
-          <a:prstGeom prst="ellipse">
-            <a:avLst/>
-          </a:prstGeom>
-          <a:solidFill>
-            <a:srgbClr val="F2B705"/>
-          </a:solidFill>
-          <a:ln>
-            <a:noFill/>
-          </a:ln>
-          <a:effectLst/>
-        </p:spPr>
-        <p:style>
-          <a:lnRef idx="1">
-            <a:schemeClr val="accent1"/>
-          </a:lnRef>
-          <a:fillRef idx="3">
-            <a:schemeClr val="accent1"/>
-          </a:fillRef>
-          <a:effectRef idx="2">
-            <a:schemeClr val="accent1"/>
-          </a:effectRef>
-          <a:fontRef idx="minor">
-            <a:schemeClr val="lt1"/>
-          </a:fontRef>
-        </p:style>
-        <p:txBody>
-          <a:bodyPr rtlCol="0" anchor="ctr" lIns="0" rIns="0" tIns="0" bIns="0"/>
-          <a:lstStyle/>
-          <a:p>
-            <a:pPr algn="ctr"/>
-            <a:r>
-              <a:rPr sz="1500" b="1">
-                <a:solidFill>
-                  <a:srgbClr val="202122"/>
-                </a:solidFill>
-                <a:latin typeface="Calibri"/>
-              </a:rPr>
-              <a:t>2</a:t>
-            </a:r>
-          </a:p>
-        </p:txBody>
-      </p:sp>
-      <p:sp>
-        <p:nvSpPr>
-          <p:cNvPr id="12" name="TextBox 11"/>
-          <p:cNvSpPr txBox="1"/>
-          <p:nvPr/>
-        </p:nvSpPr>
-        <p:spPr>
-          <a:xfrm>
-            <a:off x="7055967" y="1801368"/>
-            <a:ext cx="4404207" cy="512064"/>
-          </a:xfrm>
-          <a:prstGeom prst="rect">
-            <a:avLst/>
-          </a:prstGeom>
-          <a:noFill/>
-        </p:spPr>
-        <p:txBody>
-          <a:bodyPr wrap="square" anchor="ctr" lIns="0" rIns="0" tIns="0" bIns="0"/>
-          <a:lstStyle/>
-          <a:p>
-            <a:pPr algn="l"/>
-            <a:r>
-              <a:rPr sz="1900" b="1" i="0">
-                <a:solidFill>
-                  <a:srgbClr val="03306E"/>
-                </a:solidFill>
-                <a:latin typeface="Calibri"/>
-              </a:rPr>
-              <a:t>Fatigue</a:t>
-            </a:r>
-          </a:p>
-        </p:txBody>
-      </p:sp>
-      <p:sp>
-        <p:nvSpPr>
-          <p:cNvPr id="13" name="TextBox 12"/>
-          <p:cNvSpPr txBox="1"/>
-          <p:nvPr/>
-        </p:nvSpPr>
-        <p:spPr>
-          <a:xfrm>
-            <a:off x="6461607" y="2468880"/>
-            <a:ext cx="4952847" cy="1143000"/>
-          </a:xfrm>
-          <a:prstGeom prst="rect">
-            <a:avLst/>
-          </a:prstGeom>
-          <a:noFill/>
-        </p:spPr>
-        <p:txBody>
-          <a:bodyPr wrap="square" anchor="t" lIns="0" rIns="0" tIns="0" bIns="0"/>
-          <a:lstStyle/>
-          <a:p>
-            <a:pPr algn="l"/>
-            <a:r>
-              <a:rPr sz="2000" b="0" i="0">
-                <a:solidFill>
-                  <a:srgbClr val="202122"/>
-                </a:solidFill>
-                <a:latin typeface="Calibri"/>
-              </a:rPr>
-              <a:t>Repeated loading below the breaking stress causes cracks: the paperclip.</a:t>
-            </a:r>
-          </a:p>
-        </p:txBody>
-      </p:sp>
-      <p:sp>
-        <p:nvSpPr>
-          <p:cNvPr id="14" name="Rounded Rectangle 13"/>
-          <p:cNvSpPr/>
-          <p:nvPr/>
-        </p:nvSpPr>
-        <p:spPr>
-          <a:xfrm>
-            <a:off x="548640" y="4023360"/>
-            <a:ext cx="5410047" cy="2148840"/>
-          </a:xfrm>
-          <a:prstGeom prst="roundRect">
-            <a:avLst>
-              <a:gd name="adj" fmla="val 6000"/>
-            </a:avLst>
-          </a:prstGeom>
-          <a:solidFill>
-            <a:srgbClr val="EAF3FF"/>
-          </a:solidFill>
-          <a:ln>
-            <a:noFill/>
-          </a:ln>
-          <a:effectLst/>
-        </p:spPr>
-        <p:style>
-          <a:lnRef idx="1">
-            <a:schemeClr val="accent1"/>
-          </a:lnRef>
-          <a:fillRef idx="3">
-            <a:schemeClr val="accent1"/>
-          </a:fillRef>
-          <a:effectRef idx="2">
-            <a:schemeClr val="accent1"/>
-          </a:effectRef>
-          <a:fontRef idx="minor">
-            <a:schemeClr val="lt1"/>
-          </a:fontRef>
-        </p:style>
-        <p:txBody>
-          <a:bodyPr rtlCol="0" anchor="ctr"/>
-          <a:lstStyle/>
-          <a:p/>
-        </p:txBody>
-      </p:sp>
-      <p:sp>
-        <p:nvSpPr>
-          <p:cNvPr id="15" name="Oval 14"/>
-          <p:cNvSpPr/>
-          <p:nvPr/>
-        </p:nvSpPr>
-        <p:spPr>
-          <a:xfrm>
-            <a:off x="777240" y="4251960"/>
-            <a:ext cx="457200" cy="457200"/>
-          </a:xfrm>
-          <a:prstGeom prst="ellipse">
-            <a:avLst/>
-          </a:prstGeom>
-          <a:solidFill>
-            <a:srgbClr val="F2B705"/>
-          </a:solidFill>
-          <a:ln>
-            <a:noFill/>
-          </a:ln>
-          <a:effectLst/>
-        </p:spPr>
-        <p:style>
-          <a:lnRef idx="1">
-            <a:schemeClr val="accent1"/>
-          </a:lnRef>
-          <a:fillRef idx="3">
-            <a:schemeClr val="accent1"/>
-          </a:fillRef>
-          <a:effectRef idx="2">
-            <a:schemeClr val="accent1"/>
-          </a:effectRef>
-          <a:fontRef idx="minor">
-            <a:schemeClr val="lt1"/>
-          </a:fontRef>
-        </p:style>
-        <p:txBody>
-          <a:bodyPr rtlCol="0" anchor="ctr" lIns="0" rIns="0" tIns="0" bIns="0"/>
-          <a:lstStyle/>
-          <a:p>
-            <a:pPr algn="ctr"/>
-            <a:r>
-              <a:rPr sz="1500" b="1">
-                <a:solidFill>
-                  <a:srgbClr val="202122"/>
-                </a:solidFill>
-                <a:latin typeface="Calibri"/>
-              </a:rPr>
-              <a:t>3</a:t>
-            </a:r>
-          </a:p>
-        </p:txBody>
-      </p:sp>
-      <p:sp>
-        <p:nvSpPr>
-          <p:cNvPr id="16" name="TextBox 15"/>
-          <p:cNvSpPr txBox="1"/>
-          <p:nvPr/>
-        </p:nvSpPr>
-        <p:spPr>
-          <a:xfrm>
-            <a:off x="1371600" y="4224528"/>
-            <a:ext cx="4404207" cy="512064"/>
-          </a:xfrm>
-          <a:prstGeom prst="rect">
-            <a:avLst/>
-          </a:prstGeom>
-          <a:noFill/>
-        </p:spPr>
-        <p:txBody>
-          <a:bodyPr wrap="square" anchor="ctr" lIns="0" rIns="0" tIns="0" bIns="0"/>
-          <a:lstStyle/>
-          <a:p>
-            <a:pPr algn="l"/>
-            <a:r>
-              <a:rPr sz="1900" b="1" i="0">
-                <a:solidFill>
-                  <a:srgbClr val="03306E"/>
-                </a:solidFill>
-                <a:latin typeface="Calibri"/>
-              </a:rPr>
-              <a:t>Creep</a:t>
-            </a:r>
-          </a:p>
-        </p:txBody>
-      </p:sp>
-      <p:sp>
-        <p:nvSpPr>
-          <p:cNvPr id="17" name="TextBox 16"/>
-          <p:cNvSpPr txBox="1"/>
-          <p:nvPr/>
-        </p:nvSpPr>
-        <p:spPr>
-          <a:xfrm>
-            <a:off x="777240" y="4892040"/>
-            <a:ext cx="4952847" cy="1143000"/>
-          </a:xfrm>
-          <a:prstGeom prst="rect">
-            <a:avLst/>
-          </a:prstGeom>
-          <a:noFill/>
-        </p:spPr>
-        <p:txBody>
-          <a:bodyPr wrap="square" anchor="t" lIns="0" rIns="0" tIns="0" bIns="0"/>
-          <a:lstStyle/>
-          <a:p>
-            <a:pPr algn="l"/>
-            <a:r>
-              <a:rPr sz="2000" b="0" i="0">
-                <a:solidFill>
-                  <a:srgbClr val="202122"/>
-                </a:solidFill>
-                <a:latin typeface="Calibri"/>
-              </a:rPr>
-              <a:t>Slow deformation under constant load, often at high temperature, in three stages.</a:t>
-            </a:r>
-          </a:p>
-        </p:txBody>
-      </p:sp>
-      <p:sp>
-        <p:nvSpPr>
-          <p:cNvPr id="18" name="Rounded Rectangle 17"/>
-          <p:cNvSpPr/>
-          <p:nvPr/>
-        </p:nvSpPr>
-        <p:spPr>
-          <a:xfrm>
-            <a:off x="6233007" y="4023360"/>
-            <a:ext cx="5410047" cy="2148840"/>
-          </a:xfrm>
-          <a:prstGeom prst="roundRect">
-            <a:avLst>
-              <a:gd name="adj" fmla="val 6000"/>
-            </a:avLst>
-          </a:prstGeom>
-          <a:solidFill>
-            <a:srgbClr val="EAF3FF"/>
-          </a:solidFill>
-          <a:ln>
-            <a:noFill/>
-          </a:ln>
-          <a:effectLst/>
-        </p:spPr>
-        <p:style>
-          <a:lnRef idx="1">
-            <a:schemeClr val="accent1"/>
-          </a:lnRef>
-          <a:fillRef idx="3">
-            <a:schemeClr val="accent1"/>
-          </a:fillRef>
-          <a:effectRef idx="2">
-            <a:schemeClr val="accent1"/>
-          </a:effectRef>
-          <a:fontRef idx="minor">
-            <a:schemeClr val="lt1"/>
-          </a:fontRef>
-        </p:style>
-        <p:txBody>
-          <a:bodyPr rtlCol="0" anchor="ctr"/>
-          <a:lstStyle/>
-          <a:p/>
-        </p:txBody>
-      </p:sp>
-      <p:sp>
-        <p:nvSpPr>
-          <p:cNvPr id="19" name="Oval 18"/>
-          <p:cNvSpPr/>
-          <p:nvPr/>
-        </p:nvSpPr>
-        <p:spPr>
-          <a:xfrm>
-            <a:off x="6461607" y="4251960"/>
-            <a:ext cx="457200" cy="457200"/>
-          </a:xfrm>
-          <a:prstGeom prst="ellipse">
-            <a:avLst/>
-          </a:prstGeom>
-          <a:solidFill>
-            <a:srgbClr val="F2B705"/>
-          </a:solidFill>
-          <a:ln>
-            <a:noFill/>
-          </a:ln>
-          <a:effectLst/>
-        </p:spPr>
-        <p:style>
-          <a:lnRef idx="1">
-            <a:schemeClr val="accent1"/>
-          </a:lnRef>
-          <a:fillRef idx="3">
-            <a:schemeClr val="accent1"/>
-          </a:fillRef>
-          <a:effectRef idx="2">
-            <a:schemeClr val="accent1"/>
-          </a:effectRef>
-          <a:fontRef idx="minor">
-            <a:schemeClr val="lt1"/>
-          </a:fontRef>
-        </p:style>
-        <p:txBody>
-          <a:bodyPr rtlCol="0" anchor="ctr" lIns="0" rIns="0" tIns="0" bIns="0"/>
-          <a:lstStyle/>
-          <a:p>
-            <a:pPr algn="ctr"/>
-            <a:r>
-              <a:rPr sz="1500" b="1">
-                <a:solidFill>
-                  <a:srgbClr val="202122"/>
-                </a:solidFill>
-                <a:latin typeface="Calibri"/>
-              </a:rPr>
-              <a:t>4</a:t>
-            </a:r>
-          </a:p>
-        </p:txBody>
-      </p:sp>
-      <p:sp>
-        <p:nvSpPr>
-          <p:cNvPr id="20" name="TextBox 19"/>
-          <p:cNvSpPr txBox="1"/>
-          <p:nvPr/>
-        </p:nvSpPr>
-        <p:spPr>
-          <a:xfrm>
-            <a:off x="7055967" y="4224528"/>
-            <a:ext cx="4404207" cy="512064"/>
-          </a:xfrm>
-          <a:prstGeom prst="rect">
-            <a:avLst/>
-          </a:prstGeom>
-          <a:noFill/>
-        </p:spPr>
-        <p:txBody>
-          <a:bodyPr wrap="square" anchor="ctr" lIns="0" rIns="0" tIns="0" bIns="0"/>
-          <a:lstStyle/>
-          <a:p>
-            <a:pPr algn="l"/>
-            <a:r>
-              <a:rPr sz="1900" b="1" i="0">
-                <a:solidFill>
-                  <a:srgbClr val="03306E"/>
-                </a:solidFill>
-                <a:latin typeface="Calibri"/>
-              </a:rPr>
-              <a:t>Prevention</a:t>
-            </a:r>
-          </a:p>
-        </p:txBody>
-      </p:sp>
-      <p:sp>
-        <p:nvSpPr>
-          <p:cNvPr id="21" name="TextBox 20"/>
-          <p:cNvSpPr txBox="1"/>
-          <p:nvPr/>
-        </p:nvSpPr>
-        <p:spPr>
-          <a:xfrm>
-            <a:off x="6461607" y="4892040"/>
-            <a:ext cx="4952847" cy="1143000"/>
-          </a:xfrm>
-          <a:prstGeom prst="rect">
-            <a:avLst/>
-          </a:prstGeom>
-          <a:noFill/>
-        </p:spPr>
-        <p:txBody>
-          <a:bodyPr wrap="square" anchor="t" lIns="0" rIns="0" tIns="0" bIns="0"/>
-          <a:lstStyle/>
-          <a:p>
-            <a:pPr algn="l"/>
-            <a:r>
-              <a:rPr sz="2000" b="0" i="0">
-                <a:solidFill>
-                  <a:srgbClr val="202122"/>
-                </a:solidFill>
-                <a:latin typeface="Calibri"/>
-              </a:rPr>
-              <a:t>Coatings, galvanising, sacrificial anodes, good design.</a:t>
-            </a:r>
-          </a:p>
-        </p:txBody>
-      </p:sp>
-    </p:spTree>
-  </p:cSld>
-  <p:clrMapOvr>
-    <a:masterClrMapping/>
-  </p:clrMapOvr>
-</p:sld>
-</file>
-
 <file path=ppt/slides/slide5.xml><?xml version="1.0" encoding="utf-8"?>
 <p:sld xmlns:a="http://schemas.openxmlformats.org/drawingml/2006/main" xmlns:p="http://schemas.openxmlformats.org/presentationml/2006/main" xmlns:r="http://schemas.openxmlformats.org/officeDocument/2006/relationships">
   <p:cSld>
@@ -6039,7 +9189,7 @@
                 </a:solidFill>
                 <a:latin typeface="Cambria"/>
               </a:rPr>
-              <a:t>Tensile testing</a:t>
+              <a:t>Quick check: Heat and surface treatments</a:t>
             </a:r>
           </a:p>
         </p:txBody>
@@ -6110,308 +9260,59 @@
           </a:p>
         </p:txBody>
       </p:sp>
-      <p:graphicFrame>
-        <p:nvGraphicFramePr>
-          <p:cNvPr id="6" name="Table 5"/>
-          <p:cNvGraphicFramePr>
-            <a:graphicFrameLocks noGrp="1"/>
-          </p:cNvGraphicFramePr>
-          <p:nvPr/>
-        </p:nvGraphicFramePr>
-        <p:xfrm>
-          <a:off x="548640" y="1600200"/>
-          <a:ext cx="11094414" cy="3977640"/>
-        </p:xfrm>
-        <a:graphic>
-          <a:graphicData uri="http://schemas.openxmlformats.org/drawingml/2006/table">
-            <a:tbl>
-              <a:tblPr firstRow="1" bandRow="1">
-                <a:tableStyleId>{5C22544A-7EE6-4342-B048-85BDC9FD1C3A}</a:tableStyleId>
-              </a:tblPr>
-              <a:tblGrid>
-                <a:gridCol w="3354125"/>
-                <a:gridCol w="7740289"/>
-              </a:tblGrid>
-              <a:tr h="662940">
-                <a:tc>
-                  <a:txBody>
-                    <a:bodyPr wrap="square"/>
-                    <a:lstStyle/>
-                    <a:p>
-                      <a:r>
-                        <a:rPr sz="1600" b="1">
-                          <a:solidFill>
-                            <a:srgbClr val="FFFFFF"/>
-                          </a:solidFill>
-                          <a:latin typeface="Calibri"/>
-                        </a:rPr>
-                        <a:t>Quantity</a:t>
-                      </a:r>
-                    </a:p>
-                  </a:txBody>
-                  <a:tcPr marL="91440" marR="91440" anchor="ctr">
-                    <a:solidFill>
-                      <a:srgbClr val="03306E"/>
-                    </a:solidFill>
-                  </a:tcPr>
-                </a:tc>
-                <a:tc>
-                  <a:txBody>
-                    <a:bodyPr wrap="square"/>
-                    <a:lstStyle/>
-                    <a:p>
-                      <a:r>
-                        <a:rPr sz="1600" b="1">
-                          <a:solidFill>
-                            <a:srgbClr val="FFFFFF"/>
-                          </a:solidFill>
-                          <a:latin typeface="Calibri"/>
-                        </a:rPr>
-                        <a:t>Formula or meaning</a:t>
-                      </a:r>
-                    </a:p>
-                  </a:txBody>
-                  <a:tcPr marL="91440" marR="91440" anchor="ctr">
-                    <a:solidFill>
-                      <a:srgbClr val="03306E"/>
-                    </a:solidFill>
-                  </a:tcPr>
-                </a:tc>
-              </a:tr>
-              <a:tr h="662940">
-                <a:tc>
-                  <a:txBody>
-                    <a:bodyPr wrap="square"/>
-                    <a:lstStyle/>
-                    <a:p>
-                      <a:r>
-                        <a:rPr sz="1600" b="1">
-                          <a:solidFill>
-                            <a:srgbClr val="03306E"/>
-                          </a:solidFill>
-                          <a:latin typeface="Calibri"/>
-                        </a:rPr>
-                        <a:t>Stress</a:t>
-                      </a:r>
-                    </a:p>
-                  </a:txBody>
-                  <a:tcPr marL="91440" marR="91440" anchor="ctr">
-                    <a:solidFill>
-                      <a:srgbClr val="FFFFFF"/>
-                    </a:solidFill>
-                  </a:tcPr>
-                </a:tc>
-                <a:tc>
-                  <a:txBody>
-                    <a:bodyPr wrap="square"/>
-                    <a:lstStyle/>
-                    <a:p>
-                      <a:r>
-                        <a:rPr sz="1600" b="0">
-                          <a:solidFill>
-                            <a:srgbClr val="202122"/>
-                          </a:solidFill>
-                          <a:latin typeface="Calibri"/>
-                        </a:rPr>
-                        <a:t>Force / cross-sectional area (N per square metre, Pa)</a:t>
-                      </a:r>
-                    </a:p>
-                  </a:txBody>
-                  <a:tcPr marL="91440" marR="91440" anchor="ctr">
-                    <a:solidFill>
-                      <a:srgbClr val="FFFFFF"/>
-                    </a:solidFill>
-                  </a:tcPr>
-                </a:tc>
-              </a:tr>
-              <a:tr h="662940">
-                <a:tc>
-                  <a:txBody>
-                    <a:bodyPr wrap="square"/>
-                    <a:lstStyle/>
-                    <a:p>
-                      <a:r>
-                        <a:rPr sz="1600" b="1">
-                          <a:solidFill>
-                            <a:srgbClr val="03306E"/>
-                          </a:solidFill>
-                          <a:latin typeface="Calibri"/>
-                        </a:rPr>
-                        <a:t>Strain</a:t>
-                      </a:r>
-                    </a:p>
-                  </a:txBody>
-                  <a:tcPr marL="91440" marR="91440" anchor="ctr">
-                    <a:solidFill>
-                      <a:srgbClr val="EAF3FF"/>
-                    </a:solidFill>
-                  </a:tcPr>
-                </a:tc>
-                <a:tc>
-                  <a:txBody>
-                    <a:bodyPr wrap="square"/>
-                    <a:lstStyle/>
-                    <a:p>
-                      <a:r>
-                        <a:rPr sz="1600" b="0">
-                          <a:solidFill>
-                            <a:srgbClr val="202122"/>
-                          </a:solidFill>
-                          <a:latin typeface="Calibri"/>
-                        </a:rPr>
-                        <a:t>Extension / original length (no units)</a:t>
-                      </a:r>
-                    </a:p>
-                  </a:txBody>
-                  <a:tcPr marL="91440" marR="91440" anchor="ctr">
-                    <a:solidFill>
-                      <a:srgbClr val="EAF3FF"/>
-                    </a:solidFill>
-                  </a:tcPr>
-                </a:tc>
-              </a:tr>
-              <a:tr h="662940">
-                <a:tc>
-                  <a:txBody>
-                    <a:bodyPr wrap="square"/>
-                    <a:lstStyle/>
-                    <a:p>
-                      <a:r>
-                        <a:rPr sz="1600" b="1">
-                          <a:solidFill>
-                            <a:srgbClr val="03306E"/>
-                          </a:solidFill>
-                          <a:latin typeface="Calibri"/>
-                        </a:rPr>
-                        <a:t>Young's modulus</a:t>
-                      </a:r>
-                    </a:p>
-                  </a:txBody>
-                  <a:tcPr marL="91440" marR="91440" anchor="ctr">
-                    <a:solidFill>
-                      <a:srgbClr val="FFFFFF"/>
-                    </a:solidFill>
-                  </a:tcPr>
-                </a:tc>
-                <a:tc>
-                  <a:txBody>
-                    <a:bodyPr wrap="square"/>
-                    <a:lstStyle/>
-                    <a:p>
-                      <a:r>
-                        <a:rPr sz="1600" b="0">
-                          <a:solidFill>
-                            <a:srgbClr val="202122"/>
-                          </a:solidFill>
-                          <a:latin typeface="Calibri"/>
-                        </a:rPr>
-                        <a:t>Stress / strain, in the elastic region</a:t>
-                      </a:r>
-                    </a:p>
-                  </a:txBody>
-                  <a:tcPr marL="91440" marR="91440" anchor="ctr">
-                    <a:solidFill>
-                      <a:srgbClr val="FFFFFF"/>
-                    </a:solidFill>
-                  </a:tcPr>
-                </a:tc>
-              </a:tr>
-              <a:tr h="662940">
-                <a:tc>
-                  <a:txBody>
-                    <a:bodyPr wrap="square"/>
-                    <a:lstStyle/>
-                    <a:p>
-                      <a:r>
-                        <a:rPr sz="1600" b="1">
-                          <a:solidFill>
-                            <a:srgbClr val="03306E"/>
-                          </a:solidFill>
-                          <a:latin typeface="Calibri"/>
-                        </a:rPr>
-                        <a:t>Hooke's law</a:t>
-                      </a:r>
-                    </a:p>
-                  </a:txBody>
-                  <a:tcPr marL="91440" marR="91440" anchor="ctr">
-                    <a:solidFill>
-                      <a:srgbClr val="EAF3FF"/>
-                    </a:solidFill>
-                  </a:tcPr>
-                </a:tc>
-                <a:tc>
-                  <a:txBody>
-                    <a:bodyPr wrap="square"/>
-                    <a:lstStyle/>
-                    <a:p>
-                      <a:r>
-                        <a:rPr sz="1600" b="0">
-                          <a:solidFill>
-                            <a:srgbClr val="202122"/>
-                          </a:solidFill>
-                          <a:latin typeface="Calibri"/>
-                        </a:rPr>
-                        <a:t>Extension is proportional to load up to the limit of proportionality</a:t>
-                      </a:r>
-                    </a:p>
-                  </a:txBody>
-                  <a:tcPr marL="91440" marR="91440" anchor="ctr">
-                    <a:solidFill>
-                      <a:srgbClr val="EAF3FF"/>
-                    </a:solidFill>
-                  </a:tcPr>
-                </a:tc>
-              </a:tr>
-              <a:tr h="662940">
-                <a:tc>
-                  <a:txBody>
-                    <a:bodyPr wrap="square"/>
-                    <a:lstStyle/>
-                    <a:p>
-                      <a:r>
-                        <a:rPr sz="1600" b="1">
-                          <a:solidFill>
-                            <a:srgbClr val="03306E"/>
-                          </a:solidFill>
-                          <a:latin typeface="Calibri"/>
-                        </a:rPr>
-                        <a:t>Ultimate tensile strength</a:t>
-                      </a:r>
-                    </a:p>
-                  </a:txBody>
-                  <a:tcPr marL="91440" marR="91440" anchor="ctr">
-                    <a:solidFill>
-                      <a:srgbClr val="FFFFFF"/>
-                    </a:solidFill>
-                  </a:tcPr>
-                </a:tc>
-                <a:tc>
-                  <a:txBody>
-                    <a:bodyPr wrap="square"/>
-                    <a:lstStyle/>
-                    <a:p>
-                      <a:r>
-                        <a:rPr sz="1600" b="0">
-                          <a:solidFill>
-                            <a:srgbClr val="202122"/>
-                          </a:solidFill>
-                          <a:latin typeface="Calibri"/>
-                        </a:rPr>
-                        <a:t>The maximum stress before necking and fracture</a:t>
-                      </a:r>
-                    </a:p>
-                  </a:txBody>
-                  <a:tcPr marL="91440" marR="91440" anchor="ctr">
-                    <a:solidFill>
-                      <a:srgbClr val="FFFFFF"/>
-                    </a:solidFill>
-                  </a:tcPr>
-                </a:tc>
-              </a:tr>
-            </a:tbl>
-          </a:graphicData>
-        </a:graphic>
-      </p:graphicFrame>
+      <p:sp>
+        <p:nvSpPr>
+          <p:cNvPr id="6" name="Oval 5"/>
+          <p:cNvSpPr/>
+          <p:nvPr/>
+        </p:nvSpPr>
+        <p:spPr>
+          <a:xfrm>
+            <a:off x="548640" y="1691640"/>
+            <a:ext cx="502920" cy="502920"/>
+          </a:xfrm>
+          <a:prstGeom prst="ellipse">
+            <a:avLst/>
+          </a:prstGeom>
+          <a:solidFill>
+            <a:srgbClr val="F2B705"/>
+          </a:solidFill>
+          <a:ln>
+            <a:noFill/>
+          </a:ln>
+          <a:effectLst/>
+        </p:spPr>
+        <p:style>
+          <a:lnRef idx="1">
+            <a:schemeClr val="accent1"/>
+          </a:lnRef>
+          <a:fillRef idx="3">
+            <a:schemeClr val="accent1"/>
+          </a:fillRef>
+          <a:effectRef idx="2">
+            <a:schemeClr val="accent1"/>
+          </a:effectRef>
+          <a:fontRef idx="minor">
+            <a:schemeClr val="lt1"/>
+          </a:fontRef>
+        </p:style>
+        <p:txBody>
+          <a:bodyPr rtlCol="0" anchor="ctr" lIns="0" rIns="0" tIns="0" bIns="0"/>
+          <a:lstStyle/>
+          <a:p>
+            <a:pPr algn="ctr"/>
+            <a:r>
+              <a:rPr sz="1600" b="1">
+                <a:solidFill>
+                  <a:srgbClr val="202122"/>
+                </a:solidFill>
+                <a:latin typeface="Calibri"/>
+              </a:rPr>
+              <a:t>1</a:t>
+            </a:r>
+          </a:p>
+        </p:txBody>
+      </p:sp>
       <p:sp>
         <p:nvSpPr>
           <p:cNvPr id="7" name="TextBox 6"/>
@@ -6420,8 +9321,8 @@
         </p:nvSpPr>
         <p:spPr>
           <a:xfrm>
-            <a:off x="548640" y="5715000"/>
-            <a:ext cx="11094415" cy="457200"/>
+            <a:off x="1371600" y="1645920"/>
+            <a:ext cx="10271455" cy="1188720"/>
           </a:xfrm>
           <a:prstGeom prst="rect">
             <a:avLst/>
@@ -6434,13 +9335,218 @@
           <a:p>
             <a:pPr algn="l"/>
             <a:r>
+              <a:rPr sz="2400" b="0" i="0">
+                <a:solidFill>
+                  <a:srgbClr val="202122"/>
+                </a:solidFill>
+                <a:latin typeface="Calibri"/>
+              </a:rPr>
+              <a:t>Why temper after quench hardening?</a:t>
+            </a:r>
+          </a:p>
+        </p:txBody>
+      </p:sp>
+      <p:sp>
+        <p:nvSpPr>
+          <p:cNvPr id="8" name="Oval 7"/>
+          <p:cNvSpPr/>
+          <p:nvPr/>
+        </p:nvSpPr>
+        <p:spPr>
+          <a:xfrm>
+            <a:off x="548640" y="3108960"/>
+            <a:ext cx="502920" cy="502920"/>
+          </a:xfrm>
+          <a:prstGeom prst="ellipse">
+            <a:avLst/>
+          </a:prstGeom>
+          <a:solidFill>
+            <a:srgbClr val="F2B705"/>
+          </a:solidFill>
+          <a:ln>
+            <a:noFill/>
+          </a:ln>
+          <a:effectLst/>
+        </p:spPr>
+        <p:style>
+          <a:lnRef idx="1">
+            <a:schemeClr val="accent1"/>
+          </a:lnRef>
+          <a:fillRef idx="3">
+            <a:schemeClr val="accent1"/>
+          </a:fillRef>
+          <a:effectRef idx="2">
+            <a:schemeClr val="accent1"/>
+          </a:effectRef>
+          <a:fontRef idx="minor">
+            <a:schemeClr val="lt1"/>
+          </a:fontRef>
+        </p:style>
+        <p:txBody>
+          <a:bodyPr rtlCol="0" anchor="ctr" lIns="0" rIns="0" tIns="0" bIns="0"/>
+          <a:lstStyle/>
+          <a:p>
+            <a:pPr algn="ctr"/>
+            <a:r>
+              <a:rPr sz="1600" b="1">
+                <a:solidFill>
+                  <a:srgbClr val="202122"/>
+                </a:solidFill>
+                <a:latin typeface="Calibri"/>
+              </a:rPr>
+              <a:t>2</a:t>
+            </a:r>
+          </a:p>
+        </p:txBody>
+      </p:sp>
+      <p:sp>
+        <p:nvSpPr>
+          <p:cNvPr id="9" name="TextBox 8"/>
+          <p:cNvSpPr txBox="1"/>
+          <p:nvPr/>
+        </p:nvSpPr>
+        <p:spPr>
+          <a:xfrm>
+            <a:off x="1371600" y="3063240"/>
+            <a:ext cx="10271455" cy="1188720"/>
+          </a:xfrm>
+          <a:prstGeom prst="rect">
+            <a:avLst/>
+          </a:prstGeom>
+          <a:noFill/>
+        </p:spPr>
+        <p:txBody>
+          <a:bodyPr wrap="square" anchor="t" lIns="0" rIns="0" tIns="0" bIns="0"/>
+          <a:lstStyle/>
+          <a:p>
+            <a:pPr algn="l"/>
+            <a:r>
+              <a:rPr sz="2400" b="0" i="0">
+                <a:solidFill>
+                  <a:srgbClr val="202122"/>
+                </a:solidFill>
+                <a:latin typeface="Calibri"/>
+              </a:rPr>
+              <a:t>What does annealing do?</a:t>
+            </a:r>
+          </a:p>
+        </p:txBody>
+      </p:sp>
+      <p:sp>
+        <p:nvSpPr>
+          <p:cNvPr id="10" name="Oval 9"/>
+          <p:cNvSpPr/>
+          <p:nvPr/>
+        </p:nvSpPr>
+        <p:spPr>
+          <a:xfrm>
+            <a:off x="548640" y="4526280"/>
+            <a:ext cx="502920" cy="502920"/>
+          </a:xfrm>
+          <a:prstGeom prst="ellipse">
+            <a:avLst/>
+          </a:prstGeom>
+          <a:solidFill>
+            <a:srgbClr val="F2B705"/>
+          </a:solidFill>
+          <a:ln>
+            <a:noFill/>
+          </a:ln>
+          <a:effectLst/>
+        </p:spPr>
+        <p:style>
+          <a:lnRef idx="1">
+            <a:schemeClr val="accent1"/>
+          </a:lnRef>
+          <a:fillRef idx="3">
+            <a:schemeClr val="accent1"/>
+          </a:fillRef>
+          <a:effectRef idx="2">
+            <a:schemeClr val="accent1"/>
+          </a:effectRef>
+          <a:fontRef idx="minor">
+            <a:schemeClr val="lt1"/>
+          </a:fontRef>
+        </p:style>
+        <p:txBody>
+          <a:bodyPr rtlCol="0" anchor="ctr" lIns="0" rIns="0" tIns="0" bIns="0"/>
+          <a:lstStyle/>
+          <a:p>
+            <a:pPr algn="ctr"/>
+            <a:r>
+              <a:rPr sz="1600" b="1">
+                <a:solidFill>
+                  <a:srgbClr val="202122"/>
+                </a:solidFill>
+                <a:latin typeface="Calibri"/>
+              </a:rPr>
+              <a:t>3</a:t>
+            </a:r>
+          </a:p>
+        </p:txBody>
+      </p:sp>
+      <p:sp>
+        <p:nvSpPr>
+          <p:cNvPr id="11" name="TextBox 10"/>
+          <p:cNvSpPr txBox="1"/>
+          <p:nvPr/>
+        </p:nvSpPr>
+        <p:spPr>
+          <a:xfrm>
+            <a:off x="1371600" y="4480560"/>
+            <a:ext cx="10271455" cy="1188720"/>
+          </a:xfrm>
+          <a:prstGeom prst="rect">
+            <a:avLst/>
+          </a:prstGeom>
+          <a:noFill/>
+        </p:spPr>
+        <p:txBody>
+          <a:bodyPr wrap="square" anchor="t" lIns="0" rIns="0" tIns="0" bIns="0"/>
+          <a:lstStyle/>
+          <a:p>
+            <a:pPr algn="l"/>
+            <a:r>
+              <a:rPr sz="2400" b="0" i="0">
+                <a:solidFill>
+                  <a:srgbClr val="202122"/>
+                </a:solidFill>
+                <a:latin typeface="Calibri"/>
+              </a:rPr>
+              <a:t>How does galvanising protect steel?</a:t>
+            </a:r>
+          </a:p>
+        </p:txBody>
+      </p:sp>
+      <p:sp>
+        <p:nvSpPr>
+          <p:cNvPr id="12" name="TextBox 11"/>
+          <p:cNvSpPr txBox="1"/>
+          <p:nvPr/>
+        </p:nvSpPr>
+        <p:spPr>
+          <a:xfrm>
+            <a:off x="548640" y="5852160"/>
+            <a:ext cx="11094415" cy="365760"/>
+          </a:xfrm>
+          <a:prstGeom prst="rect">
+            <a:avLst/>
+          </a:prstGeom>
+          <a:noFill/>
+        </p:spPr>
+        <p:txBody>
+          <a:bodyPr wrap="square" anchor="t" lIns="0" rIns="0" tIns="0" bIns="0"/>
+          <a:lstStyle/>
+          <a:p>
+            <a:pPr algn="l"/>
+            <a:r>
               <a:rPr sz="1300" b="0" i="1">
                 <a:solidFill>
                   <a:srgbClr val="54595D"/>
                 </a:solidFill>
                 <a:latin typeface="Calibri"/>
               </a:rPr>
-              <a:t>Other tests: visual, toughness (impact), hardness, corrosion, wear, fatigue (Wohler), conductivity.</a:t>
+              <a:t>Answer on mini whiteboards or in your book. Answers are in the speaker notes.</a:t>
             </a:r>
           </a:p>
         </p:txBody>
@@ -6532,7 +9638,7 @@
                 </a:solidFill>
                 <a:latin typeface="Cambria"/>
               </a:rPr>
-              <a:t>Check your understanding</a:t>
+              <a:t>Why materials fail</a:t>
             </a:r>
           </a:p>
         </p:txBody>
@@ -6605,14 +9711,145 @@
       </p:sp>
       <p:sp>
         <p:nvSpPr>
-          <p:cNvPr id="6" name="Oval 5"/>
+          <p:cNvPr id="6" name="TextBox 5"/>
+          <p:cNvSpPr txBox="1"/>
+          <p:nvPr/>
+        </p:nvSpPr>
+        <p:spPr>
+          <a:xfrm>
+            <a:off x="548640" y="1554480"/>
+            <a:ext cx="6720840" cy="4617720"/>
+          </a:xfrm>
+          <a:prstGeom prst="rect">
+            <a:avLst/>
+          </a:prstGeom>
+          <a:noFill/>
+        </p:spPr>
+        <p:txBody>
+          <a:bodyPr wrap="square" lIns="0" rIns="0" tIns="0" bIns="0">
+            <a:spAutoFit/>
+          </a:bodyPr>
+          <a:lstStyle/>
+          <a:p>
+            <a:pPr>
+              <a:spcAft>
+                <a:spcPts val="1200"/>
+              </a:spcAft>
+            </a:pPr>
+            <a:r>
+              <a:rPr sz="2000" b="0">
+                <a:solidFill>
+                  <a:srgbClr val="202122"/>
+                </a:solidFill>
+                <a:latin typeface="Calibri"/>
+              </a:rPr>
+              <a:t>Corrosion is chemical attack, such as rust, that removes material and can eventually perforate it. It includes oxidation, chemical attack and stress corrosion.</a:t>
+            </a:r>
+          </a:p>
+          <a:p>
+            <a:pPr>
+              <a:spcAft>
+                <a:spcPts val="1200"/>
+              </a:spcAft>
+            </a:pPr>
+            <a:r>
+              <a:rPr sz="2000" b="0">
+                <a:solidFill>
+                  <a:srgbClr val="202122"/>
+                </a:solidFill>
+                <a:latin typeface="Calibri"/>
+              </a:rPr>
+              <a:t>Fatigue is failure under repeated loading, even when each load is well below the breaking stress: tiny cracks grow with every cycle until the part snaps.</a:t>
+            </a:r>
+          </a:p>
+          <a:p>
+            <a:pPr>
+              <a:spcAft>
+                <a:spcPts val="1200"/>
+              </a:spcAft>
+            </a:pPr>
+            <a:r>
+              <a:rPr sz="2000" b="0">
+                <a:solidFill>
+                  <a:srgbClr val="202122"/>
+                </a:solidFill>
+                <a:latin typeface="Calibri"/>
+              </a:rPr>
+              <a:t>Creep is slow, permanent deformation under a constant load, especially at high temperature. It happens in three stages: primary, secondary (steady) and tertiary, ending in fracture.</a:t>
+            </a:r>
+          </a:p>
+          <a:p>
+            <a:pPr>
+              <a:spcAft>
+                <a:spcPts val="1200"/>
+              </a:spcAft>
+            </a:pPr>
+            <a:r>
+              <a:rPr sz="2000" b="0">
+                <a:solidFill>
+                  <a:srgbClr val="202122"/>
+                </a:solidFill>
+                <a:latin typeface="Calibri"/>
+              </a:rPr>
+              <a:t>Prevention includes coatings, galvanising, sacrificial anodes and designing out stress concentrations.</a:t>
+            </a:r>
+          </a:p>
+        </p:txBody>
+      </p:sp>
+      <p:sp>
+        <p:nvSpPr>
+          <p:cNvPr id="7" name="Rounded Rectangle 6"/>
           <p:cNvSpPr/>
           <p:nvPr/>
         </p:nvSpPr>
         <p:spPr>
           <a:xfrm>
-            <a:off x="548640" y="1618488"/>
-            <a:ext cx="411480" cy="411480"/>
+            <a:off x="7772400" y="1554480"/>
+            <a:ext cx="3867912" cy="4526280"/>
+          </a:xfrm>
+          <a:prstGeom prst="roundRect">
+            <a:avLst>
+              <a:gd name="adj" fmla="val 8000"/>
+            </a:avLst>
+          </a:prstGeom>
+          <a:solidFill>
+            <a:srgbClr val="03306E"/>
+          </a:solidFill>
+          <a:ln>
+            <a:noFill/>
+          </a:ln>
+          <a:effectLst/>
+        </p:spPr>
+        <p:style>
+          <a:lnRef idx="1">
+            <a:schemeClr val="accent1"/>
+          </a:lnRef>
+          <a:fillRef idx="3">
+            <a:schemeClr val="accent1"/>
+          </a:fillRef>
+          <a:effectRef idx="2">
+            <a:schemeClr val="accent1"/>
+          </a:effectRef>
+          <a:fontRef idx="minor">
+            <a:schemeClr val="lt1"/>
+          </a:fontRef>
+        </p:style>
+        <p:txBody>
+          <a:bodyPr rtlCol="0" anchor="ctr"/>
+          <a:lstStyle/>
+          <a:p/>
+        </p:txBody>
+      </p:sp>
+      <p:sp>
+        <p:nvSpPr>
+          <p:cNvPr id="8" name="Oval 7"/>
+          <p:cNvSpPr/>
+          <p:nvPr/>
+        </p:nvSpPr>
+        <p:spPr>
+          <a:xfrm>
+            <a:off x="8046720" y="1828800"/>
+            <a:ext cx="548640" cy="548640"/>
           </a:xfrm>
           <a:prstGeom prst="ellipse">
             <a:avLst/>
@@ -6645,99 +9882,13 @@
           <a:p>
             <a:pPr algn="ctr"/>
             <a:r>
-              <a:rPr sz="1400" b="1">
+              <a:rPr sz="1300" b="1">
                 <a:solidFill>
                   <a:srgbClr val="202122"/>
                 </a:solidFill>
                 <a:latin typeface="Calibri"/>
               </a:rPr>
-              <a:t>1</a:t>
-            </a:r>
-          </a:p>
-        </p:txBody>
-      </p:sp>
-      <p:sp>
-        <p:nvSpPr>
-          <p:cNvPr id="7" name="TextBox 6"/>
-          <p:cNvSpPr txBox="1"/>
-          <p:nvPr/>
-        </p:nvSpPr>
-        <p:spPr>
-          <a:xfrm>
-            <a:off x="1234440" y="1600200"/>
-            <a:ext cx="10408615" cy="1030986"/>
-          </a:xfrm>
-          <a:prstGeom prst="rect">
-            <a:avLst/>
-          </a:prstGeom>
-          <a:noFill/>
-        </p:spPr>
-        <p:txBody>
-          <a:bodyPr wrap="square" anchor="t" lIns="0" rIns="0" tIns="0" bIns="0"/>
-          <a:lstStyle/>
-          <a:p>
-            <a:pPr algn="l"/>
-            <a:r>
-              <a:rPr sz="2200" b="0" i="0">
-                <a:solidFill>
-                  <a:srgbClr val="202122"/>
-                </a:solidFill>
-                <a:latin typeface="Calibri"/>
-              </a:rPr>
-              <a:t>What is fatigue failure?</a:t>
-            </a:r>
-          </a:p>
-        </p:txBody>
-      </p:sp>
-      <p:sp>
-        <p:nvSpPr>
-          <p:cNvPr id="8" name="Oval 7"/>
-          <p:cNvSpPr/>
-          <p:nvPr/>
-        </p:nvSpPr>
-        <p:spPr>
-          <a:xfrm>
-            <a:off x="548640" y="2814066"/>
-            <a:ext cx="411480" cy="411480"/>
-          </a:xfrm>
-          <a:prstGeom prst="ellipse">
-            <a:avLst/>
-          </a:prstGeom>
-          <a:solidFill>
-            <a:srgbClr val="F2B705"/>
-          </a:solidFill>
-          <a:ln>
-            <a:noFill/>
-          </a:ln>
-          <a:effectLst/>
-        </p:spPr>
-        <p:style>
-          <a:lnRef idx="1">
-            <a:schemeClr val="accent1"/>
-          </a:lnRef>
-          <a:fillRef idx="3">
-            <a:schemeClr val="accent1"/>
-          </a:fillRef>
-          <a:effectRef idx="2">
-            <a:schemeClr val="accent1"/>
-          </a:effectRef>
-          <a:fontRef idx="minor">
-            <a:schemeClr val="lt1"/>
-          </a:fontRef>
-        </p:style>
-        <p:txBody>
-          <a:bodyPr rtlCol="0" anchor="ctr" lIns="0" rIns="0" tIns="0" bIns="0"/>
-          <a:lstStyle/>
-          <a:p>
-            <a:pPr algn="ctr"/>
-            <a:r>
-              <a:rPr sz="1400" b="1">
-                <a:solidFill>
-                  <a:srgbClr val="202122"/>
-                </a:solidFill>
-                <a:latin typeface="Calibri"/>
-              </a:rPr>
-              <a:t>2</a:t>
+              <a:t>e.g.</a:t>
             </a:r>
           </a:p>
         </p:txBody>
@@ -6750,8 +9901,8 @@
         </p:nvSpPr>
         <p:spPr>
           <a:xfrm>
-            <a:off x="1234440" y="2795778"/>
-            <a:ext cx="10408615" cy="1030986"/>
+            <a:off x="8046720" y="2560320"/>
+            <a:ext cx="3291840" cy="365760"/>
           </a:xfrm>
           <a:prstGeom prst="rect">
             <a:avLst/>
@@ -6764,80 +9915,27 @@
           <a:p>
             <a:pPr algn="l"/>
             <a:r>
-              <a:rPr sz="2200" b="0" i="0">
-                <a:solidFill>
-                  <a:srgbClr val="202122"/>
-                </a:solidFill>
-                <a:latin typeface="Calibri"/>
-              </a:rPr>
-              <a:t>A 1,000 N force acts on 0.0001 square metres. What is the stress?</a:t>
-            </a:r>
-          </a:p>
-        </p:txBody>
-      </p:sp>
-      <p:sp>
-        <p:nvSpPr>
-          <p:cNvPr id="10" name="Oval 9"/>
-          <p:cNvSpPr/>
-          <p:nvPr/>
-        </p:nvSpPr>
-        <p:spPr>
-          <a:xfrm>
-            <a:off x="548640" y="4009644"/>
-            <a:ext cx="411480" cy="411480"/>
-          </a:xfrm>
-          <a:prstGeom prst="ellipse">
-            <a:avLst/>
-          </a:prstGeom>
-          <a:solidFill>
-            <a:srgbClr val="F2B705"/>
-          </a:solidFill>
-          <a:ln>
-            <a:noFill/>
-          </a:ln>
-          <a:effectLst/>
-        </p:spPr>
-        <p:style>
-          <a:lnRef idx="1">
-            <a:schemeClr val="accent1"/>
-          </a:lnRef>
-          <a:fillRef idx="3">
-            <a:schemeClr val="accent1"/>
-          </a:fillRef>
-          <a:effectRef idx="2">
-            <a:schemeClr val="accent1"/>
-          </a:effectRef>
-          <a:fontRef idx="minor">
-            <a:schemeClr val="lt1"/>
-          </a:fontRef>
-        </p:style>
-        <p:txBody>
-          <a:bodyPr rtlCol="0" anchor="ctr" lIns="0" rIns="0" tIns="0" bIns="0"/>
-          <a:lstStyle/>
-          <a:p>
-            <a:pPr algn="ctr"/>
-            <a:r>
-              <a:rPr sz="1400" b="1">
-                <a:solidFill>
-                  <a:srgbClr val="202122"/>
-                </a:solidFill>
-                <a:latin typeface="Calibri"/>
-              </a:rPr>
-              <a:t>3</a:t>
-            </a:r>
-          </a:p>
-        </p:txBody>
-      </p:sp>
-      <p:sp>
-        <p:nvSpPr>
-          <p:cNvPr id="11" name="TextBox 10"/>
+              <a:rPr sz="1300" b="1" i="0">
+                <a:solidFill>
+                  <a:srgbClr val="A9C8F0"/>
+                </a:solidFill>
+                <a:latin typeface="Calibri"/>
+              </a:rPr>
+              <a:t>EXAMPLE</a:t>
+            </a:r>
+          </a:p>
+        </p:txBody>
+      </p:sp>
+      <p:sp>
+        <p:nvSpPr>
+          <p:cNvPr id="10" name="TextBox 9"/>
           <p:cNvSpPr txBox="1"/>
           <p:nvPr/>
         </p:nvSpPr>
         <p:spPr>
           <a:xfrm>
-            <a:off x="1234440" y="3991356"/>
-            <a:ext cx="10408615" cy="1030986"/>
+            <a:off x="8046720" y="2971800"/>
+            <a:ext cx="3291840" cy="2971800"/>
           </a:xfrm>
           <a:prstGeom prst="rect">
             <a:avLst/>
@@ -6850,99 +9948,13 @@
           <a:p>
             <a:pPr algn="l"/>
             <a:r>
-              <a:rPr sz="2200" b="0" i="0">
-                <a:solidFill>
-                  <a:srgbClr val="202122"/>
-                </a:solidFill>
-                <a:latin typeface="Calibri"/>
-              </a:rPr>
-              <a:t>A 2 m bar stretches 1 mm. What is the strain?</a:t>
-            </a:r>
-          </a:p>
-        </p:txBody>
-      </p:sp>
-      <p:sp>
-        <p:nvSpPr>
-          <p:cNvPr id="12" name="Oval 11"/>
-          <p:cNvSpPr/>
-          <p:nvPr/>
-        </p:nvSpPr>
-        <p:spPr>
-          <a:xfrm>
-            <a:off x="548640" y="5205221"/>
-            <a:ext cx="411480" cy="411480"/>
-          </a:xfrm>
-          <a:prstGeom prst="ellipse">
-            <a:avLst/>
-          </a:prstGeom>
-          <a:solidFill>
-            <a:srgbClr val="F2B705"/>
-          </a:solidFill>
-          <a:ln>
-            <a:noFill/>
-          </a:ln>
-          <a:effectLst/>
-        </p:spPr>
-        <p:style>
-          <a:lnRef idx="1">
-            <a:schemeClr val="accent1"/>
-          </a:lnRef>
-          <a:fillRef idx="3">
-            <a:schemeClr val="accent1"/>
-          </a:fillRef>
-          <a:effectRef idx="2">
-            <a:schemeClr val="accent1"/>
-          </a:effectRef>
-          <a:fontRef idx="minor">
-            <a:schemeClr val="lt1"/>
-          </a:fontRef>
-        </p:style>
-        <p:txBody>
-          <a:bodyPr rtlCol="0" anchor="ctr" lIns="0" rIns="0" tIns="0" bIns="0"/>
-          <a:lstStyle/>
-          <a:p>
-            <a:pPr algn="ctr"/>
-            <a:r>
-              <a:rPr sz="1400" b="1">
-                <a:solidFill>
-                  <a:srgbClr val="202122"/>
-                </a:solidFill>
-                <a:latin typeface="Calibri"/>
-              </a:rPr>
-              <a:t>4</a:t>
-            </a:r>
-          </a:p>
-        </p:txBody>
-      </p:sp>
-      <p:sp>
-        <p:nvSpPr>
-          <p:cNvPr id="13" name="TextBox 12"/>
-          <p:cNvSpPr txBox="1"/>
-          <p:nvPr/>
-        </p:nvSpPr>
-        <p:spPr>
-          <a:xfrm>
-            <a:off x="1234440" y="5186933"/>
-            <a:ext cx="10408615" cy="1030986"/>
-          </a:xfrm>
-          <a:prstGeom prst="rect">
-            <a:avLst/>
-          </a:prstGeom>
-          <a:noFill/>
-        </p:spPr>
-        <p:txBody>
-          <a:bodyPr wrap="square" anchor="t" lIns="0" rIns="0" tIns="0" bIns="0"/>
-          <a:lstStyle/>
-          <a:p>
-            <a:pPr algn="l"/>
-            <a:r>
-              <a:rPr sz="2200" b="0" i="0">
-                <a:solidFill>
-                  <a:srgbClr val="202122"/>
-                </a:solidFill>
-                <a:latin typeface="Calibri"/>
-              </a:rPr>
-              <a:t>Why temper after quench hardening?</a:t>
+              <a:rPr sz="1900" b="0" i="0">
+                <a:solidFill>
+                  <a:srgbClr val="FFFFFF"/>
+                </a:solidFill>
+                <a:latin typeface="Cambria"/>
+              </a:rPr>
+              <a:t>Bending a paperclip back and forth until it snaps is fatigue: no single bend breaks it, but the repeated cycles do.</a:t>
             </a:r>
           </a:p>
         </p:txBody>
@@ -7034,7 +10046,7 @@
                 </a:solidFill>
                 <a:latin typeface="Cambria"/>
               </a:rPr>
-              <a:t>Answers</a:t>
+              <a:t>Why materials fail</a:t>
             </a:r>
           </a:p>
         </p:txBody>
@@ -7107,14 +10119,58 @@
       </p:sp>
       <p:sp>
         <p:nvSpPr>
-          <p:cNvPr id="6" name="Oval 5"/>
+          <p:cNvPr id="6" name="Rounded Rectangle 5"/>
           <p:cNvSpPr/>
           <p:nvPr/>
         </p:nvSpPr>
         <p:spPr>
           <a:xfrm>
-            <a:off x="548640" y="1618488"/>
-            <a:ext cx="411480" cy="411480"/>
+            <a:off x="548640" y="1600200"/>
+            <a:ext cx="5410047" cy="2148840"/>
+          </a:xfrm>
+          <a:prstGeom prst="roundRect">
+            <a:avLst>
+              <a:gd name="adj" fmla="val 6000"/>
+            </a:avLst>
+          </a:prstGeom>
+          <a:solidFill>
+            <a:srgbClr val="EAF3FF"/>
+          </a:solidFill>
+          <a:ln>
+            <a:noFill/>
+          </a:ln>
+          <a:effectLst/>
+        </p:spPr>
+        <p:style>
+          <a:lnRef idx="1">
+            <a:schemeClr val="accent1"/>
+          </a:lnRef>
+          <a:fillRef idx="3">
+            <a:schemeClr val="accent1"/>
+          </a:fillRef>
+          <a:effectRef idx="2">
+            <a:schemeClr val="accent1"/>
+          </a:effectRef>
+          <a:fontRef idx="minor">
+            <a:schemeClr val="lt1"/>
+          </a:fontRef>
+        </p:style>
+        <p:txBody>
+          <a:bodyPr rtlCol="0" anchor="ctr"/>
+          <a:lstStyle/>
+          <a:p/>
+        </p:txBody>
+      </p:sp>
+      <p:sp>
+        <p:nvSpPr>
+          <p:cNvPr id="7" name="Oval 6"/>
+          <p:cNvSpPr/>
+          <p:nvPr/>
+        </p:nvSpPr>
+        <p:spPr>
+          <a:xfrm>
+            <a:off x="777240" y="1828800"/>
+            <a:ext cx="457200" cy="457200"/>
           </a:xfrm>
           <a:prstGeom prst="ellipse">
             <a:avLst/>
@@ -7147,7 +10203,7 @@
           <a:p>
             <a:pPr algn="ctr"/>
             <a:r>
-              <a:rPr sz="1400" b="1">
+              <a:rPr sz="1500" b="1">
                 <a:solidFill>
                   <a:srgbClr val="202122"/>
                 </a:solidFill>
@@ -7160,14 +10216,14 @@
       </p:sp>
       <p:sp>
         <p:nvSpPr>
-          <p:cNvPr id="7" name="TextBox 6"/>
+          <p:cNvPr id="8" name="TextBox 7"/>
           <p:cNvSpPr txBox="1"/>
           <p:nvPr/>
         </p:nvSpPr>
         <p:spPr>
           <a:xfrm>
-            <a:off x="1234440" y="1600200"/>
-            <a:ext cx="10408615" cy="1030986"/>
+            <a:off x="1371600" y="1801368"/>
+            <a:ext cx="4404207" cy="512064"/>
           </a:xfrm>
           <a:prstGeom prst="rect">
             <a:avLst/>
@@ -7175,43 +10231,109 @@
           <a:noFill/>
         </p:spPr>
         <p:txBody>
+          <a:bodyPr wrap="square" anchor="ctr" lIns="0" rIns="0" tIns="0" bIns="0"/>
+          <a:lstStyle/>
+          <a:p>
+            <a:pPr algn="l"/>
+            <a:r>
+              <a:rPr sz="1900" b="1" i="0">
+                <a:solidFill>
+                  <a:srgbClr val="03306E"/>
+                </a:solidFill>
+                <a:latin typeface="Calibri"/>
+              </a:rPr>
+              <a:t>Corrosion</a:t>
+            </a:r>
+          </a:p>
+        </p:txBody>
+      </p:sp>
+      <p:sp>
+        <p:nvSpPr>
+          <p:cNvPr id="9" name="TextBox 8"/>
+          <p:cNvSpPr txBox="1"/>
+          <p:nvPr/>
+        </p:nvSpPr>
+        <p:spPr>
+          <a:xfrm>
+            <a:off x="777240" y="2468880"/>
+            <a:ext cx="4952847" cy="1143000"/>
+          </a:xfrm>
+          <a:prstGeom prst="rect">
+            <a:avLst/>
+          </a:prstGeom>
+          <a:noFill/>
+        </p:spPr>
+        <p:txBody>
           <a:bodyPr wrap="square" anchor="t" lIns="0" rIns="0" tIns="0" bIns="0"/>
           <a:lstStyle/>
           <a:p>
             <a:pPr algn="l"/>
             <a:r>
-              <a:rPr sz="1800" b="0" i="0">
-                <a:solidFill>
-                  <a:srgbClr val="54595D"/>
-                </a:solidFill>
-                <a:latin typeface="Calibri"/>
-              </a:rPr>
-              <a:t>What is fatigue failure?</a:t>
-            </a:r>
-          </a:p>
-          <a:p>
-            <a:r>
-              <a:rPr sz="1800" b="1">
-                <a:solidFill>
-                  <a:srgbClr val="03306E"/>
-                </a:solidFill>
-                <a:latin typeface="Calibri"/>
-              </a:rPr>
-              <a:t>Failure caused by repeated cyclic loading below the ultimate strength.</a:t>
-            </a:r>
-          </a:p>
-        </p:txBody>
-      </p:sp>
-      <p:sp>
-        <p:nvSpPr>
-          <p:cNvPr id="8" name="Oval 7"/>
+              <a:rPr sz="2000" b="0" i="0">
+                <a:solidFill>
+                  <a:srgbClr val="202122"/>
+                </a:solidFill>
+                <a:latin typeface="Calibri"/>
+              </a:rPr>
+              <a:t>Oxidation, chemical attack or stress corrosion eats material away.</a:t>
+            </a:r>
+          </a:p>
+        </p:txBody>
+      </p:sp>
+      <p:sp>
+        <p:nvSpPr>
+          <p:cNvPr id="10" name="Rounded Rectangle 9"/>
           <p:cNvSpPr/>
           <p:nvPr/>
         </p:nvSpPr>
         <p:spPr>
           <a:xfrm>
-            <a:off x="548640" y="2814066"/>
-            <a:ext cx="411480" cy="411480"/>
+            <a:off x="6233007" y="1600200"/>
+            <a:ext cx="5410047" cy="2148840"/>
+          </a:xfrm>
+          <a:prstGeom prst="roundRect">
+            <a:avLst>
+              <a:gd name="adj" fmla="val 6000"/>
+            </a:avLst>
+          </a:prstGeom>
+          <a:solidFill>
+            <a:srgbClr val="EAF3FF"/>
+          </a:solidFill>
+          <a:ln>
+            <a:noFill/>
+          </a:ln>
+          <a:effectLst/>
+        </p:spPr>
+        <p:style>
+          <a:lnRef idx="1">
+            <a:schemeClr val="accent1"/>
+          </a:lnRef>
+          <a:fillRef idx="3">
+            <a:schemeClr val="accent1"/>
+          </a:fillRef>
+          <a:effectRef idx="2">
+            <a:schemeClr val="accent1"/>
+          </a:effectRef>
+          <a:fontRef idx="minor">
+            <a:schemeClr val="lt1"/>
+          </a:fontRef>
+        </p:style>
+        <p:txBody>
+          <a:bodyPr rtlCol="0" anchor="ctr"/>
+          <a:lstStyle/>
+          <a:p/>
+        </p:txBody>
+      </p:sp>
+      <p:sp>
+        <p:nvSpPr>
+          <p:cNvPr id="11" name="Oval 10"/>
+          <p:cNvSpPr/>
+          <p:nvPr/>
+        </p:nvSpPr>
+        <p:spPr>
+          <a:xfrm>
+            <a:off x="6461607" y="1828800"/>
+            <a:ext cx="457200" cy="457200"/>
           </a:xfrm>
           <a:prstGeom prst="ellipse">
             <a:avLst/>
@@ -7244,7 +10366,7 @@
           <a:p>
             <a:pPr algn="ctr"/>
             <a:r>
-              <a:rPr sz="1400" b="1">
+              <a:rPr sz="1500" b="1">
                 <a:solidFill>
                   <a:srgbClr val="202122"/>
                 </a:solidFill>
@@ -7257,14 +10379,14 @@
       </p:sp>
       <p:sp>
         <p:nvSpPr>
-          <p:cNvPr id="9" name="TextBox 8"/>
+          <p:cNvPr id="12" name="TextBox 11"/>
           <p:cNvSpPr txBox="1"/>
           <p:nvPr/>
         </p:nvSpPr>
         <p:spPr>
           <a:xfrm>
-            <a:off x="1234440" y="2795778"/>
-            <a:ext cx="10408615" cy="1030986"/>
+            <a:off x="7055967" y="1801368"/>
+            <a:ext cx="4404207" cy="512064"/>
           </a:xfrm>
           <a:prstGeom prst="rect">
             <a:avLst/>
@@ -7272,43 +10394,109 @@
           <a:noFill/>
         </p:spPr>
         <p:txBody>
+          <a:bodyPr wrap="square" anchor="ctr" lIns="0" rIns="0" tIns="0" bIns="0"/>
+          <a:lstStyle/>
+          <a:p>
+            <a:pPr algn="l"/>
+            <a:r>
+              <a:rPr sz="1900" b="1" i="0">
+                <a:solidFill>
+                  <a:srgbClr val="03306E"/>
+                </a:solidFill>
+                <a:latin typeface="Calibri"/>
+              </a:rPr>
+              <a:t>Fatigue</a:t>
+            </a:r>
+          </a:p>
+        </p:txBody>
+      </p:sp>
+      <p:sp>
+        <p:nvSpPr>
+          <p:cNvPr id="13" name="TextBox 12"/>
+          <p:cNvSpPr txBox="1"/>
+          <p:nvPr/>
+        </p:nvSpPr>
+        <p:spPr>
+          <a:xfrm>
+            <a:off x="6461607" y="2468880"/>
+            <a:ext cx="4952847" cy="1143000"/>
+          </a:xfrm>
+          <a:prstGeom prst="rect">
+            <a:avLst/>
+          </a:prstGeom>
+          <a:noFill/>
+        </p:spPr>
+        <p:txBody>
           <a:bodyPr wrap="square" anchor="t" lIns="0" rIns="0" tIns="0" bIns="0"/>
           <a:lstStyle/>
           <a:p>
             <a:pPr algn="l"/>
             <a:r>
-              <a:rPr sz="1800" b="0" i="0">
-                <a:solidFill>
-                  <a:srgbClr val="54595D"/>
-                </a:solidFill>
-                <a:latin typeface="Calibri"/>
-              </a:rPr>
-              <a:t>A 1,000 N force acts on 0.0001 square metres. What is the stress?</a:t>
-            </a:r>
-          </a:p>
-          <a:p>
-            <a:r>
-              <a:rPr sz="1800" b="1">
-                <a:solidFill>
-                  <a:srgbClr val="03306E"/>
-                </a:solidFill>
-                <a:latin typeface="Calibri"/>
-              </a:rPr>
-              <a:t>10,000,000 Pa (10 MPa).</a:t>
-            </a:r>
-          </a:p>
-        </p:txBody>
-      </p:sp>
-      <p:sp>
-        <p:nvSpPr>
-          <p:cNvPr id="10" name="Oval 9"/>
+              <a:rPr sz="2000" b="0" i="0">
+                <a:solidFill>
+                  <a:srgbClr val="202122"/>
+                </a:solidFill>
+                <a:latin typeface="Calibri"/>
+              </a:rPr>
+              <a:t>Repeated loading below the breaking stress causes cracks: the paperclip.</a:t>
+            </a:r>
+          </a:p>
+        </p:txBody>
+      </p:sp>
+      <p:sp>
+        <p:nvSpPr>
+          <p:cNvPr id="14" name="Rounded Rectangle 13"/>
           <p:cNvSpPr/>
           <p:nvPr/>
         </p:nvSpPr>
         <p:spPr>
           <a:xfrm>
-            <a:off x="548640" y="4009644"/>
-            <a:ext cx="411480" cy="411480"/>
+            <a:off x="548640" y="4023360"/>
+            <a:ext cx="5410047" cy="2148840"/>
+          </a:xfrm>
+          <a:prstGeom prst="roundRect">
+            <a:avLst>
+              <a:gd name="adj" fmla="val 6000"/>
+            </a:avLst>
+          </a:prstGeom>
+          <a:solidFill>
+            <a:srgbClr val="EAF3FF"/>
+          </a:solidFill>
+          <a:ln>
+            <a:noFill/>
+          </a:ln>
+          <a:effectLst/>
+        </p:spPr>
+        <p:style>
+          <a:lnRef idx="1">
+            <a:schemeClr val="accent1"/>
+          </a:lnRef>
+          <a:fillRef idx="3">
+            <a:schemeClr val="accent1"/>
+          </a:fillRef>
+          <a:effectRef idx="2">
+            <a:schemeClr val="accent1"/>
+          </a:effectRef>
+          <a:fontRef idx="minor">
+            <a:schemeClr val="lt1"/>
+          </a:fontRef>
+        </p:style>
+        <p:txBody>
+          <a:bodyPr rtlCol="0" anchor="ctr"/>
+          <a:lstStyle/>
+          <a:p/>
+        </p:txBody>
+      </p:sp>
+      <p:sp>
+        <p:nvSpPr>
+          <p:cNvPr id="15" name="Oval 14"/>
+          <p:cNvSpPr/>
+          <p:nvPr/>
+        </p:nvSpPr>
+        <p:spPr>
+          <a:xfrm>
+            <a:off x="777240" y="4251960"/>
+            <a:ext cx="457200" cy="457200"/>
           </a:xfrm>
           <a:prstGeom prst="ellipse">
             <a:avLst/>
@@ -7341,7 +10529,7 @@
           <a:p>
             <a:pPr algn="ctr"/>
             <a:r>
-              <a:rPr sz="1400" b="1">
+              <a:rPr sz="1500" b="1">
                 <a:solidFill>
                   <a:srgbClr val="202122"/>
                 </a:solidFill>
@@ -7354,14 +10542,14 @@
       </p:sp>
       <p:sp>
         <p:nvSpPr>
-          <p:cNvPr id="11" name="TextBox 10"/>
+          <p:cNvPr id="16" name="TextBox 15"/>
           <p:cNvSpPr txBox="1"/>
           <p:nvPr/>
         </p:nvSpPr>
         <p:spPr>
           <a:xfrm>
-            <a:off x="1234440" y="3991356"/>
-            <a:ext cx="10408615" cy="1030986"/>
+            <a:off x="1371600" y="4224528"/>
+            <a:ext cx="4404207" cy="512064"/>
           </a:xfrm>
           <a:prstGeom prst="rect">
             <a:avLst/>
@@ -7369,43 +10557,109 @@
           <a:noFill/>
         </p:spPr>
         <p:txBody>
+          <a:bodyPr wrap="square" anchor="ctr" lIns="0" rIns="0" tIns="0" bIns="0"/>
+          <a:lstStyle/>
+          <a:p>
+            <a:pPr algn="l"/>
+            <a:r>
+              <a:rPr sz="1900" b="1" i="0">
+                <a:solidFill>
+                  <a:srgbClr val="03306E"/>
+                </a:solidFill>
+                <a:latin typeface="Calibri"/>
+              </a:rPr>
+              <a:t>Creep</a:t>
+            </a:r>
+          </a:p>
+        </p:txBody>
+      </p:sp>
+      <p:sp>
+        <p:nvSpPr>
+          <p:cNvPr id="17" name="TextBox 16"/>
+          <p:cNvSpPr txBox="1"/>
+          <p:nvPr/>
+        </p:nvSpPr>
+        <p:spPr>
+          <a:xfrm>
+            <a:off x="777240" y="4892040"/>
+            <a:ext cx="4952847" cy="1143000"/>
+          </a:xfrm>
+          <a:prstGeom prst="rect">
+            <a:avLst/>
+          </a:prstGeom>
+          <a:noFill/>
+        </p:spPr>
+        <p:txBody>
           <a:bodyPr wrap="square" anchor="t" lIns="0" rIns="0" tIns="0" bIns="0"/>
           <a:lstStyle/>
           <a:p>
             <a:pPr algn="l"/>
             <a:r>
-              <a:rPr sz="1800" b="0" i="0">
-                <a:solidFill>
-                  <a:srgbClr val="54595D"/>
-                </a:solidFill>
-                <a:latin typeface="Calibri"/>
-              </a:rPr>
-              <a:t>A 2 m bar stretches 1 mm. What is the strain?</a:t>
-            </a:r>
-          </a:p>
-          <a:p>
-            <a:r>
-              <a:rPr sz="1800" b="1">
-                <a:solidFill>
-                  <a:srgbClr val="03306E"/>
-                </a:solidFill>
-                <a:latin typeface="Calibri"/>
-              </a:rPr>
-              <a:t>0.0005.</a:t>
-            </a:r>
-          </a:p>
-        </p:txBody>
-      </p:sp>
-      <p:sp>
-        <p:nvSpPr>
-          <p:cNvPr id="12" name="Oval 11"/>
+              <a:rPr sz="2000" b="0" i="0">
+                <a:solidFill>
+                  <a:srgbClr val="202122"/>
+                </a:solidFill>
+                <a:latin typeface="Calibri"/>
+              </a:rPr>
+              <a:t>Slow deformation under constant load, often at high temperature, in three stages.</a:t>
+            </a:r>
+          </a:p>
+        </p:txBody>
+      </p:sp>
+      <p:sp>
+        <p:nvSpPr>
+          <p:cNvPr id="18" name="Rounded Rectangle 17"/>
           <p:cNvSpPr/>
           <p:nvPr/>
         </p:nvSpPr>
         <p:spPr>
           <a:xfrm>
-            <a:off x="548640" y="5205221"/>
-            <a:ext cx="411480" cy="411480"/>
+            <a:off x="6233007" y="4023360"/>
+            <a:ext cx="5410047" cy="2148840"/>
+          </a:xfrm>
+          <a:prstGeom prst="roundRect">
+            <a:avLst>
+              <a:gd name="adj" fmla="val 6000"/>
+            </a:avLst>
+          </a:prstGeom>
+          <a:solidFill>
+            <a:srgbClr val="EAF3FF"/>
+          </a:solidFill>
+          <a:ln>
+            <a:noFill/>
+          </a:ln>
+          <a:effectLst/>
+        </p:spPr>
+        <p:style>
+          <a:lnRef idx="1">
+            <a:schemeClr val="accent1"/>
+          </a:lnRef>
+          <a:fillRef idx="3">
+            <a:schemeClr val="accent1"/>
+          </a:fillRef>
+          <a:effectRef idx="2">
+            <a:schemeClr val="accent1"/>
+          </a:effectRef>
+          <a:fontRef idx="minor">
+            <a:schemeClr val="lt1"/>
+          </a:fontRef>
+        </p:style>
+        <p:txBody>
+          <a:bodyPr rtlCol="0" anchor="ctr"/>
+          <a:lstStyle/>
+          <a:p/>
+        </p:txBody>
+      </p:sp>
+      <p:sp>
+        <p:nvSpPr>
+          <p:cNvPr id="19" name="Oval 18"/>
+          <p:cNvSpPr/>
+          <p:nvPr/>
+        </p:nvSpPr>
+        <p:spPr>
+          <a:xfrm>
+            <a:off x="6461607" y="4251960"/>
+            <a:ext cx="457200" cy="457200"/>
           </a:xfrm>
           <a:prstGeom prst="ellipse">
             <a:avLst/>
@@ -7438,7 +10692,7 @@
           <a:p>
             <a:pPr algn="ctr"/>
             <a:r>
-              <a:rPr sz="1400" b="1">
+              <a:rPr sz="1500" b="1">
                 <a:solidFill>
                   <a:srgbClr val="202122"/>
                 </a:solidFill>
@@ -7451,14 +10705,14 @@
       </p:sp>
       <p:sp>
         <p:nvSpPr>
-          <p:cNvPr id="13" name="TextBox 12"/>
+          <p:cNvPr id="20" name="TextBox 19"/>
           <p:cNvSpPr txBox="1"/>
           <p:nvPr/>
         </p:nvSpPr>
         <p:spPr>
           <a:xfrm>
-            <a:off x="1234440" y="5186933"/>
-            <a:ext cx="10408615" cy="1030986"/>
+            <a:off x="7055967" y="4224528"/>
+            <a:ext cx="4404207" cy="512064"/>
           </a:xfrm>
           <a:prstGeom prst="rect">
             <a:avLst/>
@@ -7466,29 +10720,51 @@
           <a:noFill/>
         </p:spPr>
         <p:txBody>
+          <a:bodyPr wrap="square" anchor="ctr" lIns="0" rIns="0" tIns="0" bIns="0"/>
+          <a:lstStyle/>
+          <a:p>
+            <a:pPr algn="l"/>
+            <a:r>
+              <a:rPr sz="1900" b="1" i="0">
+                <a:solidFill>
+                  <a:srgbClr val="03306E"/>
+                </a:solidFill>
+                <a:latin typeface="Calibri"/>
+              </a:rPr>
+              <a:t>Prevention</a:t>
+            </a:r>
+          </a:p>
+        </p:txBody>
+      </p:sp>
+      <p:sp>
+        <p:nvSpPr>
+          <p:cNvPr id="21" name="TextBox 20"/>
+          <p:cNvSpPr txBox="1"/>
+          <p:nvPr/>
+        </p:nvSpPr>
+        <p:spPr>
+          <a:xfrm>
+            <a:off x="6461607" y="4892040"/>
+            <a:ext cx="4952847" cy="1143000"/>
+          </a:xfrm>
+          <a:prstGeom prst="rect">
+            <a:avLst/>
+          </a:prstGeom>
+          <a:noFill/>
+        </p:spPr>
+        <p:txBody>
           <a:bodyPr wrap="square" anchor="t" lIns="0" rIns="0" tIns="0" bIns="0"/>
           <a:lstStyle/>
           <a:p>
             <a:pPr algn="l"/>
             <a:r>
-              <a:rPr sz="1800" b="0" i="0">
-                <a:solidFill>
-                  <a:srgbClr val="54595D"/>
-                </a:solidFill>
-                <a:latin typeface="Calibri"/>
-              </a:rPr>
-              <a:t>Why temper after quench hardening?</a:t>
-            </a:r>
-          </a:p>
-          <a:p>
-            <a:r>
-              <a:rPr sz="1800" b="1">
-                <a:solidFill>
-                  <a:srgbClr val="03306E"/>
-                </a:solidFill>
-                <a:latin typeface="Calibri"/>
-              </a:rPr>
-              <a:t>To reduce brittleness.</a:t>
+              <a:rPr sz="2000" b="0" i="0">
+                <a:solidFill>
+                  <a:srgbClr val="202122"/>
+                </a:solidFill>
+                <a:latin typeface="Calibri"/>
+              </a:rPr>
+              <a:t>Coatings, galvanising, sacrificial anodes, good design.</a:t>
             </a:r>
           </a:p>
         </p:txBody>
@@ -7580,7 +10856,7 @@
                 </a:solidFill>
                 <a:latin typeface="Cambria"/>
               </a:rPr>
-              <a:t>Activity: Read a load-extension graph</a:t>
+              <a:t>Quick check: Why materials fail</a:t>
             </a:r>
           </a:p>
         </p:txBody>
@@ -7653,19 +10929,17 @@
       </p:sp>
       <p:sp>
         <p:nvSpPr>
-          <p:cNvPr id="6" name="Rounded Rectangle 5"/>
+          <p:cNvPr id="6" name="Oval 5"/>
           <p:cNvSpPr/>
           <p:nvPr/>
         </p:nvSpPr>
         <p:spPr>
           <a:xfrm>
-            <a:off x="548640" y="1508760"/>
-            <a:ext cx="2011680" cy="457200"/>
-          </a:xfrm>
-          <a:prstGeom prst="roundRect">
-            <a:avLst>
-              <a:gd name="adj" fmla="val 50000"/>
-            </a:avLst>
+            <a:off x="548640" y="1691640"/>
+            <a:ext cx="502920" cy="502920"/>
+          </a:xfrm>
+          <a:prstGeom prst="ellipse">
+            <a:avLst/>
           </a:prstGeom>
           <a:solidFill>
             <a:srgbClr val="F2B705"/>
@@ -7690,9 +10964,20 @@
           </a:fontRef>
         </p:style>
         <p:txBody>
-          <a:bodyPr rtlCol="0" anchor="ctr"/>
-          <a:lstStyle/>
-          <a:p/>
+          <a:bodyPr rtlCol="0" anchor="ctr" lIns="0" rIns="0" tIns="0" bIns="0"/>
+          <a:lstStyle/>
+          <a:p>
+            <a:pPr algn="ctr"/>
+            <a:r>
+              <a:rPr sz="1600" b="1">
+                <a:solidFill>
+                  <a:srgbClr val="202122"/>
+                </a:solidFill>
+                <a:latin typeface="Calibri"/>
+              </a:rPr>
+              <a:t>1</a:t>
+            </a:r>
+          </a:p>
         </p:txBody>
       </p:sp>
       <p:sp>
@@ -7703,8 +10988,8 @@
         </p:nvSpPr>
         <p:spPr>
           <a:xfrm>
-            <a:off x="548640" y="1508760"/>
-            <a:ext cx="2011680" cy="457200"/>
+            <a:off x="1371600" y="1645920"/>
+            <a:ext cx="10271455" cy="1188720"/>
           </a:xfrm>
           <a:prstGeom prst="rect">
             <a:avLst/>
@@ -7712,71 +10997,38 @@
           <a:noFill/>
         </p:spPr>
         <p:txBody>
-          <a:bodyPr wrap="square" anchor="ctr" lIns="0" rIns="0" tIns="0" bIns="0"/>
-          <a:lstStyle/>
-          <a:p>
-            <a:pPr algn="ctr"/>
-            <a:r>
-              <a:rPr sz="1400" b="1" i="0">
+          <a:bodyPr wrap="square" anchor="t" lIns="0" rIns="0" tIns="0" bIns="0"/>
+          <a:lstStyle/>
+          <a:p>
+            <a:pPr algn="l"/>
+            <a:r>
+              <a:rPr sz="2400" b="0" i="0">
                 <a:solidFill>
                   <a:srgbClr val="202122"/>
                 </a:solidFill>
                 <a:latin typeface="Calibri"/>
               </a:rPr>
-              <a:t>25 minutes</a:t>
-            </a:r>
-          </a:p>
-        </p:txBody>
-      </p:sp>
-      <p:sp>
-        <p:nvSpPr>
-          <p:cNvPr id="8" name="TextBox 7"/>
-          <p:cNvSpPr txBox="1"/>
-          <p:nvPr/>
-        </p:nvSpPr>
-        <p:spPr>
-          <a:xfrm>
-            <a:off x="2743200" y="1508760"/>
-            <a:ext cx="4754880" cy="457200"/>
-          </a:xfrm>
-          <a:prstGeom prst="rect">
-            <a:avLst/>
-          </a:prstGeom>
-          <a:noFill/>
-        </p:spPr>
-        <p:txBody>
-          <a:bodyPr wrap="square" anchor="ctr" lIns="0" rIns="0" tIns="0" bIns="0"/>
-          <a:lstStyle/>
-          <a:p>
-            <a:pPr algn="l"/>
-            <a:r>
-              <a:rPr sz="1400" b="0" i="1">
-                <a:solidFill>
-                  <a:srgbClr val="54595D"/>
-                </a:solidFill>
-                <a:latin typeface="Calibri"/>
-              </a:rPr>
-              <a:t>Pairs</a:t>
-            </a:r>
-          </a:p>
-        </p:txBody>
-      </p:sp>
-      <p:sp>
-        <p:nvSpPr>
-          <p:cNvPr id="9" name="Oval 8"/>
+              <a:t>What is fatigue?</a:t>
+            </a:r>
+          </a:p>
+        </p:txBody>
+      </p:sp>
+      <p:sp>
+        <p:nvSpPr>
+          <p:cNvPr id="8" name="Oval 7"/>
           <p:cNvSpPr/>
           <p:nvPr/>
         </p:nvSpPr>
         <p:spPr>
           <a:xfrm>
-            <a:off x="548640" y="2482596"/>
-            <a:ext cx="384048" cy="384048"/>
+            <a:off x="548640" y="3108960"/>
+            <a:ext cx="502920" cy="502920"/>
           </a:xfrm>
           <a:prstGeom prst="ellipse">
             <a:avLst/>
           </a:prstGeom>
           <a:solidFill>
-            <a:srgbClr val="0645AD"/>
+            <a:srgbClr val="F2B705"/>
           </a:solidFill>
           <a:ln>
             <a:noFill/>
@@ -7803,27 +11055,27 @@
           <a:p>
             <a:pPr algn="ctr"/>
             <a:r>
-              <a:rPr sz="1300" b="1">
-                <a:solidFill>
-                  <a:srgbClr val="FFFFFF"/>
-                </a:solidFill>
-                <a:latin typeface="Calibri"/>
-              </a:rPr>
-              <a:t>1</a:t>
-            </a:r>
-          </a:p>
-        </p:txBody>
-      </p:sp>
-      <p:sp>
-        <p:nvSpPr>
-          <p:cNvPr id="10" name="TextBox 9"/>
+              <a:rPr sz="1600" b="1">
+                <a:solidFill>
+                  <a:srgbClr val="202122"/>
+                </a:solidFill>
+                <a:latin typeface="Calibri"/>
+              </a:rPr>
+              <a:t>2</a:t>
+            </a:r>
+          </a:p>
+        </p:txBody>
+      </p:sp>
+      <p:sp>
+        <p:nvSpPr>
+          <p:cNvPr id="9" name="TextBox 8"/>
           <p:cNvSpPr txBox="1"/>
           <p:nvPr/>
         </p:nvSpPr>
         <p:spPr>
           <a:xfrm>
-            <a:off x="1143000" y="2240280"/>
-            <a:ext cx="5943600" cy="868680"/>
+            <a:off x="1371600" y="3063240"/>
+            <a:ext cx="10271455" cy="1188720"/>
           </a:xfrm>
           <a:prstGeom prst="rect">
             <a:avLst/>
@@ -7831,38 +11083,38 @@
           <a:noFill/>
         </p:spPr>
         <p:txBody>
-          <a:bodyPr wrap="square" anchor="ctr" lIns="0" rIns="0" tIns="0" bIns="0"/>
+          <a:bodyPr wrap="square" anchor="t" lIns="0" rIns="0" tIns="0" bIns="0"/>
           <a:lstStyle/>
           <a:p>
             <a:pPr algn="l"/>
             <a:r>
-              <a:rPr sz="1700" b="0" i="0">
+              <a:rPr sz="2400" b="0" i="0">
                 <a:solidFill>
                   <a:srgbClr val="202122"/>
                 </a:solidFill>
                 <a:latin typeface="Calibri"/>
               </a:rPr>
-              <a:t>Use the tensile test data from your teacher.</a:t>
-            </a:r>
-          </a:p>
-        </p:txBody>
-      </p:sp>
-      <p:sp>
-        <p:nvSpPr>
-          <p:cNvPr id="11" name="Oval 10"/>
+              <a:t>When is creep a concern?</a:t>
+            </a:r>
+          </a:p>
+        </p:txBody>
+      </p:sp>
+      <p:sp>
+        <p:nvSpPr>
+          <p:cNvPr id="10" name="Oval 9"/>
           <p:cNvSpPr/>
           <p:nvPr/>
         </p:nvSpPr>
         <p:spPr>
           <a:xfrm>
-            <a:off x="548640" y="3461004"/>
-            <a:ext cx="384048" cy="384048"/>
+            <a:off x="548640" y="4526280"/>
+            <a:ext cx="502920" cy="502920"/>
           </a:xfrm>
           <a:prstGeom prst="ellipse">
             <a:avLst/>
           </a:prstGeom>
           <a:solidFill>
-            <a:srgbClr val="0645AD"/>
+            <a:srgbClr val="F2B705"/>
           </a:solidFill>
           <a:ln>
             <a:noFill/>
@@ -7889,13 +11141,46 @@
           <a:p>
             <a:pPr algn="ctr"/>
             <a:r>
-              <a:rPr sz="1300" b="1">
-                <a:solidFill>
-                  <a:srgbClr val="FFFFFF"/>
-                </a:solidFill>
-                <a:latin typeface="Calibri"/>
-              </a:rPr>
-              <a:t>2</a:t>
+              <a:rPr sz="1600" b="1">
+                <a:solidFill>
+                  <a:srgbClr val="202122"/>
+                </a:solidFill>
+                <a:latin typeface="Calibri"/>
+              </a:rPr>
+              <a:t>3</a:t>
+            </a:r>
+          </a:p>
+        </p:txBody>
+      </p:sp>
+      <p:sp>
+        <p:nvSpPr>
+          <p:cNvPr id="11" name="TextBox 10"/>
+          <p:cNvSpPr txBox="1"/>
+          <p:nvPr/>
+        </p:nvSpPr>
+        <p:spPr>
+          <a:xfrm>
+            <a:off x="1371600" y="4480560"/>
+            <a:ext cx="10271455" cy="1188720"/>
+          </a:xfrm>
+          <a:prstGeom prst="rect">
+            <a:avLst/>
+          </a:prstGeom>
+          <a:noFill/>
+        </p:spPr>
+        <p:txBody>
+          <a:bodyPr wrap="square" anchor="t" lIns="0" rIns="0" tIns="0" bIns="0"/>
+          <a:lstStyle/>
+          <a:p>
+            <a:pPr algn="l"/>
+            <a:r>
+              <a:rPr sz="2400" b="0" i="0">
+                <a:solidFill>
+                  <a:srgbClr val="202122"/>
+                </a:solidFill>
+                <a:latin typeface="Calibri"/>
+              </a:rPr>
+              <a:t>What is a sacrificial anode?</a:t>
             </a:r>
           </a:p>
         </p:txBody>
@@ -7908,8 +11193,8 @@
         </p:nvSpPr>
         <p:spPr>
           <a:xfrm>
-            <a:off x="1143000" y="3218688"/>
-            <a:ext cx="5943600" cy="868680"/>
+            <a:off x="548640" y="5852160"/>
+            <a:ext cx="11094415" cy="365760"/>
           </a:xfrm>
           <a:prstGeom prst="rect">
             <a:avLst/>
@@ -7917,353 +11202,18 @@
           <a:noFill/>
         </p:spPr>
         <p:txBody>
-          <a:bodyPr wrap="square" anchor="ctr" lIns="0" rIns="0" tIns="0" bIns="0"/>
+          <a:bodyPr wrap="square" anchor="t" lIns="0" rIns="0" tIns="0" bIns="0"/>
           <a:lstStyle/>
           <a:p>
             <a:pPr algn="l"/>
             <a:r>
-              <a:rPr sz="1700" b="0" i="0">
-                <a:solidFill>
-                  <a:srgbClr val="202122"/>
-                </a:solidFill>
-                <a:latin typeface="Calibri"/>
-              </a:rPr>
-              <a:t>Mark the elastic limit, UTS and fracture point on the graph.</a:t>
-            </a:r>
-          </a:p>
-        </p:txBody>
-      </p:sp>
-      <p:sp>
-        <p:nvSpPr>
-          <p:cNvPr id="13" name="Oval 12"/>
-          <p:cNvSpPr/>
-          <p:nvPr/>
-        </p:nvSpPr>
-        <p:spPr>
-          <a:xfrm>
-            <a:off x="548640" y="4439412"/>
-            <a:ext cx="384048" cy="384048"/>
-          </a:xfrm>
-          <a:prstGeom prst="ellipse">
-            <a:avLst/>
-          </a:prstGeom>
-          <a:solidFill>
-            <a:srgbClr val="0645AD"/>
-          </a:solidFill>
-          <a:ln>
-            <a:noFill/>
-          </a:ln>
-          <a:effectLst/>
-        </p:spPr>
-        <p:style>
-          <a:lnRef idx="1">
-            <a:schemeClr val="accent1"/>
-          </a:lnRef>
-          <a:fillRef idx="3">
-            <a:schemeClr val="accent1"/>
-          </a:fillRef>
-          <a:effectRef idx="2">
-            <a:schemeClr val="accent1"/>
-          </a:effectRef>
-          <a:fontRef idx="minor">
-            <a:schemeClr val="lt1"/>
-          </a:fontRef>
-        </p:style>
-        <p:txBody>
-          <a:bodyPr rtlCol="0" anchor="ctr" lIns="0" rIns="0" tIns="0" bIns="0"/>
-          <a:lstStyle/>
-          <a:p>
-            <a:pPr algn="ctr"/>
-            <a:r>
-              <a:rPr sz="1300" b="1">
-                <a:solidFill>
-                  <a:srgbClr val="FFFFFF"/>
-                </a:solidFill>
-                <a:latin typeface="Calibri"/>
-              </a:rPr>
-              <a:t>3</a:t>
-            </a:r>
-          </a:p>
-        </p:txBody>
-      </p:sp>
-      <p:sp>
-        <p:nvSpPr>
-          <p:cNvPr id="14" name="TextBox 13"/>
-          <p:cNvSpPr txBox="1"/>
-          <p:nvPr/>
-        </p:nvSpPr>
-        <p:spPr>
-          <a:xfrm>
-            <a:off x="1143000" y="4197096"/>
-            <a:ext cx="5943600" cy="868680"/>
-          </a:xfrm>
-          <a:prstGeom prst="rect">
-            <a:avLst/>
-          </a:prstGeom>
-          <a:noFill/>
-        </p:spPr>
-        <p:txBody>
-          <a:bodyPr wrap="square" anchor="ctr" lIns="0" rIns="0" tIns="0" bIns="0"/>
-          <a:lstStyle/>
-          <a:p>
-            <a:pPr algn="l"/>
-            <a:r>
-              <a:rPr sz="1700" b="0" i="0">
-                <a:solidFill>
-                  <a:srgbClr val="202122"/>
-                </a:solidFill>
-                <a:latin typeface="Calibri"/>
-              </a:rPr>
-              <a:t>Calculate stress, strain and Young's modulus in the elastic region.</a:t>
-            </a:r>
-          </a:p>
-        </p:txBody>
-      </p:sp>
-      <p:sp>
-        <p:nvSpPr>
-          <p:cNvPr id="15" name="Oval 14"/>
-          <p:cNvSpPr/>
-          <p:nvPr/>
-        </p:nvSpPr>
-        <p:spPr>
-          <a:xfrm>
-            <a:off x="548640" y="5417820"/>
-            <a:ext cx="384048" cy="384048"/>
-          </a:xfrm>
-          <a:prstGeom prst="ellipse">
-            <a:avLst/>
-          </a:prstGeom>
-          <a:solidFill>
-            <a:srgbClr val="0645AD"/>
-          </a:solidFill>
-          <a:ln>
-            <a:noFill/>
-          </a:ln>
-          <a:effectLst/>
-        </p:spPr>
-        <p:style>
-          <a:lnRef idx="1">
-            <a:schemeClr val="accent1"/>
-          </a:lnRef>
-          <a:fillRef idx="3">
-            <a:schemeClr val="accent1"/>
-          </a:fillRef>
-          <a:effectRef idx="2">
-            <a:schemeClr val="accent1"/>
-          </a:effectRef>
-          <a:fontRef idx="minor">
-            <a:schemeClr val="lt1"/>
-          </a:fontRef>
-        </p:style>
-        <p:txBody>
-          <a:bodyPr rtlCol="0" anchor="ctr" lIns="0" rIns="0" tIns="0" bIns="0"/>
-          <a:lstStyle/>
-          <a:p>
-            <a:pPr algn="ctr"/>
-            <a:r>
-              <a:rPr sz="1300" b="1">
-                <a:solidFill>
-                  <a:srgbClr val="FFFFFF"/>
-                </a:solidFill>
-                <a:latin typeface="Calibri"/>
-              </a:rPr>
-              <a:t>4</a:t>
-            </a:r>
-          </a:p>
-        </p:txBody>
-      </p:sp>
-      <p:sp>
-        <p:nvSpPr>
-          <p:cNvPr id="16" name="TextBox 15"/>
-          <p:cNvSpPr txBox="1"/>
-          <p:nvPr/>
-        </p:nvSpPr>
-        <p:spPr>
-          <a:xfrm>
-            <a:off x="1143000" y="5175504"/>
-            <a:ext cx="5943600" cy="868680"/>
-          </a:xfrm>
-          <a:prstGeom prst="rect">
-            <a:avLst/>
-          </a:prstGeom>
-          <a:noFill/>
-        </p:spPr>
-        <p:txBody>
-          <a:bodyPr wrap="square" anchor="ctr" lIns="0" rIns="0" tIns="0" bIns="0"/>
-          <a:lstStyle/>
-          <a:p>
-            <a:pPr algn="l"/>
-            <a:r>
-              <a:rPr sz="1700" b="0" i="0">
-                <a:solidFill>
-                  <a:srgbClr val="202122"/>
-                </a:solidFill>
-                <a:latin typeface="Calibri"/>
-              </a:rPr>
-              <a:t>Identify the material from its modulus.</a:t>
-            </a:r>
-          </a:p>
-        </p:txBody>
-      </p:sp>
-      <p:sp>
-        <p:nvSpPr>
-          <p:cNvPr id="17" name="Rounded Rectangle 16"/>
-          <p:cNvSpPr/>
-          <p:nvPr/>
-        </p:nvSpPr>
-        <p:spPr>
-          <a:xfrm>
-            <a:off x="7772400" y="1508760"/>
-            <a:ext cx="3867912" cy="4572000"/>
-          </a:xfrm>
-          <a:prstGeom prst="roundRect">
-            <a:avLst>
-              <a:gd name="adj" fmla="val 8000"/>
-            </a:avLst>
-          </a:prstGeom>
-          <a:solidFill>
-            <a:srgbClr val="EAF3FF"/>
-          </a:solidFill>
-          <a:ln>
-            <a:noFill/>
-          </a:ln>
-          <a:effectLst/>
-        </p:spPr>
-        <p:style>
-          <a:lnRef idx="1">
-            <a:schemeClr val="accent1"/>
-          </a:lnRef>
-          <a:fillRef idx="3">
-            <a:schemeClr val="accent1"/>
-          </a:fillRef>
-          <a:effectRef idx="2">
-            <a:schemeClr val="accent1"/>
-          </a:effectRef>
-          <a:fontRef idx="minor">
-            <a:schemeClr val="lt1"/>
-          </a:fontRef>
-        </p:style>
-        <p:txBody>
-          <a:bodyPr rtlCol="0" anchor="ctr"/>
-          <a:lstStyle/>
-          <a:p/>
-        </p:txBody>
-      </p:sp>
-      <p:sp>
-        <p:nvSpPr>
-          <p:cNvPr id="18" name="TextBox 17"/>
-          <p:cNvSpPr txBox="1"/>
-          <p:nvPr/>
-        </p:nvSpPr>
-        <p:spPr>
-          <a:xfrm>
-            <a:off x="8046720" y="1737360"/>
-            <a:ext cx="3291840" cy="365760"/>
-          </a:xfrm>
-          <a:prstGeom prst="rect">
-            <a:avLst/>
-          </a:prstGeom>
-          <a:noFill/>
-        </p:spPr>
-        <p:txBody>
-          <a:bodyPr wrap="square" anchor="t" lIns="0" rIns="0" tIns="0" bIns="0"/>
-          <a:lstStyle/>
-          <a:p>
-            <a:pPr algn="l"/>
-            <a:r>
-              <a:rPr sz="1300" b="1" i="0">
-                <a:solidFill>
-                  <a:srgbClr val="0645AD"/>
-                </a:solidFill>
-                <a:latin typeface="Calibri"/>
-              </a:rPr>
-              <a:t>SUCCESS CRITERIA</a:t>
-            </a:r>
-          </a:p>
-        </p:txBody>
-      </p:sp>
-      <p:sp>
-        <p:nvSpPr>
-          <p:cNvPr id="19" name="TextBox 18"/>
-          <p:cNvSpPr txBox="1"/>
-          <p:nvPr/>
-        </p:nvSpPr>
-        <p:spPr>
-          <a:xfrm>
-            <a:off x="8046720" y="2240280"/>
-            <a:ext cx="3337560" cy="3657600"/>
-          </a:xfrm>
-          <a:prstGeom prst="rect">
-            <a:avLst/>
-          </a:prstGeom>
-          <a:noFill/>
-        </p:spPr>
-        <p:txBody>
-          <a:bodyPr wrap="square" lIns="0" rIns="0" tIns="0" bIns="0">
-            <a:spAutoFit/>
-          </a:bodyPr>
-          <a:lstStyle/>
-          <a:p>
-            <a:pPr marL="274320" indent="-274320">
-              <a:spcAft>
-                <a:spcPts val="810"/>
-              </a:spcAft>
-              <a:buClr>
-                <a:srgbClr val="0645AD"/>
-              </a:buClr>
-              <a:buFont typeface="Arial"/>
-              <a:buChar char="•"/>
-            </a:pPr>
-            <a:r>
-              <a:rPr sz="1800" b="0">
-                <a:solidFill>
-                  <a:srgbClr val="202122"/>
-                </a:solidFill>
-                <a:latin typeface="Calibri"/>
-              </a:rPr>
-              <a:t>Key points labelled</a:t>
-            </a:r>
-          </a:p>
-          <a:p>
-            <a:pPr marL="274320" indent="-274320">
-              <a:spcAft>
-                <a:spcPts val="810"/>
-              </a:spcAft>
-              <a:buClr>
-                <a:srgbClr val="0645AD"/>
-              </a:buClr>
-              <a:buFont typeface="Arial"/>
-              <a:buChar char="•"/>
-            </a:pPr>
-            <a:r>
-              <a:rPr sz="1800" b="0">
-                <a:solidFill>
-                  <a:srgbClr val="202122"/>
-                </a:solidFill>
-                <a:latin typeface="Calibri"/>
-              </a:rPr>
-              <a:t>Calculations with units</a:t>
-            </a:r>
-          </a:p>
-          <a:p>
-            <a:pPr marL="274320" indent="-274320">
-              <a:spcAft>
-                <a:spcPts val="810"/>
-              </a:spcAft>
-              <a:buClr>
-                <a:srgbClr val="0645AD"/>
-              </a:buClr>
-              <a:buFont typeface="Arial"/>
-              <a:buChar char="•"/>
-            </a:pPr>
-            <a:r>
-              <a:rPr sz="1800" b="0">
-                <a:solidFill>
-                  <a:srgbClr val="202122"/>
-                </a:solidFill>
-                <a:latin typeface="Calibri"/>
-              </a:rPr>
-              <a:t>Sensible identification</a:t>
+              <a:rPr sz="1300" b="0" i="1">
+                <a:solidFill>
+                  <a:srgbClr val="54595D"/>
+                </a:solidFill>
+                <a:latin typeface="Calibri"/>
+              </a:rPr>
+              <a:t>Answer on mini whiteboards or in your book. Answers are in the speaker notes.</a:t>
             </a:r>
           </a:p>
         </p:txBody>
@@ -8282,7 +11232,7 @@
     <p:bg>
       <p:bgPr>
         <a:solidFill>
-          <a:srgbClr val="03306E"/>
+          <a:srgbClr val="FFFFFF"/>
         </a:solidFill>
         <a:effectLst/>
       </p:bgPr>
@@ -8318,7 +11268,7 @@
             <a:r>
               <a:rPr sz="1100" b="1" i="0">
                 <a:solidFill>
-                  <a:srgbClr val="A9C8F0"/>
+                  <a:srgbClr val="54595D"/>
                 </a:solidFill>
                 <a:latin typeface="Calibri"/>
               </a:rPr>
@@ -8351,25 +11301,222 @@
             <a:r>
               <a:rPr sz="3200" b="1" i="0">
                 <a:solidFill>
-                  <a:srgbClr val="FFFFFF"/>
+                  <a:srgbClr val="03306E"/>
                 </a:solidFill>
                 <a:latin typeface="Cambria"/>
               </a:rPr>
-              <a:t>Exit ticket</a:t>
-            </a:r>
-          </a:p>
-        </p:txBody>
-      </p:sp>
-      <p:sp>
-        <p:nvSpPr>
-          <p:cNvPr id="4" name="Oval 3"/>
+              <a:t>Tensile testing</a:t>
+            </a:r>
+          </a:p>
+        </p:txBody>
+      </p:sp>
+      <p:sp>
+        <p:nvSpPr>
+          <p:cNvPr id="4" name="TextBox 3"/>
+          <p:cNvSpPr txBox="1"/>
+          <p:nvPr/>
+        </p:nvSpPr>
+        <p:spPr>
+          <a:xfrm>
+            <a:off x="548640" y="6446520"/>
+            <a:ext cx="8229600" cy="274320"/>
+          </a:xfrm>
+          <a:prstGeom prst="rect">
+            <a:avLst/>
+          </a:prstGeom>
+          <a:noFill/>
+        </p:spPr>
+        <p:txBody>
+          <a:bodyPr wrap="square" anchor="t" lIns="0" rIns="0" tIns="0" bIns="0"/>
+          <a:lstStyle/>
+          <a:p>
+            <a:pPr algn="l"/>
+            <a:r>
+              <a:rPr sz="1000" b="0" i="0">
+                <a:solidFill>
+                  <a:srgbClr val="54595D"/>
+                </a:solidFill>
+                <a:latin typeface="Calibri"/>
+              </a:rPr>
+              <a:t>Design and Development for Engineering and Manufacturing T Level  ·  Material Processing, Treatment, Failure and Testing</a:t>
+            </a:r>
+          </a:p>
+        </p:txBody>
+      </p:sp>
+      <p:sp>
+        <p:nvSpPr>
+          <p:cNvPr id="5" name="TextBox 4"/>
+          <p:cNvSpPr txBox="1"/>
+          <p:nvPr/>
+        </p:nvSpPr>
+        <p:spPr>
+          <a:xfrm>
+            <a:off x="10728655" y="6446520"/>
+            <a:ext cx="914400" cy="274320"/>
+          </a:xfrm>
+          <a:prstGeom prst="rect">
+            <a:avLst/>
+          </a:prstGeom>
+          <a:noFill/>
+        </p:spPr>
+        <p:txBody>
+          <a:bodyPr wrap="square" anchor="t" lIns="0" rIns="0" tIns="0" bIns="0"/>
+          <a:lstStyle/>
+          <a:p>
+            <a:pPr algn="r"/>
+            <a:r>
+              <a:rPr sz="1000" b="0" i="0">
+                <a:solidFill>
+                  <a:srgbClr val="54595D"/>
+                </a:solidFill>
+                <a:latin typeface="Calibri"/>
+              </a:rPr>
+              <a:t>9</a:t>
+            </a:r>
+          </a:p>
+        </p:txBody>
+      </p:sp>
+      <p:sp>
+        <p:nvSpPr>
+          <p:cNvPr id="6" name="TextBox 5"/>
+          <p:cNvSpPr txBox="1"/>
+          <p:nvPr/>
+        </p:nvSpPr>
+        <p:spPr>
+          <a:xfrm>
+            <a:off x="548640" y="1554480"/>
+            <a:ext cx="6720840" cy="4617720"/>
+          </a:xfrm>
+          <a:prstGeom prst="rect">
+            <a:avLst/>
+          </a:prstGeom>
+          <a:noFill/>
+        </p:spPr>
+        <p:txBody>
+          <a:bodyPr wrap="square" lIns="0" rIns="0" tIns="0" bIns="0">
+            <a:spAutoFit/>
+          </a:bodyPr>
+          <a:lstStyle/>
+          <a:p>
+            <a:pPr>
+              <a:spcAft>
+                <a:spcPts val="1200"/>
+              </a:spcAft>
+            </a:pPr>
+            <a:r>
+              <a:rPr sz="2000" b="0">
+                <a:solidFill>
+                  <a:srgbClr val="202122"/>
+                </a:solidFill>
+                <a:latin typeface="Calibri"/>
+              </a:rPr>
+              <a:t>A tensile test stretches a sample until it breaks, recording the load and extension.</a:t>
+            </a:r>
+          </a:p>
+          <a:p>
+            <a:pPr>
+              <a:spcAft>
+                <a:spcPts val="1200"/>
+              </a:spcAft>
+            </a:pPr>
+            <a:r>
+              <a:rPr sz="2000" b="0">
+                <a:solidFill>
+                  <a:srgbClr val="202122"/>
+                </a:solidFill>
+                <a:latin typeface="Calibri"/>
+              </a:rPr>
+              <a:t>Stress = force / cross-sectional area. Strain = extension / original length (no units). In the elastic region, extension is proportional to load (Hooke's law) and the sample returns to shape. Young's modulus = stress / strain in this region, a measure of stiffness.</a:t>
+            </a:r>
+          </a:p>
+          <a:p>
+            <a:pPr>
+              <a:spcAft>
+                <a:spcPts val="1200"/>
+              </a:spcAft>
+            </a:pPr>
+            <a:r>
+              <a:rPr sz="2000" b="0">
+                <a:solidFill>
+                  <a:srgbClr val="202122"/>
+                </a:solidFill>
+                <a:latin typeface="Calibri"/>
+              </a:rPr>
+              <a:t>Beyond the elastic limit it deforms plastically. The ultimate tensile strength is the maximum stress; after that the sample narrows (necks) and fractures.</a:t>
+            </a:r>
+          </a:p>
+          <a:p>
+            <a:pPr>
+              <a:spcAft>
+                <a:spcPts val="1200"/>
+              </a:spcAft>
+            </a:pPr>
+            <a:r>
+              <a:rPr sz="2000" b="0">
+                <a:solidFill>
+                  <a:srgbClr val="202122"/>
+                </a:solidFill>
+                <a:latin typeface="Calibri"/>
+              </a:rPr>
+              <a:t>Other tests include hardness, impact (toughness), fatigue (Wohler), wear and corrosion.</a:t>
+            </a:r>
+          </a:p>
+        </p:txBody>
+      </p:sp>
+      <p:sp>
+        <p:nvSpPr>
+          <p:cNvPr id="7" name="Rounded Rectangle 6"/>
           <p:cNvSpPr/>
           <p:nvPr/>
         </p:nvSpPr>
         <p:spPr>
           <a:xfrm>
-            <a:off x="548640" y="1737360"/>
-            <a:ext cx="502920" cy="502920"/>
+            <a:off x="7772400" y="1554480"/>
+            <a:ext cx="3867912" cy="4526280"/>
+          </a:xfrm>
+          <a:prstGeom prst="roundRect">
+            <a:avLst>
+              <a:gd name="adj" fmla="val 8000"/>
+            </a:avLst>
+          </a:prstGeom>
+          <a:solidFill>
+            <a:srgbClr val="03306E"/>
+          </a:solidFill>
+          <a:ln>
+            <a:noFill/>
+          </a:ln>
+          <a:effectLst/>
+        </p:spPr>
+        <p:style>
+          <a:lnRef idx="1">
+            <a:schemeClr val="accent1"/>
+          </a:lnRef>
+          <a:fillRef idx="3">
+            <a:schemeClr val="accent1"/>
+          </a:fillRef>
+          <a:effectRef idx="2">
+            <a:schemeClr val="accent1"/>
+          </a:effectRef>
+          <a:fontRef idx="minor">
+            <a:schemeClr val="lt1"/>
+          </a:fontRef>
+        </p:style>
+        <p:txBody>
+          <a:bodyPr rtlCol="0" anchor="ctr"/>
+          <a:lstStyle/>
+          <a:p/>
+        </p:txBody>
+      </p:sp>
+      <p:sp>
+        <p:nvSpPr>
+          <p:cNvPr id="8" name="Oval 7"/>
+          <p:cNvSpPr/>
+          <p:nvPr/>
+        </p:nvSpPr>
+        <p:spPr>
+          <a:xfrm>
+            <a:off x="8046720" y="1828800"/>
+            <a:ext cx="548640" cy="548640"/>
           </a:xfrm>
           <a:prstGeom prst="ellipse">
             <a:avLst/>
@@ -8402,185 +11549,13 @@
           <a:p>
             <a:pPr algn="ctr"/>
             <a:r>
-              <a:rPr sz="1700" b="1">
+              <a:rPr sz="1300" b="1">
                 <a:solidFill>
                   <a:srgbClr val="202122"/>
                 </a:solidFill>
                 <a:latin typeface="Calibri"/>
               </a:rPr>
-              <a:t>1</a:t>
-            </a:r>
-          </a:p>
-        </p:txBody>
-      </p:sp>
-      <p:sp>
-        <p:nvSpPr>
-          <p:cNvPr id="5" name="TextBox 4"/>
-          <p:cNvSpPr txBox="1"/>
-          <p:nvPr/>
-        </p:nvSpPr>
-        <p:spPr>
-          <a:xfrm>
-            <a:off x="1325880" y="1645920"/>
-            <a:ext cx="6583680" cy="822960"/>
-          </a:xfrm>
-          <a:prstGeom prst="rect">
-            <a:avLst/>
-          </a:prstGeom>
-          <a:noFill/>
-        </p:spPr>
-        <p:txBody>
-          <a:bodyPr wrap="square" anchor="ctr" lIns="0" rIns="0" tIns="0" bIns="0"/>
-          <a:lstStyle/>
-          <a:p>
-            <a:pPr algn="l"/>
-            <a:r>
-              <a:rPr sz="2000" b="0" i="0">
-                <a:solidFill>
-                  <a:srgbClr val="FFFFFF"/>
-                </a:solidFill>
-                <a:latin typeface="Calibri"/>
-              </a:rPr>
-              <a:t>Why is galvanising called sacrificial protection?</a:t>
-            </a:r>
-          </a:p>
-        </p:txBody>
-      </p:sp>
-      <p:sp>
-        <p:nvSpPr>
-          <p:cNvPr id="6" name="Oval 5"/>
-          <p:cNvSpPr/>
-          <p:nvPr/>
-        </p:nvSpPr>
-        <p:spPr>
-          <a:xfrm>
-            <a:off x="548640" y="2697480"/>
-            <a:ext cx="502920" cy="502920"/>
-          </a:xfrm>
-          <a:prstGeom prst="ellipse">
-            <a:avLst/>
-          </a:prstGeom>
-          <a:solidFill>
-            <a:srgbClr val="F2B705"/>
-          </a:solidFill>
-          <a:ln>
-            <a:noFill/>
-          </a:ln>
-          <a:effectLst/>
-        </p:spPr>
-        <p:style>
-          <a:lnRef idx="1">
-            <a:schemeClr val="accent1"/>
-          </a:lnRef>
-          <a:fillRef idx="3">
-            <a:schemeClr val="accent1"/>
-          </a:fillRef>
-          <a:effectRef idx="2">
-            <a:schemeClr val="accent1"/>
-          </a:effectRef>
-          <a:fontRef idx="minor">
-            <a:schemeClr val="lt1"/>
-          </a:fontRef>
-        </p:style>
-        <p:txBody>
-          <a:bodyPr rtlCol="0" anchor="ctr" lIns="0" rIns="0" tIns="0" bIns="0"/>
-          <a:lstStyle/>
-          <a:p>
-            <a:pPr algn="ctr"/>
-            <a:r>
-              <a:rPr sz="1700" b="1">
-                <a:solidFill>
-                  <a:srgbClr val="202122"/>
-                </a:solidFill>
-                <a:latin typeface="Calibri"/>
-              </a:rPr>
-              <a:t>2</a:t>
-            </a:r>
-          </a:p>
-        </p:txBody>
-      </p:sp>
-      <p:sp>
-        <p:nvSpPr>
-          <p:cNvPr id="7" name="TextBox 6"/>
-          <p:cNvSpPr txBox="1"/>
-          <p:nvPr/>
-        </p:nvSpPr>
-        <p:spPr>
-          <a:xfrm>
-            <a:off x="1325880" y="2606040"/>
-            <a:ext cx="6583680" cy="822960"/>
-          </a:xfrm>
-          <a:prstGeom prst="rect">
-            <a:avLst/>
-          </a:prstGeom>
-          <a:noFill/>
-        </p:spPr>
-        <p:txBody>
-          <a:bodyPr wrap="square" anchor="ctr" lIns="0" rIns="0" tIns="0" bIns="0"/>
-          <a:lstStyle/>
-          <a:p>
-            <a:pPr algn="l"/>
-            <a:r>
-              <a:rPr sz="2000" b="0" i="0">
-                <a:solidFill>
-                  <a:srgbClr val="FFFFFF"/>
-                </a:solidFill>
-                <a:latin typeface="Calibri"/>
-              </a:rPr>
-              <a:t>Where would creep be a concern?</a:t>
-            </a:r>
-          </a:p>
-        </p:txBody>
-      </p:sp>
-      <p:sp>
-        <p:nvSpPr>
-          <p:cNvPr id="8" name="Oval 7"/>
-          <p:cNvSpPr/>
-          <p:nvPr/>
-        </p:nvSpPr>
-        <p:spPr>
-          <a:xfrm>
-            <a:off x="548640" y="3657600"/>
-            <a:ext cx="502920" cy="502920"/>
-          </a:xfrm>
-          <a:prstGeom prst="ellipse">
-            <a:avLst/>
-          </a:prstGeom>
-          <a:solidFill>
-            <a:srgbClr val="F2B705"/>
-          </a:solidFill>
-          <a:ln>
-            <a:noFill/>
-          </a:ln>
-          <a:effectLst/>
-        </p:spPr>
-        <p:style>
-          <a:lnRef idx="1">
-            <a:schemeClr val="accent1"/>
-          </a:lnRef>
-          <a:fillRef idx="3">
-            <a:schemeClr val="accent1"/>
-          </a:fillRef>
-          <a:effectRef idx="2">
-            <a:schemeClr val="accent1"/>
-          </a:effectRef>
-          <a:fontRef idx="minor">
-            <a:schemeClr val="lt1"/>
-          </a:fontRef>
-        </p:style>
-        <p:txBody>
-          <a:bodyPr rtlCol="0" anchor="ctr" lIns="0" rIns="0" tIns="0" bIns="0"/>
-          <a:lstStyle/>
-          <a:p>
-            <a:pPr algn="ctr"/>
-            <a:r>
-              <a:rPr sz="1700" b="1">
-                <a:solidFill>
-                  <a:srgbClr val="202122"/>
-                </a:solidFill>
-                <a:latin typeface="Calibri"/>
-              </a:rPr>
-              <a:t>3</a:t>
+              <a:t>e.g.</a:t>
             </a:r>
           </a:p>
         </p:txBody>
@@ -8593,8 +11568,8 @@
         </p:nvSpPr>
         <p:spPr>
           <a:xfrm>
-            <a:off x="1325880" y="3566160"/>
-            <a:ext cx="6583680" cy="822960"/>
+            <a:off x="8046720" y="2560320"/>
+            <a:ext cx="3291840" cy="365760"/>
           </a:xfrm>
           <a:prstGeom prst="rect">
             <a:avLst/>
@@ -8602,194 +11577,51 @@
           <a:noFill/>
         </p:spPr>
         <p:txBody>
-          <a:bodyPr wrap="square" anchor="ctr" lIns="0" rIns="0" tIns="0" bIns="0"/>
+          <a:bodyPr wrap="square" anchor="t" lIns="0" rIns="0" tIns="0" bIns="0"/>
           <a:lstStyle/>
           <a:p>
             <a:pPr algn="l"/>
             <a:r>
-              <a:rPr sz="2000" b="0" i="0">
+              <a:rPr sz="1300" b="1" i="0">
+                <a:solidFill>
+                  <a:srgbClr val="A9C8F0"/>
+                </a:solidFill>
+                <a:latin typeface="Calibri"/>
+              </a:rPr>
+              <a:t>EXAMPLE</a:t>
+            </a:r>
+          </a:p>
+        </p:txBody>
+      </p:sp>
+      <p:sp>
+        <p:nvSpPr>
+          <p:cNvPr id="10" name="TextBox 9"/>
+          <p:cNvSpPr txBox="1"/>
+          <p:nvPr/>
+        </p:nvSpPr>
+        <p:spPr>
+          <a:xfrm>
+            <a:off x="8046720" y="2971800"/>
+            <a:ext cx="3291840" cy="2971800"/>
+          </a:xfrm>
+          <a:prstGeom prst="rect">
+            <a:avLst/>
+          </a:prstGeom>
+          <a:noFill/>
+        </p:spPr>
+        <p:txBody>
+          <a:bodyPr wrap="square" anchor="t" lIns="0" rIns="0" tIns="0" bIns="0"/>
+          <a:lstStyle/>
+          <a:p>
+            <a:pPr algn="l"/>
+            <a:r>
+              <a:rPr sz="1900" b="0" i="0">
                 <a:solidFill>
                   <a:srgbClr val="FFFFFF"/>
                 </a:solidFill>
-                <a:latin typeface="Calibri"/>
-              </a:rPr>
-              <a:t>What does Young's modulus tell you?</a:t>
-            </a:r>
-          </a:p>
-        </p:txBody>
-      </p:sp>
-      <p:sp>
-        <p:nvSpPr>
-          <p:cNvPr id="10" name="Rounded Rectangle 9"/>
-          <p:cNvSpPr/>
-          <p:nvPr/>
-        </p:nvSpPr>
-        <p:spPr>
-          <a:xfrm>
-            <a:off x="8229600" y="1645920"/>
-            <a:ext cx="3410712" cy="2926080"/>
-          </a:xfrm>
-          <a:prstGeom prst="roundRect">
-            <a:avLst>
-              <a:gd name="adj" fmla="val 8000"/>
-            </a:avLst>
-          </a:prstGeom>
-          <a:solidFill>
-            <a:srgbClr val="0645AD"/>
-          </a:solidFill>
-          <a:ln>
-            <a:noFill/>
-          </a:ln>
-          <a:effectLst/>
-        </p:spPr>
-        <p:style>
-          <a:lnRef idx="1">
-            <a:schemeClr val="accent1"/>
-          </a:lnRef>
-          <a:fillRef idx="3">
-            <a:schemeClr val="accent1"/>
-          </a:fillRef>
-          <a:effectRef idx="2">
-            <a:schemeClr val="accent1"/>
-          </a:effectRef>
-          <a:fontRef idx="minor">
-            <a:schemeClr val="lt1"/>
-          </a:fontRef>
-        </p:style>
-        <p:txBody>
-          <a:bodyPr rtlCol="0" anchor="ctr"/>
-          <a:lstStyle/>
-          <a:p/>
-        </p:txBody>
-      </p:sp>
-      <p:sp>
-        <p:nvSpPr>
-          <p:cNvPr id="11" name="TextBox 10"/>
-          <p:cNvSpPr txBox="1"/>
-          <p:nvPr/>
-        </p:nvSpPr>
-        <p:spPr>
-          <a:xfrm>
-            <a:off x="8503920" y="1874519"/>
-            <a:ext cx="2926080" cy="365760"/>
-          </a:xfrm>
-          <a:prstGeom prst="rect">
-            <a:avLst/>
-          </a:prstGeom>
-          <a:noFill/>
-        </p:spPr>
-        <p:txBody>
-          <a:bodyPr wrap="square" anchor="t" lIns="0" rIns="0" tIns="0" bIns="0"/>
-          <a:lstStyle/>
-          <a:p>
-            <a:pPr algn="l"/>
-            <a:r>
-              <a:rPr sz="1300" b="1" i="0">
-                <a:solidFill>
-                  <a:srgbClr val="A9C8F0"/>
-                </a:solidFill>
-                <a:latin typeface="Calibri"/>
-              </a:rPr>
-              <a:t>REVISE THIS TOPIC</a:t>
-            </a:r>
-          </a:p>
-        </p:txBody>
-      </p:sp>
-      <p:sp>
-        <p:nvSpPr>
-          <p:cNvPr id="12" name="TextBox 11"/>
-          <p:cNvSpPr txBox="1"/>
-          <p:nvPr/>
-        </p:nvSpPr>
-        <p:spPr>
-          <a:xfrm>
-            <a:off x="8503920" y="2286000"/>
-            <a:ext cx="2926080" cy="548640"/>
-          </a:xfrm>
-          <a:prstGeom prst="rect">
-            <a:avLst/>
-          </a:prstGeom>
-          <a:noFill/>
-        </p:spPr>
-        <p:txBody>
-          <a:bodyPr wrap="square" anchor="t" lIns="0" rIns="0" tIns="0" bIns="0"/>
-          <a:lstStyle/>
-          <a:p>
-            <a:pPr algn="l"/>
-            <a:r>
-              <a:rPr sz="1400" b="0" i="0">
-                <a:solidFill>
-                  <a:srgbClr val="FFFFFF"/>
-                </a:solidFill>
-                <a:latin typeface="Calibri"/>
-              </a:rPr>
-              <a:t>Revision notes for this lesson are on the study wiki:</a:t>
-            </a:r>
-          </a:p>
-        </p:txBody>
-      </p:sp>
-      <p:sp>
-        <p:nvSpPr>
-          <p:cNvPr id="13" name="TextBox 12"/>
-          <p:cNvSpPr txBox="1"/>
-          <p:nvPr/>
-        </p:nvSpPr>
-        <p:spPr>
-          <a:xfrm>
-            <a:off x="8503920" y="2926080"/>
-            <a:ext cx="2926080" cy="1463040"/>
-          </a:xfrm>
-          <a:prstGeom prst="rect">
-            <a:avLst/>
-          </a:prstGeom>
-          <a:noFill/>
-        </p:spPr>
-        <p:txBody>
-          <a:bodyPr wrap="square" anchor="t" lIns="0" rIns="0" tIns="0" bIns="0"/>
-          <a:lstStyle/>
-          <a:p>
-            <a:pPr algn="l"/>
-            <a:r>
-              <a:rPr sz="2000" b="1" i="0">
-                <a:solidFill>
-                  <a:srgbClr val="FFFFFF"/>
-                </a:solidFill>
                 <a:latin typeface="Cambria"/>
               </a:rPr>
-              <a:t>Engineering Core, Part 1</a:t>
-            </a:r>
-          </a:p>
-        </p:txBody>
-      </p:sp>
-      <p:sp>
-        <p:nvSpPr>
-          <p:cNvPr id="14" name="TextBox 13"/>
-          <p:cNvSpPr txBox="1"/>
-          <p:nvPr/>
-        </p:nvSpPr>
-        <p:spPr>
-          <a:xfrm>
-            <a:off x="548640" y="5669280"/>
-            <a:ext cx="11094415" cy="548640"/>
-          </a:xfrm>
-          <a:prstGeom prst="rect">
-            <a:avLst/>
-          </a:prstGeom>
-          <a:noFill/>
-        </p:spPr>
-        <p:txBody>
-          <a:bodyPr wrap="square" anchor="t" lIns="0" rIns="0" tIns="0" bIns="0"/>
-          <a:lstStyle/>
-          <a:p>
-            <a:pPr algn="l"/>
-            <a:r>
-              <a:rPr sz="1200" b="0" i="0">
-                <a:solidFill>
-                  <a:srgbClr val="A9C8F0"/>
-                </a:solidFill>
-                <a:latin typeface="Calibri"/>
-              </a:rPr>
-              <a:t>https://lana6478.github.io/T-level-Design-Development-Engineering-Manufacturing/#/01-core-component/01-engineering-core-part1.md</a:t>
+              <a:t>A 10 kN load on a 50 square millimetre bar gives a stress of 10,000 / 0.00005 = 200 MPa.</a:t>
             </a:r>
           </a:p>
         </p:txBody>
